--- a/Aula 06/ComandosDCL.pptx
+++ b/Aula 06/ComandosDCL.pptx
@@ -13,10 +13,21 @@
     <p:sldId id="278" r:id="rId7"/>
     <p:sldId id="266" r:id="rId8"/>
     <p:sldId id="267" r:id="rId9"/>
-    <p:sldId id="276" r:id="rId10"/>
-    <p:sldId id="277" r:id="rId11"/>
-    <p:sldId id="268" r:id="rId12"/>
-    <p:sldId id="275" r:id="rId13"/>
+    <p:sldId id="285" r:id="rId10"/>
+    <p:sldId id="290" r:id="rId11"/>
+    <p:sldId id="286" r:id="rId12"/>
+    <p:sldId id="287" r:id="rId13"/>
+    <p:sldId id="288" r:id="rId14"/>
+    <p:sldId id="289" r:id="rId15"/>
+    <p:sldId id="279" r:id="rId16"/>
+    <p:sldId id="280" r:id="rId17"/>
+    <p:sldId id="281" r:id="rId18"/>
+    <p:sldId id="282" r:id="rId19"/>
+    <p:sldId id="276" r:id="rId20"/>
+    <p:sldId id="277" r:id="rId21"/>
+    <p:sldId id="268" r:id="rId22"/>
+    <p:sldId id="283" r:id="rId23"/>
+    <p:sldId id="275" r:id="rId24"/>
   </p:sldIdLst>
   <p:sldSz cx="12192000" cy="6858000"/>
   <p:notesSz cx="6858000" cy="9144000"/>
@@ -270,7 +281,7 @@
           <a:p>
             <a:fld id="{1C45F205-BC06-4923-AE40-F9637F79EC90}" type="datetimeFigureOut">
               <a:rPr lang="pt-BR" smtClean="0"/>
-              <a:t>20/02/2026</a:t>
+              <a:t>18/03/2026</a:t>
             </a:fld>
             <a:endParaRPr lang="pt-BR"/>
           </a:p>
@@ -468,7 +479,7 @@
           <a:p>
             <a:fld id="{1C45F205-BC06-4923-AE40-F9637F79EC90}" type="datetimeFigureOut">
               <a:rPr lang="pt-BR" smtClean="0"/>
-              <a:t>20/02/2026</a:t>
+              <a:t>18/03/2026</a:t>
             </a:fld>
             <a:endParaRPr lang="pt-BR"/>
           </a:p>
@@ -676,7 +687,7 @@
           <a:p>
             <a:fld id="{1C45F205-BC06-4923-AE40-F9637F79EC90}" type="datetimeFigureOut">
               <a:rPr lang="pt-BR" smtClean="0"/>
-              <a:t>20/02/2026</a:t>
+              <a:t>18/03/2026</a:t>
             </a:fld>
             <a:endParaRPr lang="pt-BR"/>
           </a:p>
@@ -874,7 +885,7 @@
           <a:p>
             <a:fld id="{1C45F205-BC06-4923-AE40-F9637F79EC90}" type="datetimeFigureOut">
               <a:rPr lang="pt-BR" smtClean="0"/>
-              <a:t>20/02/2026</a:t>
+              <a:t>18/03/2026</a:t>
             </a:fld>
             <a:endParaRPr lang="pt-BR"/>
           </a:p>
@@ -1149,7 +1160,7 @@
           <a:p>
             <a:fld id="{1C45F205-BC06-4923-AE40-F9637F79EC90}" type="datetimeFigureOut">
               <a:rPr lang="pt-BR" smtClean="0"/>
-              <a:t>20/02/2026</a:t>
+              <a:t>18/03/2026</a:t>
             </a:fld>
             <a:endParaRPr lang="pt-BR"/>
           </a:p>
@@ -1414,7 +1425,7 @@
           <a:p>
             <a:fld id="{1C45F205-BC06-4923-AE40-F9637F79EC90}" type="datetimeFigureOut">
               <a:rPr lang="pt-BR" smtClean="0"/>
-              <a:t>20/02/2026</a:t>
+              <a:t>18/03/2026</a:t>
             </a:fld>
             <a:endParaRPr lang="pt-BR"/>
           </a:p>
@@ -1826,7 +1837,7 @@
           <a:p>
             <a:fld id="{1C45F205-BC06-4923-AE40-F9637F79EC90}" type="datetimeFigureOut">
               <a:rPr lang="pt-BR" smtClean="0"/>
-              <a:t>20/02/2026</a:t>
+              <a:t>18/03/2026</a:t>
             </a:fld>
             <a:endParaRPr lang="pt-BR"/>
           </a:p>
@@ -1967,7 +1978,7 @@
           <a:p>
             <a:fld id="{1C45F205-BC06-4923-AE40-F9637F79EC90}" type="datetimeFigureOut">
               <a:rPr lang="pt-BR" smtClean="0"/>
-              <a:t>20/02/2026</a:t>
+              <a:t>18/03/2026</a:t>
             </a:fld>
             <a:endParaRPr lang="pt-BR"/>
           </a:p>
@@ -2080,7 +2091,7 @@
           <a:p>
             <a:fld id="{1C45F205-BC06-4923-AE40-F9637F79EC90}" type="datetimeFigureOut">
               <a:rPr lang="pt-BR" smtClean="0"/>
-              <a:t>20/02/2026</a:t>
+              <a:t>18/03/2026</a:t>
             </a:fld>
             <a:endParaRPr lang="pt-BR"/>
           </a:p>
@@ -2391,7 +2402,7 @@
           <a:p>
             <a:fld id="{1C45F205-BC06-4923-AE40-F9637F79EC90}" type="datetimeFigureOut">
               <a:rPr lang="pt-BR" smtClean="0"/>
-              <a:t>20/02/2026</a:t>
+              <a:t>18/03/2026</a:t>
             </a:fld>
             <a:endParaRPr lang="pt-BR"/>
           </a:p>
@@ -2679,7 +2690,7 @@
           <a:p>
             <a:fld id="{1C45F205-BC06-4923-AE40-F9637F79EC90}" type="datetimeFigureOut">
               <a:rPr lang="pt-BR" smtClean="0"/>
-              <a:t>20/02/2026</a:t>
+              <a:t>18/03/2026</a:t>
             </a:fld>
             <a:endParaRPr lang="pt-BR"/>
           </a:p>
@@ -2920,7 +2931,7 @@
           <a:p>
             <a:fld id="{1C45F205-BC06-4923-AE40-F9637F79EC90}" type="datetimeFigureOut">
               <a:rPr lang="pt-BR" smtClean="0"/>
-              <a:t>20/02/2026</a:t>
+              <a:t>18/03/2026</a:t>
             </a:fld>
             <a:endParaRPr lang="pt-BR"/>
           </a:p>
@@ -3536,7 +3547,7 @@
         <p:cNvPr id="1" name="">
           <a:extLst>
             <a:ext uri="{FF2B5EF4-FFF2-40B4-BE49-F238E27FC236}">
-              <a16:creationId xmlns:a16="http://schemas.microsoft.com/office/drawing/2014/main" id="{7E5A10E2-91E7-2CA5-10D1-A503A44002E2}"/>
+              <a16:creationId xmlns:a16="http://schemas.microsoft.com/office/drawing/2014/main" id="{F840AFE3-AFDB-FB3C-8060-D0D2A21ECAA0}"/>
             </a:ext>
           </a:extLst>
         </p:cNvPr>
@@ -3556,7 +3567,7 @@
           <p:cNvPr id="5" name="Imagem 4">
             <a:extLst>
               <a:ext uri="{FF2B5EF4-FFF2-40B4-BE49-F238E27FC236}">
-                <a16:creationId xmlns:a16="http://schemas.microsoft.com/office/drawing/2014/main" id="{7F8F9171-963C-9D10-213C-2AF85B59BCBB}"/>
+                <a16:creationId xmlns:a16="http://schemas.microsoft.com/office/drawing/2014/main" id="{376C80C5-396F-5BA6-0DA5-12676872AAA5}"/>
               </a:ext>
             </a:extLst>
           </p:cNvPr>
@@ -3579,7 +3590,7 @@
         </p:blipFill>
         <p:spPr>
           <a:xfrm>
-            <a:off x="0" y="0"/>
+            <a:off x="-61546" y="0"/>
             <a:ext cx="12192000" cy="6858000"/>
           </a:xfrm>
           <a:prstGeom prst="rect">
@@ -3587,40 +3598,430 @@
           </a:prstGeom>
         </p:spPr>
       </p:pic>
-      <p:pic>
-        <p:nvPicPr>
-          <p:cNvPr id="3" name="Imagem 2" descr="Interface gráfica do usuário, Texto, Aplicativo, Email&#10;&#10;O conteúdo gerado por IA pode estar incorreto.">
-            <a:extLst>
-              <a:ext uri="{FF2B5EF4-FFF2-40B4-BE49-F238E27FC236}">
-                <a16:creationId xmlns:a16="http://schemas.microsoft.com/office/drawing/2014/main" id="{6928AEB7-DE03-15B3-9857-8AD37D13D9CD}"/>
-              </a:ext>
-            </a:extLst>
-          </p:cNvPr>
-          <p:cNvPicPr>
-            <a:picLocks noChangeAspect="1"/>
-          </p:cNvPicPr>
+      <p:sp>
+        <p:nvSpPr>
+          <p:cNvPr id="2" name="CaixaDeTexto 1">
+            <a:extLst>
+              <a:ext uri="{FF2B5EF4-FFF2-40B4-BE49-F238E27FC236}">
+                <a16:creationId xmlns:a16="http://schemas.microsoft.com/office/drawing/2014/main" id="{B2D60D24-EBAB-3AE5-E399-B5F4B17851EA}"/>
+              </a:ext>
+            </a:extLst>
+          </p:cNvPr>
+          <p:cNvSpPr txBox="1"/>
           <p:nvPr/>
-        </p:nvPicPr>
-        <p:blipFill>
-          <a:blip r:embed="rId3"/>
-          <a:stretch>
-            <a:fillRect/>
-          </a:stretch>
-        </p:blipFill>
+        </p:nvSpPr>
         <p:spPr>
           <a:xfrm>
-            <a:off x="1104203" y="647312"/>
-            <a:ext cx="9983593" cy="5563376"/>
+            <a:off x="4806553" y="220160"/>
+            <a:ext cx="2455801" cy="646331"/>
           </a:xfrm>
           <a:prstGeom prst="rect">
             <a:avLst/>
           </a:prstGeom>
-        </p:spPr>
-      </p:pic>
+          <a:noFill/>
+        </p:spPr>
+        <p:txBody>
+          <a:bodyPr wrap="square" rtlCol="0">
+            <a:spAutoFit/>
+          </a:bodyPr>
+          <a:lstStyle/>
+          <a:p>
+            <a:r>
+              <a:rPr lang="en-US" sz="3600" dirty="0"/>
+              <a:t>Role (Papel)</a:t>
+            </a:r>
+            <a:endParaRPr lang="pt-BR" sz="3600" dirty="0"/>
+          </a:p>
+        </p:txBody>
+      </p:sp>
+      <p:sp>
+        <p:nvSpPr>
+          <p:cNvPr id="3" name="CaixaDeTexto 2">
+            <a:extLst>
+              <a:ext uri="{FF2B5EF4-FFF2-40B4-BE49-F238E27FC236}">
+                <a16:creationId xmlns:a16="http://schemas.microsoft.com/office/drawing/2014/main" id="{99E4D481-119D-650F-85C9-AC003E110667}"/>
+              </a:ext>
+            </a:extLst>
+          </p:cNvPr>
+          <p:cNvSpPr txBox="1"/>
+          <p:nvPr/>
+        </p:nvSpPr>
+        <p:spPr>
+          <a:xfrm>
+            <a:off x="5294800" y="1231104"/>
+            <a:ext cx="1479306" cy="584775"/>
+          </a:xfrm>
+          <a:prstGeom prst="rect">
+            <a:avLst/>
+          </a:prstGeom>
+          <a:noFill/>
+        </p:spPr>
+        <p:txBody>
+          <a:bodyPr wrap="square" rtlCol="0">
+            <a:spAutoFit/>
+          </a:bodyPr>
+          <a:lstStyle/>
+          <a:p>
+            <a:pPr algn="ctr"/>
+            <a:r>
+              <a:rPr lang="en-US" sz="3200" dirty="0" err="1"/>
+              <a:t>Criação</a:t>
+            </a:r>
+            <a:endParaRPr lang="en-US" sz="3200" dirty="0"/>
+          </a:p>
+        </p:txBody>
+      </p:sp>
+      <p:sp>
+        <p:nvSpPr>
+          <p:cNvPr id="4" name="CaixaDeTexto 3">
+            <a:extLst>
+              <a:ext uri="{FF2B5EF4-FFF2-40B4-BE49-F238E27FC236}">
+                <a16:creationId xmlns:a16="http://schemas.microsoft.com/office/drawing/2014/main" id="{50F6C80D-EE8E-969C-FD1D-30EC24868AD3}"/>
+              </a:ext>
+            </a:extLst>
+          </p:cNvPr>
+          <p:cNvSpPr txBox="1"/>
+          <p:nvPr/>
+        </p:nvSpPr>
+        <p:spPr>
+          <a:xfrm>
+            <a:off x="958362" y="2180492"/>
+            <a:ext cx="10550769" cy="3970318"/>
+          </a:xfrm>
+          <a:prstGeom prst="rect">
+            <a:avLst/>
+          </a:prstGeom>
+          <a:noFill/>
+        </p:spPr>
+        <p:txBody>
+          <a:bodyPr wrap="square" rtlCol="0">
+            <a:spAutoFit/>
+          </a:bodyPr>
+          <a:lstStyle/>
+          <a:p>
+            <a:pPr algn="ctr"/>
+            <a:r>
+              <a:rPr lang="pt-BR" sz="2800" dirty="0">
+                <a:solidFill>
+                  <a:srgbClr val="0070C0"/>
+                </a:solidFill>
+              </a:rPr>
+              <a:t>CREATE ROLE ‘</a:t>
+            </a:r>
+            <a:r>
+              <a:rPr lang="pt-BR" sz="2800" dirty="0" err="1">
+                <a:solidFill>
+                  <a:srgbClr val="0070C0"/>
+                </a:solidFill>
+              </a:rPr>
+              <a:t>nomeRole</a:t>
+            </a:r>
+            <a:r>
+              <a:rPr lang="pt-BR" sz="2800" dirty="0">
+                <a:solidFill>
+                  <a:srgbClr val="0070C0"/>
+                </a:solidFill>
+              </a:rPr>
+              <a:t>’;</a:t>
+            </a:r>
+          </a:p>
+          <a:p>
+            <a:pPr algn="ctr"/>
+            <a:endParaRPr lang="pt-BR" sz="2800" dirty="0"/>
+          </a:p>
+          <a:p>
+            <a:pPr algn="ctr"/>
+            <a:r>
+              <a:rPr lang="en-US" sz="2800" dirty="0">
+                <a:solidFill>
+                  <a:schemeClr val="tx1">
+                    <a:lumMod val="50000"/>
+                    <a:lumOff val="50000"/>
+                  </a:schemeClr>
+                </a:solidFill>
+              </a:rPr>
+              <a:t>GRANT [</a:t>
+            </a:r>
+            <a:r>
+              <a:rPr lang="en-US" sz="2800" dirty="0" err="1">
+                <a:solidFill>
+                  <a:schemeClr val="tx1">
+                    <a:lumMod val="50000"/>
+                    <a:lumOff val="50000"/>
+                  </a:schemeClr>
+                </a:solidFill>
+              </a:rPr>
+              <a:t>comandos</a:t>
+            </a:r>
+            <a:r>
+              <a:rPr lang="en-US" sz="2800" dirty="0">
+                <a:solidFill>
+                  <a:schemeClr val="tx1">
+                    <a:lumMod val="50000"/>
+                    <a:lumOff val="50000"/>
+                  </a:schemeClr>
+                </a:solidFill>
+              </a:rPr>
+              <a:t>] ON [database].[</a:t>
+            </a:r>
+            <a:r>
+              <a:rPr lang="en-US" sz="2800" dirty="0" err="1">
+                <a:solidFill>
+                  <a:schemeClr val="tx1">
+                    <a:lumMod val="50000"/>
+                    <a:lumOff val="50000"/>
+                  </a:schemeClr>
+                </a:solidFill>
+              </a:rPr>
+              <a:t>tabela</a:t>
+            </a:r>
+            <a:r>
+              <a:rPr lang="en-US" sz="2800" dirty="0">
+                <a:solidFill>
+                  <a:schemeClr val="tx1">
+                    <a:lumMod val="50000"/>
+                    <a:lumOff val="50000"/>
+                  </a:schemeClr>
+                </a:solidFill>
+              </a:rPr>
+              <a:t>] TO ‘</a:t>
+            </a:r>
+            <a:r>
+              <a:rPr lang="en-US" sz="2800" dirty="0" err="1">
+                <a:solidFill>
+                  <a:schemeClr val="tx1">
+                    <a:lumMod val="50000"/>
+                    <a:lumOff val="50000"/>
+                  </a:schemeClr>
+                </a:solidFill>
+              </a:rPr>
+              <a:t>nomeRole</a:t>
+            </a:r>
+            <a:r>
+              <a:rPr lang="en-US" sz="2800" dirty="0">
+                <a:solidFill>
+                  <a:schemeClr val="tx1">
+                    <a:lumMod val="50000"/>
+                    <a:lumOff val="50000"/>
+                  </a:schemeClr>
+                </a:solidFill>
+              </a:rPr>
+              <a:t>’;</a:t>
+            </a:r>
+          </a:p>
+          <a:p>
+            <a:pPr algn="ctr"/>
+            <a:endParaRPr lang="en-US" sz="2800" dirty="0">
+              <a:solidFill>
+                <a:schemeClr val="tx1">
+                  <a:lumMod val="50000"/>
+                  <a:lumOff val="50000"/>
+                </a:schemeClr>
+              </a:solidFill>
+            </a:endParaRPr>
+          </a:p>
+          <a:p>
+            <a:pPr algn="ctr"/>
+            <a:r>
+              <a:rPr lang="en-US" sz="2800" dirty="0">
+                <a:solidFill>
+                  <a:schemeClr val="tx1">
+                    <a:lumMod val="50000"/>
+                    <a:lumOff val="50000"/>
+                  </a:schemeClr>
+                </a:solidFill>
+              </a:rPr>
+              <a:t>CREATE USER ‘</a:t>
+            </a:r>
+            <a:r>
+              <a:rPr lang="en-US" sz="2800" dirty="0" err="1">
+                <a:solidFill>
+                  <a:schemeClr val="tx1">
+                    <a:lumMod val="50000"/>
+                    <a:lumOff val="50000"/>
+                  </a:schemeClr>
+                </a:solidFill>
+              </a:rPr>
+              <a:t>nomeUsuario</a:t>
+            </a:r>
+            <a:r>
+              <a:rPr lang="en-US" sz="2800" dirty="0">
+                <a:solidFill>
+                  <a:schemeClr val="tx1">
+                    <a:lumMod val="50000"/>
+                    <a:lumOff val="50000"/>
+                  </a:schemeClr>
+                </a:solidFill>
+              </a:rPr>
+              <a:t>’@’</a:t>
+            </a:r>
+            <a:r>
+              <a:rPr lang="en-US" sz="2800" dirty="0" err="1">
+                <a:solidFill>
+                  <a:schemeClr val="tx1">
+                    <a:lumMod val="50000"/>
+                    <a:lumOff val="50000"/>
+                  </a:schemeClr>
+                </a:solidFill>
+              </a:rPr>
+              <a:t>ip</a:t>
+            </a:r>
+            <a:r>
+              <a:rPr lang="en-US" sz="2800" dirty="0">
+                <a:solidFill>
+                  <a:schemeClr val="tx1">
+                    <a:lumMod val="50000"/>
+                    <a:lumOff val="50000"/>
+                  </a:schemeClr>
+                </a:solidFill>
+              </a:rPr>
+              <a:t>’ IDENTIFIED BY ‘</a:t>
+            </a:r>
+            <a:r>
+              <a:rPr lang="en-US" sz="2800" dirty="0" err="1">
+                <a:solidFill>
+                  <a:schemeClr val="tx1">
+                    <a:lumMod val="50000"/>
+                    <a:lumOff val="50000"/>
+                  </a:schemeClr>
+                </a:solidFill>
+              </a:rPr>
+              <a:t>senha</a:t>
+            </a:r>
+            <a:r>
+              <a:rPr lang="en-US" sz="2800" dirty="0">
+                <a:solidFill>
+                  <a:schemeClr val="tx1">
+                    <a:lumMod val="50000"/>
+                    <a:lumOff val="50000"/>
+                  </a:schemeClr>
+                </a:solidFill>
+              </a:rPr>
+              <a:t>’;</a:t>
+            </a:r>
+          </a:p>
+          <a:p>
+            <a:pPr algn="ctr"/>
+            <a:endParaRPr lang="en-US" sz="2800" dirty="0">
+              <a:solidFill>
+                <a:schemeClr val="tx1">
+                  <a:lumMod val="50000"/>
+                  <a:lumOff val="50000"/>
+                </a:schemeClr>
+              </a:solidFill>
+            </a:endParaRPr>
+          </a:p>
+          <a:p>
+            <a:pPr algn="ctr"/>
+            <a:r>
+              <a:rPr lang="it-IT" sz="2800" dirty="0">
+                <a:solidFill>
+                  <a:schemeClr val="tx1">
+                    <a:lumMod val="50000"/>
+                    <a:lumOff val="50000"/>
+                  </a:schemeClr>
+                </a:solidFill>
+              </a:rPr>
+              <a:t>GRANT ‘nomeRole’ TO ‘nomeUsuario’@’ip’;</a:t>
+            </a:r>
+          </a:p>
+          <a:p>
+            <a:pPr algn="ctr"/>
+            <a:endParaRPr lang="it-IT" sz="2800" dirty="0">
+              <a:solidFill>
+                <a:schemeClr val="tx1">
+                  <a:lumMod val="50000"/>
+                  <a:lumOff val="50000"/>
+                </a:schemeClr>
+              </a:solidFill>
+            </a:endParaRPr>
+          </a:p>
+          <a:p>
+            <a:pPr algn="ctr"/>
+            <a:r>
+              <a:rPr lang="pt-BR" sz="2800" dirty="0">
+                <a:solidFill>
+                  <a:schemeClr val="tx1">
+                    <a:lumMod val="50000"/>
+                    <a:lumOff val="50000"/>
+                  </a:schemeClr>
+                </a:solidFill>
+              </a:rPr>
+              <a:t>SET DEFAULT ROLE ‘</a:t>
+            </a:r>
+            <a:r>
+              <a:rPr lang="pt-BR" sz="2800" dirty="0" err="1">
+                <a:solidFill>
+                  <a:schemeClr val="tx1">
+                    <a:lumMod val="50000"/>
+                    <a:lumOff val="50000"/>
+                  </a:schemeClr>
+                </a:solidFill>
+              </a:rPr>
+              <a:t>nomeRole</a:t>
+            </a:r>
+            <a:r>
+              <a:rPr lang="pt-BR" sz="2800" dirty="0">
+                <a:solidFill>
+                  <a:schemeClr val="tx1">
+                    <a:lumMod val="50000"/>
+                    <a:lumOff val="50000"/>
+                  </a:schemeClr>
+                </a:solidFill>
+              </a:rPr>
+              <a:t>’ TO ‘</a:t>
+            </a:r>
+            <a:r>
+              <a:rPr lang="pt-BR" sz="2800" dirty="0" err="1">
+                <a:solidFill>
+                  <a:schemeClr val="tx1">
+                    <a:lumMod val="50000"/>
+                    <a:lumOff val="50000"/>
+                  </a:schemeClr>
+                </a:solidFill>
+              </a:rPr>
+              <a:t>nomeUsuario</a:t>
+            </a:r>
+            <a:r>
+              <a:rPr lang="pt-BR" sz="2800" dirty="0">
+                <a:solidFill>
+                  <a:schemeClr val="tx1">
+                    <a:lumMod val="50000"/>
+                    <a:lumOff val="50000"/>
+                  </a:schemeClr>
+                </a:solidFill>
+              </a:rPr>
+              <a:t>’@’</a:t>
+            </a:r>
+            <a:r>
+              <a:rPr lang="pt-BR" sz="2800" dirty="0" err="1">
+                <a:solidFill>
+                  <a:schemeClr val="tx1">
+                    <a:lumMod val="50000"/>
+                    <a:lumOff val="50000"/>
+                  </a:schemeClr>
+                </a:solidFill>
+              </a:rPr>
+              <a:t>ip</a:t>
+            </a:r>
+            <a:r>
+              <a:rPr lang="pt-BR" sz="2800" dirty="0">
+                <a:solidFill>
+                  <a:schemeClr val="tx1">
+                    <a:lumMod val="50000"/>
+                    <a:lumOff val="50000"/>
+                  </a:schemeClr>
+                </a:solidFill>
+              </a:rPr>
+              <a:t>’;</a:t>
+            </a:r>
+          </a:p>
+        </p:txBody>
+      </p:sp>
     </p:spTree>
     <p:extLst>
       <p:ext uri="{BB962C8B-B14F-4D97-AF65-F5344CB8AC3E}">
-        <p14:creationId xmlns:p14="http://schemas.microsoft.com/office/powerpoint/2010/main" val="49284742"/>
+        <p14:creationId xmlns:p14="http://schemas.microsoft.com/office/powerpoint/2010/main" val="2905956030"/>
       </p:ext>
     </p:extLst>
   </p:cSld>
@@ -3638,7 +4039,7 @@
         <p:cNvPr id="1" name="">
           <a:extLst>
             <a:ext uri="{FF2B5EF4-FFF2-40B4-BE49-F238E27FC236}">
-              <a16:creationId xmlns:a16="http://schemas.microsoft.com/office/drawing/2014/main" id="{51E5E472-551B-D9DD-2520-A32CBA4305B1}"/>
+              <a16:creationId xmlns:a16="http://schemas.microsoft.com/office/drawing/2014/main" id="{C43A9C5C-7460-1911-8D85-9479E4C001E1}"/>
             </a:ext>
           </a:extLst>
         </p:cNvPr>
@@ -3658,7 +4059,7 @@
           <p:cNvPr id="5" name="Imagem 4">
             <a:extLst>
               <a:ext uri="{FF2B5EF4-FFF2-40B4-BE49-F238E27FC236}">
-                <a16:creationId xmlns:a16="http://schemas.microsoft.com/office/drawing/2014/main" id="{2197F6E7-07D1-05B5-89CE-F019D2FB9F26}"/>
+                <a16:creationId xmlns:a16="http://schemas.microsoft.com/office/drawing/2014/main" id="{2D9D92A1-A196-5AD4-73CF-163139967580}"/>
               </a:ext>
             </a:extLst>
           </p:cNvPr>
@@ -3681,7 +4082,7 @@
         </p:blipFill>
         <p:spPr>
           <a:xfrm>
-            <a:off x="0" y="0"/>
+            <a:off x="-61546" y="0"/>
             <a:ext cx="12192000" cy="6858000"/>
           </a:xfrm>
           <a:prstGeom prst="rect">
@@ -3694,7 +4095,7 @@
           <p:cNvPr id="2" name="CaixaDeTexto 1">
             <a:extLst>
               <a:ext uri="{FF2B5EF4-FFF2-40B4-BE49-F238E27FC236}">
-                <a16:creationId xmlns:a16="http://schemas.microsoft.com/office/drawing/2014/main" id="{40B8863B-03C1-B480-A27A-28CEB6D93B9A}"/>
+                <a16:creationId xmlns:a16="http://schemas.microsoft.com/office/drawing/2014/main" id="{1C5FC81F-EF5A-6A9B-8A3E-B1F7A0987524}"/>
               </a:ext>
             </a:extLst>
           </p:cNvPr>
@@ -3703,8 +4104,8 @@
         </p:nvSpPr>
         <p:spPr>
           <a:xfrm>
-            <a:off x="5186740" y="197595"/>
-            <a:ext cx="1818520" cy="646331"/>
+            <a:off x="4806553" y="220160"/>
+            <a:ext cx="2455801" cy="646331"/>
           </a:xfrm>
           <a:prstGeom prst="rect">
             <a:avLst/>
@@ -3718,49 +4119,19 @@
           <a:lstStyle/>
           <a:p>
             <a:r>
-              <a:rPr lang="en-US" sz="3600" dirty="0" err="1"/>
-              <a:t>Exercício</a:t>
+              <a:rPr lang="en-US" sz="3600" dirty="0"/>
+              <a:t>Role (Papel)</a:t>
             </a:r>
             <a:endParaRPr lang="pt-BR" sz="3600" dirty="0"/>
           </a:p>
         </p:txBody>
       </p:sp>
-      <p:pic>
-        <p:nvPicPr>
-          <p:cNvPr id="11" name="Imagem 10">
-            <a:extLst>
-              <a:ext uri="{FF2B5EF4-FFF2-40B4-BE49-F238E27FC236}">
-                <a16:creationId xmlns:a16="http://schemas.microsoft.com/office/drawing/2014/main" id="{308B1A65-BBD5-F228-E14F-D40537226632}"/>
-              </a:ext>
-            </a:extLst>
-          </p:cNvPr>
-          <p:cNvPicPr>
-            <a:picLocks noChangeAspect="1"/>
-          </p:cNvPicPr>
-          <p:nvPr/>
-        </p:nvPicPr>
-        <p:blipFill>
-          <a:blip r:embed="rId3"/>
-          <a:stretch>
-            <a:fillRect/>
-          </a:stretch>
-        </p:blipFill>
-        <p:spPr>
-          <a:xfrm>
-            <a:off x="542078" y="1632043"/>
-            <a:ext cx="4780314" cy="4038541"/>
-          </a:xfrm>
-          <a:prstGeom prst="rect">
-            <a:avLst/>
-          </a:prstGeom>
-        </p:spPr>
-      </p:pic>
-      <p:sp>
-        <p:nvSpPr>
-          <p:cNvPr id="12" name="CaixaDeTexto 11">
-            <a:extLst>
-              <a:ext uri="{FF2B5EF4-FFF2-40B4-BE49-F238E27FC236}">
-                <a16:creationId xmlns:a16="http://schemas.microsoft.com/office/drawing/2014/main" id="{F3B5CFF9-A97A-AE52-F93C-5292FD8768CF}"/>
+      <p:sp>
+        <p:nvSpPr>
+          <p:cNvPr id="3" name="CaixaDeTexto 2">
+            <a:extLst>
+              <a:ext uri="{FF2B5EF4-FFF2-40B4-BE49-F238E27FC236}">
+                <a16:creationId xmlns:a16="http://schemas.microsoft.com/office/drawing/2014/main" id="{E3790DA6-D00F-455A-3DBA-6F27E986B358}"/>
               </a:ext>
             </a:extLst>
           </p:cNvPr>
@@ -3769,8 +4140,8 @@
         </p:nvSpPr>
         <p:spPr>
           <a:xfrm>
-            <a:off x="5864470" y="1943153"/>
-            <a:ext cx="5723793" cy="3416320"/>
+            <a:off x="4148503" y="1231104"/>
+            <a:ext cx="3894993" cy="584775"/>
           </a:xfrm>
           <a:prstGeom prst="rect">
             <a:avLst/>
@@ -3783,299 +4154,355 @@
           </a:bodyPr>
           <a:lstStyle/>
           <a:p>
-            <a:r>
-              <a:rPr lang="en-US" sz="2400" dirty="0"/>
-              <a:t>Para o </a:t>
-            </a:r>
-            <a:r>
-              <a:rPr lang="en-US" sz="2400" dirty="0" err="1"/>
-              <a:t>esquema</a:t>
-            </a:r>
-            <a:r>
-              <a:rPr lang="en-US" sz="2400" dirty="0"/>
-              <a:t> </a:t>
-            </a:r>
-            <a:r>
-              <a:rPr lang="en-US" sz="2400" dirty="0" err="1"/>
-              <a:t>ao</a:t>
-            </a:r>
-            <a:r>
-              <a:rPr lang="en-US" sz="2400" dirty="0"/>
-              <a:t> </a:t>
-            </a:r>
-            <a:r>
-              <a:rPr lang="en-US" sz="2400" dirty="0" err="1"/>
-              <a:t>lado</a:t>
-            </a:r>
-            <a:r>
-              <a:rPr lang="en-US" sz="2400" dirty="0"/>
-              <a:t>, </a:t>
-            </a:r>
-            <a:r>
-              <a:rPr lang="en-US" sz="2400" dirty="0" err="1"/>
-              <a:t>faça</a:t>
-            </a:r>
-            <a:r>
-              <a:rPr lang="en-US" sz="2400" dirty="0"/>
-              <a:t> o que se </a:t>
-            </a:r>
-            <a:r>
-              <a:rPr lang="en-US" sz="2400" dirty="0" err="1"/>
-              <a:t>pede</a:t>
-            </a:r>
-            <a:r>
-              <a:rPr lang="en-US" sz="2400" dirty="0"/>
-              <a:t>:</a:t>
-            </a:r>
-          </a:p>
-          <a:p>
-            <a:endParaRPr lang="en-US" sz="2400" dirty="0"/>
-          </a:p>
-          <a:p>
-            <a:pPr marL="285750" indent="-285750">
-              <a:buFont typeface="Courier New" panose="02070309020205020404" pitchFamily="49" charset="0"/>
-              <a:buChar char="o"/>
-            </a:pPr>
-            <a:r>
-              <a:rPr lang="en-US" sz="2400" dirty="0" err="1"/>
-              <a:t>Crie</a:t>
-            </a:r>
-            <a:r>
-              <a:rPr lang="en-US" sz="2400" dirty="0"/>
-              <a:t> </a:t>
-            </a:r>
-            <a:r>
-              <a:rPr lang="en-US" sz="2400" dirty="0" err="1"/>
-              <a:t>dois</a:t>
-            </a:r>
-            <a:r>
-              <a:rPr lang="en-US" sz="2400" dirty="0"/>
-              <a:t> </a:t>
-            </a:r>
-            <a:r>
-              <a:rPr lang="en-US" sz="2400" dirty="0" err="1"/>
-              <a:t>usuários</a:t>
-            </a:r>
-            <a:r>
-              <a:rPr lang="en-US" sz="2400" dirty="0"/>
-              <a:t> com </a:t>
-            </a:r>
-            <a:r>
-              <a:rPr lang="en-US" sz="2400" dirty="0" err="1"/>
-              <a:t>suas</a:t>
-            </a:r>
-            <a:r>
-              <a:rPr lang="en-US" sz="2400" dirty="0"/>
-              <a:t> </a:t>
-            </a:r>
-            <a:r>
-              <a:rPr lang="en-US" sz="2400" dirty="0" err="1"/>
-              <a:t>senhas</a:t>
-            </a:r>
-            <a:r>
-              <a:rPr lang="en-US" sz="2400" dirty="0"/>
-              <a:t>;</a:t>
-            </a:r>
-          </a:p>
-          <a:p>
-            <a:pPr marL="285750" indent="-285750">
-              <a:buFont typeface="Courier New" panose="02070309020205020404" pitchFamily="49" charset="0"/>
-              <a:buChar char="o"/>
-            </a:pPr>
-            <a:r>
-              <a:rPr lang="en-US" sz="2400" dirty="0"/>
-              <a:t>Para o </a:t>
-            </a:r>
-            <a:r>
-              <a:rPr lang="en-US" sz="2400" dirty="0" err="1"/>
-              <a:t>primeiro</a:t>
-            </a:r>
-            <a:r>
-              <a:rPr lang="en-US" sz="2400" dirty="0"/>
-              <a:t>, </a:t>
-            </a:r>
-            <a:r>
-              <a:rPr lang="en-US" sz="2400" dirty="0" err="1"/>
-              <a:t>conceda</a:t>
-            </a:r>
-            <a:r>
-              <a:rPr lang="en-US" sz="2400" dirty="0"/>
-              <a:t> INSERT, DELETE;</a:t>
-            </a:r>
-          </a:p>
-          <a:p>
-            <a:pPr marL="285750" indent="-285750">
-              <a:buFont typeface="Courier New" panose="02070309020205020404" pitchFamily="49" charset="0"/>
-              <a:buChar char="o"/>
-            </a:pPr>
-            <a:r>
-              <a:rPr lang="en-US" sz="2400" dirty="0"/>
-              <a:t>Para o </a:t>
-            </a:r>
-            <a:r>
-              <a:rPr lang="en-US" sz="2400" dirty="0" err="1"/>
-              <a:t>segundo</a:t>
-            </a:r>
-            <a:r>
-              <a:rPr lang="en-US" sz="2400" dirty="0"/>
-              <a:t>, </a:t>
-            </a:r>
-            <a:r>
-              <a:rPr lang="en-US" sz="2400" dirty="0" err="1"/>
-              <a:t>conceda</a:t>
-            </a:r>
-            <a:r>
-              <a:rPr lang="en-US" sz="2400" dirty="0"/>
-              <a:t> </a:t>
-            </a:r>
-            <a:r>
-              <a:rPr lang="en-US" sz="2400" dirty="0" err="1"/>
-              <a:t>todos</a:t>
-            </a:r>
-            <a:r>
-              <a:rPr lang="en-US" sz="2400" dirty="0"/>
-              <a:t> </a:t>
-            </a:r>
-            <a:r>
-              <a:rPr lang="en-US" sz="2400" dirty="0" err="1"/>
-              <a:t>os</a:t>
-            </a:r>
-            <a:r>
-              <a:rPr lang="en-US" sz="2400" dirty="0"/>
-              <a:t> </a:t>
-            </a:r>
-            <a:r>
-              <a:rPr lang="en-US" sz="2400" dirty="0" err="1"/>
-              <a:t>privilégios</a:t>
-            </a:r>
-            <a:r>
-              <a:rPr lang="en-US" sz="2400" dirty="0"/>
-              <a:t> </a:t>
-            </a:r>
-            <a:r>
-              <a:rPr lang="en-US" sz="2400" dirty="0" err="1"/>
-              <a:t>em</a:t>
-            </a:r>
-            <a:r>
-              <a:rPr lang="en-US" sz="2400" dirty="0"/>
-              <a:t> </a:t>
-            </a:r>
-            <a:r>
-              <a:rPr lang="en-US" sz="2400" dirty="0" err="1"/>
-              <a:t>todas</a:t>
-            </a:r>
-            <a:r>
-              <a:rPr lang="en-US" sz="2400" dirty="0"/>
-              <a:t> as </a:t>
-            </a:r>
-            <a:r>
-              <a:rPr lang="en-US" sz="2400" dirty="0" err="1"/>
-              <a:t>tabelas</a:t>
-            </a:r>
-            <a:r>
-              <a:rPr lang="en-US" sz="2400" dirty="0"/>
-              <a:t>;</a:t>
-            </a:r>
-          </a:p>
-          <a:p>
-            <a:pPr marL="285750" indent="-285750">
-              <a:buFont typeface="Courier New" panose="02070309020205020404" pitchFamily="49" charset="0"/>
-              <a:buChar char="o"/>
-            </a:pPr>
-            <a:r>
-              <a:rPr lang="en-US" sz="2400" dirty="0"/>
-              <a:t>Retire </a:t>
-            </a:r>
-            <a:r>
-              <a:rPr lang="en-US" sz="2400" dirty="0" err="1"/>
-              <a:t>todos</a:t>
-            </a:r>
-            <a:r>
-              <a:rPr lang="en-US" sz="2400" dirty="0"/>
-              <a:t> </a:t>
-            </a:r>
-            <a:r>
-              <a:rPr lang="en-US" sz="2400" dirty="0" err="1"/>
-              <a:t>os</a:t>
-            </a:r>
-            <a:r>
-              <a:rPr lang="en-US" sz="2400" dirty="0"/>
-              <a:t> </a:t>
-            </a:r>
-            <a:r>
-              <a:rPr lang="en-US" sz="2400" dirty="0" err="1"/>
-              <a:t>privilégios</a:t>
-            </a:r>
-            <a:r>
-              <a:rPr lang="en-US" sz="2400" dirty="0"/>
-              <a:t> do </a:t>
-            </a:r>
-            <a:r>
-              <a:rPr lang="en-US" sz="2400" dirty="0" err="1"/>
-              <a:t>primeiro</a:t>
-            </a:r>
-            <a:r>
-              <a:rPr lang="en-US" sz="2400" dirty="0"/>
-              <a:t>;</a:t>
-            </a:r>
-          </a:p>
-          <a:p>
-            <a:pPr marL="285750" indent="-285750">
-              <a:buFont typeface="Courier New" panose="02070309020205020404" pitchFamily="49" charset="0"/>
-              <a:buChar char="o"/>
-            </a:pPr>
-            <a:r>
-              <a:rPr lang="en-US" sz="2400" dirty="0"/>
-              <a:t>Retire </a:t>
-            </a:r>
-            <a:r>
-              <a:rPr lang="en-US" sz="2400" dirty="0" err="1"/>
-              <a:t>os</a:t>
-            </a:r>
-            <a:r>
-              <a:rPr lang="en-US" sz="2400" dirty="0"/>
-              <a:t> </a:t>
-            </a:r>
-            <a:r>
-              <a:rPr lang="en-US" sz="2400" dirty="0" err="1"/>
-              <a:t>privilégios</a:t>
-            </a:r>
-            <a:r>
-              <a:rPr lang="en-US" sz="2400" dirty="0"/>
-              <a:t> UPDATE e DELETE do Segundo </a:t>
-            </a:r>
-            <a:r>
-              <a:rPr lang="en-US" sz="2400" dirty="0" err="1"/>
-              <a:t>em</a:t>
-            </a:r>
-            <a:r>
-              <a:rPr lang="en-US" sz="2400" dirty="0"/>
-              <a:t> </a:t>
-            </a:r>
-            <a:r>
-              <a:rPr lang="en-US" sz="2400" dirty="0" err="1"/>
-              <a:t>todas</a:t>
-            </a:r>
-            <a:r>
-              <a:rPr lang="en-US" sz="2400" dirty="0"/>
-              <a:t> as </a:t>
-            </a:r>
-            <a:r>
-              <a:rPr lang="en-US" sz="2400" dirty="0" err="1"/>
-              <a:t>tabelas</a:t>
-            </a:r>
-            <a:r>
-              <a:rPr lang="en-US" sz="2400" dirty="0"/>
-              <a:t>.</a:t>
-            </a:r>
-            <a:endParaRPr lang="pt-BR" sz="2400" dirty="0"/>
+            <a:pPr algn="ctr"/>
+            <a:r>
+              <a:rPr lang="en-US" sz="3200" dirty="0" err="1"/>
+              <a:t>Garantia</a:t>
+            </a:r>
+            <a:r>
+              <a:rPr lang="en-US" sz="3200" dirty="0"/>
+              <a:t> de </a:t>
+            </a:r>
+            <a:r>
+              <a:rPr lang="en-US" sz="3200" dirty="0" err="1"/>
+              <a:t>Privilégios</a:t>
+            </a:r>
+            <a:endParaRPr lang="en-US" sz="3200" dirty="0"/>
+          </a:p>
+        </p:txBody>
+      </p:sp>
+      <p:sp>
+        <p:nvSpPr>
+          <p:cNvPr id="4" name="CaixaDeTexto 3">
+            <a:extLst>
+              <a:ext uri="{FF2B5EF4-FFF2-40B4-BE49-F238E27FC236}">
+                <a16:creationId xmlns:a16="http://schemas.microsoft.com/office/drawing/2014/main" id="{61256FC3-04CF-297B-13FD-85672E1EEA7B}"/>
+              </a:ext>
+            </a:extLst>
+          </p:cNvPr>
+          <p:cNvSpPr txBox="1"/>
+          <p:nvPr/>
+        </p:nvSpPr>
+        <p:spPr>
+          <a:xfrm>
+            <a:off x="958362" y="2180492"/>
+            <a:ext cx="10550769" cy="3970318"/>
+          </a:xfrm>
+          <a:prstGeom prst="rect">
+            <a:avLst/>
+          </a:prstGeom>
+          <a:noFill/>
+        </p:spPr>
+        <p:txBody>
+          <a:bodyPr wrap="square" rtlCol="0">
+            <a:spAutoFit/>
+          </a:bodyPr>
+          <a:lstStyle/>
+          <a:p>
+            <a:pPr algn="ctr"/>
+            <a:r>
+              <a:rPr lang="pt-BR" sz="2800" dirty="0">
+                <a:solidFill>
+                  <a:schemeClr val="tx1">
+                    <a:lumMod val="50000"/>
+                    <a:lumOff val="50000"/>
+                  </a:schemeClr>
+                </a:solidFill>
+              </a:rPr>
+              <a:t>CREATE ROLE ‘</a:t>
+            </a:r>
+            <a:r>
+              <a:rPr lang="pt-BR" sz="2800" dirty="0" err="1">
+                <a:solidFill>
+                  <a:schemeClr val="tx1">
+                    <a:lumMod val="50000"/>
+                    <a:lumOff val="50000"/>
+                  </a:schemeClr>
+                </a:solidFill>
+              </a:rPr>
+              <a:t>nomeRole</a:t>
+            </a:r>
+            <a:r>
+              <a:rPr lang="pt-BR" sz="2800" dirty="0">
+                <a:solidFill>
+                  <a:schemeClr val="tx1">
+                    <a:lumMod val="50000"/>
+                    <a:lumOff val="50000"/>
+                  </a:schemeClr>
+                </a:solidFill>
+              </a:rPr>
+              <a:t>’;</a:t>
+            </a:r>
+          </a:p>
+          <a:p>
+            <a:pPr algn="ctr"/>
+            <a:endParaRPr lang="pt-BR" sz="2800" dirty="0"/>
+          </a:p>
+          <a:p>
+            <a:pPr algn="ctr"/>
+            <a:r>
+              <a:rPr lang="en-US" sz="2800" dirty="0">
+                <a:solidFill>
+                  <a:srgbClr val="0070C0"/>
+                </a:solidFill>
+              </a:rPr>
+              <a:t>GRANT [</a:t>
+            </a:r>
+            <a:r>
+              <a:rPr lang="en-US" sz="2800" dirty="0" err="1">
+                <a:solidFill>
+                  <a:srgbClr val="0070C0"/>
+                </a:solidFill>
+              </a:rPr>
+              <a:t>comandos</a:t>
+            </a:r>
+            <a:r>
+              <a:rPr lang="en-US" sz="2800" dirty="0">
+                <a:solidFill>
+                  <a:srgbClr val="0070C0"/>
+                </a:solidFill>
+              </a:rPr>
+              <a:t>] ON [database].[</a:t>
+            </a:r>
+            <a:r>
+              <a:rPr lang="en-US" sz="2800" dirty="0" err="1">
+                <a:solidFill>
+                  <a:srgbClr val="0070C0"/>
+                </a:solidFill>
+              </a:rPr>
+              <a:t>tabela</a:t>
+            </a:r>
+            <a:r>
+              <a:rPr lang="en-US" sz="2800" dirty="0">
+                <a:solidFill>
+                  <a:srgbClr val="0070C0"/>
+                </a:solidFill>
+              </a:rPr>
+              <a:t>] TO ‘</a:t>
+            </a:r>
+            <a:r>
+              <a:rPr lang="en-US" sz="2800" dirty="0" err="1">
+                <a:solidFill>
+                  <a:srgbClr val="0070C0"/>
+                </a:solidFill>
+              </a:rPr>
+              <a:t>nomeRole</a:t>
+            </a:r>
+            <a:r>
+              <a:rPr lang="en-US" sz="2800" dirty="0">
+                <a:solidFill>
+                  <a:srgbClr val="0070C0"/>
+                </a:solidFill>
+              </a:rPr>
+              <a:t>’;</a:t>
+            </a:r>
+          </a:p>
+          <a:p>
+            <a:pPr algn="ctr"/>
+            <a:endParaRPr lang="en-US" sz="2800" dirty="0"/>
+          </a:p>
+          <a:p>
+            <a:pPr algn="ctr"/>
+            <a:r>
+              <a:rPr lang="en-US" sz="2800" dirty="0">
+                <a:solidFill>
+                  <a:schemeClr val="tx1">
+                    <a:lumMod val="50000"/>
+                    <a:lumOff val="50000"/>
+                  </a:schemeClr>
+                </a:solidFill>
+              </a:rPr>
+              <a:t>CREATE USER ‘</a:t>
+            </a:r>
+            <a:r>
+              <a:rPr lang="en-US" sz="2800" dirty="0" err="1">
+                <a:solidFill>
+                  <a:schemeClr val="tx1">
+                    <a:lumMod val="50000"/>
+                    <a:lumOff val="50000"/>
+                  </a:schemeClr>
+                </a:solidFill>
+              </a:rPr>
+              <a:t>nomeUsuario</a:t>
+            </a:r>
+            <a:r>
+              <a:rPr lang="en-US" sz="2800" dirty="0">
+                <a:solidFill>
+                  <a:schemeClr val="tx1">
+                    <a:lumMod val="50000"/>
+                    <a:lumOff val="50000"/>
+                  </a:schemeClr>
+                </a:solidFill>
+              </a:rPr>
+              <a:t>’@’</a:t>
+            </a:r>
+            <a:r>
+              <a:rPr lang="en-US" sz="2800" dirty="0" err="1">
+                <a:solidFill>
+                  <a:schemeClr val="tx1">
+                    <a:lumMod val="50000"/>
+                    <a:lumOff val="50000"/>
+                  </a:schemeClr>
+                </a:solidFill>
+              </a:rPr>
+              <a:t>ip</a:t>
+            </a:r>
+            <a:r>
+              <a:rPr lang="en-US" sz="2800" dirty="0">
+                <a:solidFill>
+                  <a:schemeClr val="tx1">
+                    <a:lumMod val="50000"/>
+                    <a:lumOff val="50000"/>
+                  </a:schemeClr>
+                </a:solidFill>
+              </a:rPr>
+              <a:t>’ IDENTIFIED BY ‘</a:t>
+            </a:r>
+            <a:r>
+              <a:rPr lang="en-US" sz="2800" dirty="0" err="1">
+                <a:solidFill>
+                  <a:schemeClr val="tx1">
+                    <a:lumMod val="50000"/>
+                    <a:lumOff val="50000"/>
+                  </a:schemeClr>
+                </a:solidFill>
+              </a:rPr>
+              <a:t>senha</a:t>
+            </a:r>
+            <a:r>
+              <a:rPr lang="en-US" sz="2800" dirty="0">
+                <a:solidFill>
+                  <a:schemeClr val="tx1">
+                    <a:lumMod val="50000"/>
+                    <a:lumOff val="50000"/>
+                  </a:schemeClr>
+                </a:solidFill>
+              </a:rPr>
+              <a:t>’;</a:t>
+            </a:r>
+          </a:p>
+          <a:p>
+            <a:pPr algn="ctr"/>
+            <a:endParaRPr lang="en-US" sz="2800" dirty="0">
+              <a:solidFill>
+                <a:schemeClr val="tx1">
+                  <a:lumMod val="50000"/>
+                  <a:lumOff val="50000"/>
+                </a:schemeClr>
+              </a:solidFill>
+            </a:endParaRPr>
+          </a:p>
+          <a:p>
+            <a:pPr algn="ctr"/>
+            <a:r>
+              <a:rPr lang="it-IT" sz="2800" dirty="0">
+                <a:solidFill>
+                  <a:schemeClr val="tx1">
+                    <a:lumMod val="50000"/>
+                    <a:lumOff val="50000"/>
+                  </a:schemeClr>
+                </a:solidFill>
+              </a:rPr>
+              <a:t>GRANT ‘nomeRole’ TO ‘nomeUsuario’@’ip’;</a:t>
+            </a:r>
+          </a:p>
+          <a:p>
+            <a:pPr algn="ctr"/>
+            <a:endParaRPr lang="it-IT" sz="2800" dirty="0">
+              <a:solidFill>
+                <a:schemeClr val="tx1">
+                  <a:lumMod val="50000"/>
+                  <a:lumOff val="50000"/>
+                </a:schemeClr>
+              </a:solidFill>
+            </a:endParaRPr>
+          </a:p>
+          <a:p>
+            <a:pPr algn="ctr"/>
+            <a:r>
+              <a:rPr lang="pt-BR" sz="2800" dirty="0">
+                <a:solidFill>
+                  <a:schemeClr val="tx1">
+                    <a:lumMod val="50000"/>
+                    <a:lumOff val="50000"/>
+                  </a:schemeClr>
+                </a:solidFill>
+              </a:rPr>
+              <a:t>SET DEFAULT ROLE ‘</a:t>
+            </a:r>
+            <a:r>
+              <a:rPr lang="pt-BR" sz="2800" dirty="0" err="1">
+                <a:solidFill>
+                  <a:schemeClr val="tx1">
+                    <a:lumMod val="50000"/>
+                    <a:lumOff val="50000"/>
+                  </a:schemeClr>
+                </a:solidFill>
+              </a:rPr>
+              <a:t>nomeRole</a:t>
+            </a:r>
+            <a:r>
+              <a:rPr lang="pt-BR" sz="2800" dirty="0">
+                <a:solidFill>
+                  <a:schemeClr val="tx1">
+                    <a:lumMod val="50000"/>
+                    <a:lumOff val="50000"/>
+                  </a:schemeClr>
+                </a:solidFill>
+              </a:rPr>
+              <a:t>’ TO ‘</a:t>
+            </a:r>
+            <a:r>
+              <a:rPr lang="pt-BR" sz="2800" dirty="0" err="1">
+                <a:solidFill>
+                  <a:schemeClr val="tx1">
+                    <a:lumMod val="50000"/>
+                    <a:lumOff val="50000"/>
+                  </a:schemeClr>
+                </a:solidFill>
+              </a:rPr>
+              <a:t>nomeUsuario</a:t>
+            </a:r>
+            <a:r>
+              <a:rPr lang="pt-BR" sz="2800" dirty="0">
+                <a:solidFill>
+                  <a:schemeClr val="tx1">
+                    <a:lumMod val="50000"/>
+                    <a:lumOff val="50000"/>
+                  </a:schemeClr>
+                </a:solidFill>
+              </a:rPr>
+              <a:t>’@’</a:t>
+            </a:r>
+            <a:r>
+              <a:rPr lang="pt-BR" sz="2800" dirty="0" err="1">
+                <a:solidFill>
+                  <a:schemeClr val="tx1">
+                    <a:lumMod val="50000"/>
+                    <a:lumOff val="50000"/>
+                  </a:schemeClr>
+                </a:solidFill>
+              </a:rPr>
+              <a:t>ip</a:t>
+            </a:r>
+            <a:r>
+              <a:rPr lang="pt-BR" sz="2800" dirty="0">
+                <a:solidFill>
+                  <a:schemeClr val="tx1">
+                    <a:lumMod val="50000"/>
+                    <a:lumOff val="50000"/>
+                  </a:schemeClr>
+                </a:solidFill>
+              </a:rPr>
+              <a:t>’;</a:t>
+            </a:r>
           </a:p>
         </p:txBody>
       </p:sp>
     </p:spTree>
     <p:extLst>
       <p:ext uri="{BB962C8B-B14F-4D97-AF65-F5344CB8AC3E}">
-        <p14:creationId xmlns:p14="http://schemas.microsoft.com/office/powerpoint/2010/main" val="3930558747"/>
+        <p14:creationId xmlns:p14="http://schemas.microsoft.com/office/powerpoint/2010/main" val="553166433"/>
       </p:ext>
     </p:extLst>
   </p:cSld>
@@ -4093,7 +4520,7 @@
         <p:cNvPr id="1" name="">
           <a:extLst>
             <a:ext uri="{FF2B5EF4-FFF2-40B4-BE49-F238E27FC236}">
-              <a16:creationId xmlns:a16="http://schemas.microsoft.com/office/drawing/2014/main" id="{A9F73D6E-FC32-50DA-1CBC-9FDC465B155C}"/>
+              <a16:creationId xmlns:a16="http://schemas.microsoft.com/office/drawing/2014/main" id="{14D7CEBB-0C8E-B46E-4A13-9DB3F8F5CB9A}"/>
             </a:ext>
           </a:extLst>
         </p:cNvPr>
@@ -4108,62 +4535,12 @@
           <a:chExt cx="0" cy="0"/>
         </a:xfrm>
       </p:grpSpPr>
-      <p:sp>
-        <p:nvSpPr>
-          <p:cNvPr id="2" name="Título 1">
-            <a:extLst>
-              <a:ext uri="{FF2B5EF4-FFF2-40B4-BE49-F238E27FC236}">
-                <a16:creationId xmlns:a16="http://schemas.microsoft.com/office/drawing/2014/main" id="{7D33F163-C736-9349-5711-22D353FEFD1A}"/>
-              </a:ext>
-            </a:extLst>
-          </p:cNvPr>
-          <p:cNvSpPr>
-            <a:spLocks noGrp="1"/>
-          </p:cNvSpPr>
-          <p:nvPr>
-            <p:ph type="title"/>
-          </p:nvPr>
-        </p:nvSpPr>
-        <p:spPr/>
-        <p:txBody>
-          <a:bodyPr/>
-          <a:lstStyle/>
-          <a:p>
-            <a:endParaRPr lang="pt-BR"/>
-          </a:p>
-        </p:txBody>
-      </p:sp>
-      <p:sp>
-        <p:nvSpPr>
-          <p:cNvPr id="3" name="Espaço Reservado para Conteúdo 2">
-            <a:extLst>
-              <a:ext uri="{FF2B5EF4-FFF2-40B4-BE49-F238E27FC236}">
-                <a16:creationId xmlns:a16="http://schemas.microsoft.com/office/drawing/2014/main" id="{13625611-E7FA-1D72-494A-0AFBC3CF9FB2}"/>
-              </a:ext>
-            </a:extLst>
-          </p:cNvPr>
-          <p:cNvSpPr>
-            <a:spLocks noGrp="1"/>
-          </p:cNvSpPr>
-          <p:nvPr>
-            <p:ph idx="1"/>
-          </p:nvPr>
-        </p:nvSpPr>
-        <p:spPr/>
-        <p:txBody>
-          <a:bodyPr/>
-          <a:lstStyle/>
-          <a:p>
-            <a:endParaRPr lang="pt-BR"/>
-          </a:p>
-        </p:txBody>
-      </p:sp>
       <p:pic>
         <p:nvPicPr>
-          <p:cNvPr id="4" name="Imagem 3">
-            <a:extLst>
-              <a:ext uri="{FF2B5EF4-FFF2-40B4-BE49-F238E27FC236}">
-                <a16:creationId xmlns:a16="http://schemas.microsoft.com/office/drawing/2014/main" id="{743371B3-3339-12F0-DD89-453EBF0A0ED8}"/>
+          <p:cNvPr id="5" name="Imagem 4">
+            <a:extLst>
+              <a:ext uri="{FF2B5EF4-FFF2-40B4-BE49-F238E27FC236}">
+                <a16:creationId xmlns:a16="http://schemas.microsoft.com/office/drawing/2014/main" id="{2D568E7C-1744-DAD7-0E7B-682E7D29394C}"/>
               </a:ext>
             </a:extLst>
           </p:cNvPr>
@@ -4186,7 +4563,7 @@
         </p:blipFill>
         <p:spPr>
           <a:xfrm>
-            <a:off x="0" y="0"/>
+            <a:off x="-61546" y="0"/>
             <a:ext cx="12192000" cy="6858000"/>
           </a:xfrm>
           <a:prstGeom prst="rect">
@@ -4196,10 +4573,10 @@
       </p:pic>
       <p:sp>
         <p:nvSpPr>
-          <p:cNvPr id="5" name="CaixaDeTexto 4">
-            <a:extLst>
-              <a:ext uri="{FF2B5EF4-FFF2-40B4-BE49-F238E27FC236}">
-                <a16:creationId xmlns:a16="http://schemas.microsoft.com/office/drawing/2014/main" id="{C30338DA-9061-D8D4-B5A5-66A14A047FD4}"/>
+          <p:cNvPr id="2" name="CaixaDeTexto 1">
+            <a:extLst>
+              <a:ext uri="{FF2B5EF4-FFF2-40B4-BE49-F238E27FC236}">
+                <a16:creationId xmlns:a16="http://schemas.microsoft.com/office/drawing/2014/main" id="{B77ADC6B-1D24-7F4F-D65C-0B20118DFC8A}"/>
               </a:ext>
             </a:extLst>
           </p:cNvPr>
@@ -4208,8 +4585,8 @@
         </p:nvSpPr>
         <p:spPr>
           <a:xfrm>
-            <a:off x="3924300" y="2413337"/>
-            <a:ext cx="4343400" cy="1938992"/>
+            <a:off x="4806553" y="220160"/>
+            <a:ext cx="2455801" cy="646331"/>
           </a:xfrm>
           <a:prstGeom prst="rect">
             <a:avLst/>
@@ -4222,31 +4599,3332 @@
           </a:bodyPr>
           <a:lstStyle/>
           <a:p>
+            <a:r>
+              <a:rPr lang="en-US" sz="3600" dirty="0"/>
+              <a:t>Role (Papel)</a:t>
+            </a:r>
+            <a:endParaRPr lang="pt-BR" sz="3600" dirty="0"/>
+          </a:p>
+        </p:txBody>
+      </p:sp>
+      <p:sp>
+        <p:nvSpPr>
+          <p:cNvPr id="3" name="CaixaDeTexto 2">
+            <a:extLst>
+              <a:ext uri="{FF2B5EF4-FFF2-40B4-BE49-F238E27FC236}">
+                <a16:creationId xmlns:a16="http://schemas.microsoft.com/office/drawing/2014/main" id="{EFA66A75-51EA-C486-A6E2-DC297CC6BF43}"/>
+              </a:ext>
+            </a:extLst>
+          </p:cNvPr>
+          <p:cNvSpPr txBox="1"/>
+          <p:nvPr/>
+        </p:nvSpPr>
+        <p:spPr>
+          <a:xfrm>
+            <a:off x="2623038" y="1231104"/>
+            <a:ext cx="6945924" cy="584775"/>
+          </a:xfrm>
+          <a:prstGeom prst="rect">
+            <a:avLst/>
+          </a:prstGeom>
+          <a:noFill/>
+        </p:spPr>
+        <p:txBody>
+          <a:bodyPr wrap="square" rtlCol="0">
+            <a:spAutoFit/>
+          </a:bodyPr>
+          <a:lstStyle/>
+          <a:p>
             <a:pPr algn="ctr"/>
             <a:r>
-              <a:rPr lang="en-US" sz="6000" dirty="0">
-                <a:solidFill>
-                  <a:schemeClr val="accent5">
-                    <a:lumMod val="75000"/>
-                  </a:schemeClr>
-                </a:solidFill>
-              </a:rPr>
-              <a:t>AULA CONCLUÍDA!</a:t>
-            </a:r>
-            <a:endParaRPr lang="pt-BR" sz="6000" dirty="0">
+              <a:rPr lang="en-US" sz="3200" dirty="0" err="1"/>
+              <a:t>Criação</a:t>
+            </a:r>
+            <a:r>
+              <a:rPr lang="en-US" sz="3200" dirty="0"/>
+              <a:t> do </a:t>
+            </a:r>
+            <a:r>
+              <a:rPr lang="en-US" sz="3200" dirty="0" err="1"/>
+              <a:t>Usuário</a:t>
+            </a:r>
+            <a:r>
+              <a:rPr lang="en-US" sz="3200" dirty="0"/>
+              <a:t> (Pode ser </a:t>
+            </a:r>
+            <a:r>
+              <a:rPr lang="en-US" sz="3200" dirty="0" err="1"/>
+              <a:t>feita</a:t>
+            </a:r>
+            <a:r>
+              <a:rPr lang="en-US" sz="3200" dirty="0"/>
+              <a:t> antes)</a:t>
+            </a:r>
+          </a:p>
+        </p:txBody>
+      </p:sp>
+      <p:sp>
+        <p:nvSpPr>
+          <p:cNvPr id="4" name="CaixaDeTexto 3">
+            <a:extLst>
+              <a:ext uri="{FF2B5EF4-FFF2-40B4-BE49-F238E27FC236}">
+                <a16:creationId xmlns:a16="http://schemas.microsoft.com/office/drawing/2014/main" id="{ADC9C14B-96BC-F34B-63DF-0C85F8D9E310}"/>
+              </a:ext>
+            </a:extLst>
+          </p:cNvPr>
+          <p:cNvSpPr txBox="1"/>
+          <p:nvPr/>
+        </p:nvSpPr>
+        <p:spPr>
+          <a:xfrm>
+            <a:off x="958362" y="2180492"/>
+            <a:ext cx="10550769" cy="3970318"/>
+          </a:xfrm>
+          <a:prstGeom prst="rect">
+            <a:avLst/>
+          </a:prstGeom>
+          <a:noFill/>
+        </p:spPr>
+        <p:txBody>
+          <a:bodyPr wrap="square" rtlCol="0">
+            <a:spAutoFit/>
+          </a:bodyPr>
+          <a:lstStyle/>
+          <a:p>
+            <a:pPr algn="ctr"/>
+            <a:r>
+              <a:rPr lang="pt-BR" sz="2800" dirty="0">
+                <a:solidFill>
+                  <a:schemeClr val="tx1">
+                    <a:lumMod val="50000"/>
+                    <a:lumOff val="50000"/>
+                  </a:schemeClr>
+                </a:solidFill>
+              </a:rPr>
+              <a:t>CREATE ROLE ‘</a:t>
+            </a:r>
+            <a:r>
+              <a:rPr lang="pt-BR" sz="2800" dirty="0" err="1">
+                <a:solidFill>
+                  <a:schemeClr val="tx1">
+                    <a:lumMod val="50000"/>
+                    <a:lumOff val="50000"/>
+                  </a:schemeClr>
+                </a:solidFill>
+              </a:rPr>
+              <a:t>nomeRole</a:t>
+            </a:r>
+            <a:r>
+              <a:rPr lang="pt-BR" sz="2800" dirty="0">
+                <a:solidFill>
+                  <a:schemeClr val="tx1">
+                    <a:lumMod val="50000"/>
+                    <a:lumOff val="50000"/>
+                  </a:schemeClr>
+                </a:solidFill>
+              </a:rPr>
+              <a:t>’;</a:t>
+            </a:r>
+          </a:p>
+          <a:p>
+            <a:pPr algn="ctr"/>
+            <a:endParaRPr lang="pt-BR" sz="2800" dirty="0">
               <a:solidFill>
-                <a:schemeClr val="accent5">
-                  <a:lumMod val="75000"/>
+                <a:schemeClr val="tx1">
+                  <a:lumMod val="50000"/>
+                  <a:lumOff val="50000"/>
                 </a:schemeClr>
               </a:solidFill>
             </a:endParaRPr>
           </a:p>
+          <a:p>
+            <a:pPr algn="ctr"/>
+            <a:r>
+              <a:rPr lang="en-US" sz="2800" dirty="0">
+                <a:solidFill>
+                  <a:schemeClr val="tx1">
+                    <a:lumMod val="50000"/>
+                    <a:lumOff val="50000"/>
+                  </a:schemeClr>
+                </a:solidFill>
+              </a:rPr>
+              <a:t>GRANT [</a:t>
+            </a:r>
+            <a:r>
+              <a:rPr lang="en-US" sz="2800" dirty="0" err="1">
+                <a:solidFill>
+                  <a:schemeClr val="tx1">
+                    <a:lumMod val="50000"/>
+                    <a:lumOff val="50000"/>
+                  </a:schemeClr>
+                </a:solidFill>
+              </a:rPr>
+              <a:t>comandos</a:t>
+            </a:r>
+            <a:r>
+              <a:rPr lang="en-US" sz="2800" dirty="0">
+                <a:solidFill>
+                  <a:schemeClr val="tx1">
+                    <a:lumMod val="50000"/>
+                    <a:lumOff val="50000"/>
+                  </a:schemeClr>
+                </a:solidFill>
+              </a:rPr>
+              <a:t>] ON [database].[</a:t>
+            </a:r>
+            <a:r>
+              <a:rPr lang="en-US" sz="2800" dirty="0" err="1">
+                <a:solidFill>
+                  <a:schemeClr val="tx1">
+                    <a:lumMod val="50000"/>
+                    <a:lumOff val="50000"/>
+                  </a:schemeClr>
+                </a:solidFill>
+              </a:rPr>
+              <a:t>tabela</a:t>
+            </a:r>
+            <a:r>
+              <a:rPr lang="en-US" sz="2800" dirty="0">
+                <a:solidFill>
+                  <a:schemeClr val="tx1">
+                    <a:lumMod val="50000"/>
+                    <a:lumOff val="50000"/>
+                  </a:schemeClr>
+                </a:solidFill>
+              </a:rPr>
+              <a:t>] TO ‘</a:t>
+            </a:r>
+            <a:r>
+              <a:rPr lang="en-US" sz="2800" dirty="0" err="1">
+                <a:solidFill>
+                  <a:schemeClr val="tx1">
+                    <a:lumMod val="50000"/>
+                    <a:lumOff val="50000"/>
+                  </a:schemeClr>
+                </a:solidFill>
+              </a:rPr>
+              <a:t>nomeRole</a:t>
+            </a:r>
+            <a:r>
+              <a:rPr lang="en-US" sz="2800" dirty="0">
+                <a:solidFill>
+                  <a:schemeClr val="tx1">
+                    <a:lumMod val="50000"/>
+                    <a:lumOff val="50000"/>
+                  </a:schemeClr>
+                </a:solidFill>
+              </a:rPr>
+              <a:t>’;</a:t>
+            </a:r>
+          </a:p>
+          <a:p>
+            <a:pPr algn="ctr"/>
+            <a:endParaRPr lang="en-US" sz="2800" dirty="0"/>
+          </a:p>
+          <a:p>
+            <a:pPr algn="ctr"/>
+            <a:r>
+              <a:rPr lang="en-US" sz="2800" dirty="0">
+                <a:solidFill>
+                  <a:srgbClr val="0070C0"/>
+                </a:solidFill>
+              </a:rPr>
+              <a:t>CREATE USER ‘</a:t>
+            </a:r>
+            <a:r>
+              <a:rPr lang="en-US" sz="2800" dirty="0" err="1">
+                <a:solidFill>
+                  <a:srgbClr val="0070C0"/>
+                </a:solidFill>
+              </a:rPr>
+              <a:t>nomeUsuario</a:t>
+            </a:r>
+            <a:r>
+              <a:rPr lang="en-US" sz="2800" dirty="0">
+                <a:solidFill>
+                  <a:srgbClr val="0070C0"/>
+                </a:solidFill>
+              </a:rPr>
+              <a:t>’@’</a:t>
+            </a:r>
+            <a:r>
+              <a:rPr lang="en-US" sz="2800" dirty="0" err="1">
+                <a:solidFill>
+                  <a:srgbClr val="0070C0"/>
+                </a:solidFill>
+              </a:rPr>
+              <a:t>ip</a:t>
+            </a:r>
+            <a:r>
+              <a:rPr lang="en-US" sz="2800" dirty="0">
+                <a:solidFill>
+                  <a:srgbClr val="0070C0"/>
+                </a:solidFill>
+              </a:rPr>
+              <a:t>’ IDENTIFIED BY ‘</a:t>
+            </a:r>
+            <a:r>
+              <a:rPr lang="en-US" sz="2800" dirty="0" err="1">
+                <a:solidFill>
+                  <a:srgbClr val="0070C0"/>
+                </a:solidFill>
+              </a:rPr>
+              <a:t>senha</a:t>
+            </a:r>
+            <a:r>
+              <a:rPr lang="en-US" sz="2800" dirty="0">
+                <a:solidFill>
+                  <a:srgbClr val="0070C0"/>
+                </a:solidFill>
+              </a:rPr>
+              <a:t>’;</a:t>
+            </a:r>
+          </a:p>
+          <a:p>
+            <a:pPr algn="ctr"/>
+            <a:endParaRPr lang="en-US" sz="2800" dirty="0"/>
+          </a:p>
+          <a:p>
+            <a:pPr algn="ctr"/>
+            <a:r>
+              <a:rPr lang="it-IT" sz="2800" dirty="0">
+                <a:solidFill>
+                  <a:schemeClr val="tx1">
+                    <a:lumMod val="50000"/>
+                    <a:lumOff val="50000"/>
+                  </a:schemeClr>
+                </a:solidFill>
+              </a:rPr>
+              <a:t>GRANT ‘nomeRole’ TO ‘nomeUsuario’@’ip’;</a:t>
+            </a:r>
+          </a:p>
+          <a:p>
+            <a:pPr algn="ctr"/>
+            <a:endParaRPr lang="it-IT" sz="2800" dirty="0">
+              <a:solidFill>
+                <a:schemeClr val="tx1">
+                  <a:lumMod val="50000"/>
+                  <a:lumOff val="50000"/>
+                </a:schemeClr>
+              </a:solidFill>
+            </a:endParaRPr>
+          </a:p>
+          <a:p>
+            <a:pPr algn="ctr"/>
+            <a:r>
+              <a:rPr lang="pt-BR" sz="2800" dirty="0">
+                <a:solidFill>
+                  <a:schemeClr val="tx1">
+                    <a:lumMod val="50000"/>
+                    <a:lumOff val="50000"/>
+                  </a:schemeClr>
+                </a:solidFill>
+              </a:rPr>
+              <a:t>SET DEFAULT ROLE ‘</a:t>
+            </a:r>
+            <a:r>
+              <a:rPr lang="pt-BR" sz="2800" dirty="0" err="1">
+                <a:solidFill>
+                  <a:schemeClr val="tx1">
+                    <a:lumMod val="50000"/>
+                    <a:lumOff val="50000"/>
+                  </a:schemeClr>
+                </a:solidFill>
+              </a:rPr>
+              <a:t>nomeRole</a:t>
+            </a:r>
+            <a:r>
+              <a:rPr lang="pt-BR" sz="2800" dirty="0">
+                <a:solidFill>
+                  <a:schemeClr val="tx1">
+                    <a:lumMod val="50000"/>
+                    <a:lumOff val="50000"/>
+                  </a:schemeClr>
+                </a:solidFill>
+              </a:rPr>
+              <a:t>’ TO ‘</a:t>
+            </a:r>
+            <a:r>
+              <a:rPr lang="pt-BR" sz="2800" dirty="0" err="1">
+                <a:solidFill>
+                  <a:schemeClr val="tx1">
+                    <a:lumMod val="50000"/>
+                    <a:lumOff val="50000"/>
+                  </a:schemeClr>
+                </a:solidFill>
+              </a:rPr>
+              <a:t>nomeUsuario</a:t>
+            </a:r>
+            <a:r>
+              <a:rPr lang="pt-BR" sz="2800" dirty="0">
+                <a:solidFill>
+                  <a:schemeClr val="tx1">
+                    <a:lumMod val="50000"/>
+                    <a:lumOff val="50000"/>
+                  </a:schemeClr>
+                </a:solidFill>
+              </a:rPr>
+              <a:t>’@’</a:t>
+            </a:r>
+            <a:r>
+              <a:rPr lang="pt-BR" sz="2800" dirty="0" err="1">
+                <a:solidFill>
+                  <a:schemeClr val="tx1">
+                    <a:lumMod val="50000"/>
+                    <a:lumOff val="50000"/>
+                  </a:schemeClr>
+                </a:solidFill>
+              </a:rPr>
+              <a:t>ip</a:t>
+            </a:r>
+            <a:r>
+              <a:rPr lang="pt-BR" sz="2800" dirty="0">
+                <a:solidFill>
+                  <a:schemeClr val="tx1">
+                    <a:lumMod val="50000"/>
+                    <a:lumOff val="50000"/>
+                  </a:schemeClr>
+                </a:solidFill>
+              </a:rPr>
+              <a:t>’;</a:t>
+            </a:r>
+          </a:p>
         </p:txBody>
       </p:sp>
     </p:spTree>
     <p:extLst>
       <p:ext uri="{BB962C8B-B14F-4D97-AF65-F5344CB8AC3E}">
-        <p14:creationId xmlns:p14="http://schemas.microsoft.com/office/powerpoint/2010/main" val="3532846639"/>
+        <p14:creationId xmlns:p14="http://schemas.microsoft.com/office/powerpoint/2010/main" val="1682615318"/>
+      </p:ext>
+    </p:extLst>
+  </p:cSld>
+  <p:clrMapOvr>
+    <a:masterClrMapping/>
+  </p:clrMapOvr>
+</p:sld>
+</file>
+
+<file path=ppt/slides/slide13.xml><?xml version="1.0" encoding="utf-8"?>
+<p:sld xmlns:a="http://schemas.openxmlformats.org/drawingml/2006/main" xmlns:r="http://schemas.openxmlformats.org/officeDocument/2006/relationships" xmlns:p="http://schemas.openxmlformats.org/presentationml/2006/main">
+  <p:cSld>
+    <p:spTree>
+      <p:nvGrpSpPr>
+        <p:cNvPr id="1" name="">
+          <a:extLst>
+            <a:ext uri="{FF2B5EF4-FFF2-40B4-BE49-F238E27FC236}">
+              <a16:creationId xmlns:a16="http://schemas.microsoft.com/office/drawing/2014/main" id="{B5852CE3-FFAA-EDB7-3945-B60351316F36}"/>
+            </a:ext>
+          </a:extLst>
+        </p:cNvPr>
+        <p:cNvGrpSpPr/>
+        <p:nvPr/>
+      </p:nvGrpSpPr>
+      <p:grpSpPr>
+        <a:xfrm>
+          <a:off x="0" y="0"/>
+          <a:ext cx="0" cy="0"/>
+          <a:chOff x="0" y="0"/>
+          <a:chExt cx="0" cy="0"/>
+        </a:xfrm>
+      </p:grpSpPr>
+      <p:pic>
+        <p:nvPicPr>
+          <p:cNvPr id="5" name="Imagem 4">
+            <a:extLst>
+              <a:ext uri="{FF2B5EF4-FFF2-40B4-BE49-F238E27FC236}">
+                <a16:creationId xmlns:a16="http://schemas.microsoft.com/office/drawing/2014/main" id="{4AE126FF-5C87-956F-62B6-461A3E4B1C26}"/>
+              </a:ext>
+            </a:extLst>
+          </p:cNvPr>
+          <p:cNvPicPr>
+            <a:picLocks noChangeAspect="1"/>
+          </p:cNvPicPr>
+          <p:nvPr/>
+        </p:nvPicPr>
+        <p:blipFill>
+          <a:blip r:embed="rId2">
+            <a:extLst>
+              <a:ext uri="{28A0092B-C50C-407E-A947-70E740481C1C}">
+                <a14:useLocalDpi xmlns:a14="http://schemas.microsoft.com/office/drawing/2010/main" val="0"/>
+              </a:ext>
+            </a:extLst>
+          </a:blip>
+          <a:stretch>
+            <a:fillRect/>
+          </a:stretch>
+        </p:blipFill>
+        <p:spPr>
+          <a:xfrm>
+            <a:off x="-61546" y="0"/>
+            <a:ext cx="12192000" cy="6858000"/>
+          </a:xfrm>
+          <a:prstGeom prst="rect">
+            <a:avLst/>
+          </a:prstGeom>
+        </p:spPr>
+      </p:pic>
+      <p:sp>
+        <p:nvSpPr>
+          <p:cNvPr id="2" name="CaixaDeTexto 1">
+            <a:extLst>
+              <a:ext uri="{FF2B5EF4-FFF2-40B4-BE49-F238E27FC236}">
+                <a16:creationId xmlns:a16="http://schemas.microsoft.com/office/drawing/2014/main" id="{41BE82BB-9E97-489B-5916-586B1B49BB81}"/>
+              </a:ext>
+            </a:extLst>
+          </p:cNvPr>
+          <p:cNvSpPr txBox="1"/>
+          <p:nvPr/>
+        </p:nvSpPr>
+        <p:spPr>
+          <a:xfrm>
+            <a:off x="4806553" y="220160"/>
+            <a:ext cx="2455801" cy="646331"/>
+          </a:xfrm>
+          <a:prstGeom prst="rect">
+            <a:avLst/>
+          </a:prstGeom>
+          <a:noFill/>
+        </p:spPr>
+        <p:txBody>
+          <a:bodyPr wrap="square" rtlCol="0">
+            <a:spAutoFit/>
+          </a:bodyPr>
+          <a:lstStyle/>
+          <a:p>
+            <a:r>
+              <a:rPr lang="en-US" sz="3600" dirty="0"/>
+              <a:t>Role (Papel)</a:t>
+            </a:r>
+            <a:endParaRPr lang="pt-BR" sz="3600" dirty="0"/>
+          </a:p>
+        </p:txBody>
+      </p:sp>
+      <p:sp>
+        <p:nvSpPr>
+          <p:cNvPr id="3" name="CaixaDeTexto 2">
+            <a:extLst>
+              <a:ext uri="{FF2B5EF4-FFF2-40B4-BE49-F238E27FC236}">
+                <a16:creationId xmlns:a16="http://schemas.microsoft.com/office/drawing/2014/main" id="{ACA56568-B99E-17BD-B877-A0B2024B18C7}"/>
+              </a:ext>
+            </a:extLst>
+          </p:cNvPr>
+          <p:cNvSpPr txBox="1"/>
+          <p:nvPr/>
+        </p:nvSpPr>
+        <p:spPr>
+          <a:xfrm>
+            <a:off x="3489079" y="1231104"/>
+            <a:ext cx="5090747" cy="584775"/>
+          </a:xfrm>
+          <a:prstGeom prst="rect">
+            <a:avLst/>
+          </a:prstGeom>
+          <a:noFill/>
+        </p:spPr>
+        <p:txBody>
+          <a:bodyPr wrap="square" rtlCol="0">
+            <a:spAutoFit/>
+          </a:bodyPr>
+          <a:lstStyle/>
+          <a:p>
+            <a:pPr algn="ctr"/>
+            <a:r>
+              <a:rPr lang="en-US" sz="3200" dirty="0" err="1"/>
+              <a:t>Associação</a:t>
+            </a:r>
+            <a:r>
+              <a:rPr lang="en-US" sz="3200" dirty="0"/>
+              <a:t> do </a:t>
+            </a:r>
+            <a:r>
+              <a:rPr lang="en-US" sz="3200" dirty="0" err="1"/>
+              <a:t>Usuário</a:t>
+            </a:r>
+            <a:r>
+              <a:rPr lang="en-US" sz="3200" dirty="0"/>
+              <a:t> à Role</a:t>
+            </a:r>
+          </a:p>
+        </p:txBody>
+      </p:sp>
+      <p:sp>
+        <p:nvSpPr>
+          <p:cNvPr id="4" name="CaixaDeTexto 3">
+            <a:extLst>
+              <a:ext uri="{FF2B5EF4-FFF2-40B4-BE49-F238E27FC236}">
+                <a16:creationId xmlns:a16="http://schemas.microsoft.com/office/drawing/2014/main" id="{824872A9-94AA-52D6-D2AD-A38B2DB86F3D}"/>
+              </a:ext>
+            </a:extLst>
+          </p:cNvPr>
+          <p:cNvSpPr txBox="1"/>
+          <p:nvPr/>
+        </p:nvSpPr>
+        <p:spPr>
+          <a:xfrm>
+            <a:off x="958362" y="2180492"/>
+            <a:ext cx="10550769" cy="3970318"/>
+          </a:xfrm>
+          <a:prstGeom prst="rect">
+            <a:avLst/>
+          </a:prstGeom>
+          <a:noFill/>
+        </p:spPr>
+        <p:txBody>
+          <a:bodyPr wrap="square" rtlCol="0">
+            <a:spAutoFit/>
+          </a:bodyPr>
+          <a:lstStyle/>
+          <a:p>
+            <a:pPr algn="ctr"/>
+            <a:r>
+              <a:rPr lang="pt-BR" sz="2800" dirty="0">
+                <a:solidFill>
+                  <a:schemeClr val="tx1">
+                    <a:lumMod val="50000"/>
+                    <a:lumOff val="50000"/>
+                  </a:schemeClr>
+                </a:solidFill>
+              </a:rPr>
+              <a:t>CREATE ROLE ‘</a:t>
+            </a:r>
+            <a:r>
+              <a:rPr lang="pt-BR" sz="2800" dirty="0" err="1">
+                <a:solidFill>
+                  <a:schemeClr val="tx1">
+                    <a:lumMod val="50000"/>
+                    <a:lumOff val="50000"/>
+                  </a:schemeClr>
+                </a:solidFill>
+              </a:rPr>
+              <a:t>nomeRole</a:t>
+            </a:r>
+            <a:r>
+              <a:rPr lang="pt-BR" sz="2800" dirty="0">
+                <a:solidFill>
+                  <a:schemeClr val="tx1">
+                    <a:lumMod val="50000"/>
+                    <a:lumOff val="50000"/>
+                  </a:schemeClr>
+                </a:solidFill>
+              </a:rPr>
+              <a:t>’;</a:t>
+            </a:r>
+          </a:p>
+          <a:p>
+            <a:pPr algn="ctr"/>
+            <a:endParaRPr lang="pt-BR" sz="2800" dirty="0">
+              <a:solidFill>
+                <a:schemeClr val="tx1">
+                  <a:lumMod val="50000"/>
+                  <a:lumOff val="50000"/>
+                </a:schemeClr>
+              </a:solidFill>
+            </a:endParaRPr>
+          </a:p>
+          <a:p>
+            <a:pPr algn="ctr"/>
+            <a:r>
+              <a:rPr lang="en-US" sz="2800" dirty="0">
+                <a:solidFill>
+                  <a:schemeClr val="tx1">
+                    <a:lumMod val="50000"/>
+                    <a:lumOff val="50000"/>
+                  </a:schemeClr>
+                </a:solidFill>
+              </a:rPr>
+              <a:t>GRANT [</a:t>
+            </a:r>
+            <a:r>
+              <a:rPr lang="en-US" sz="2800" dirty="0" err="1">
+                <a:solidFill>
+                  <a:schemeClr val="tx1">
+                    <a:lumMod val="50000"/>
+                    <a:lumOff val="50000"/>
+                  </a:schemeClr>
+                </a:solidFill>
+              </a:rPr>
+              <a:t>comandos</a:t>
+            </a:r>
+            <a:r>
+              <a:rPr lang="en-US" sz="2800" dirty="0">
+                <a:solidFill>
+                  <a:schemeClr val="tx1">
+                    <a:lumMod val="50000"/>
+                    <a:lumOff val="50000"/>
+                  </a:schemeClr>
+                </a:solidFill>
+              </a:rPr>
+              <a:t>] ON [database].[</a:t>
+            </a:r>
+            <a:r>
+              <a:rPr lang="en-US" sz="2800" dirty="0" err="1">
+                <a:solidFill>
+                  <a:schemeClr val="tx1">
+                    <a:lumMod val="50000"/>
+                    <a:lumOff val="50000"/>
+                  </a:schemeClr>
+                </a:solidFill>
+              </a:rPr>
+              <a:t>tabela</a:t>
+            </a:r>
+            <a:r>
+              <a:rPr lang="en-US" sz="2800" dirty="0">
+                <a:solidFill>
+                  <a:schemeClr val="tx1">
+                    <a:lumMod val="50000"/>
+                    <a:lumOff val="50000"/>
+                  </a:schemeClr>
+                </a:solidFill>
+              </a:rPr>
+              <a:t>] TO ‘</a:t>
+            </a:r>
+            <a:r>
+              <a:rPr lang="en-US" sz="2800" dirty="0" err="1">
+                <a:solidFill>
+                  <a:schemeClr val="tx1">
+                    <a:lumMod val="50000"/>
+                    <a:lumOff val="50000"/>
+                  </a:schemeClr>
+                </a:solidFill>
+              </a:rPr>
+              <a:t>nomeRole</a:t>
+            </a:r>
+            <a:r>
+              <a:rPr lang="en-US" sz="2800" dirty="0">
+                <a:solidFill>
+                  <a:schemeClr val="tx1">
+                    <a:lumMod val="50000"/>
+                    <a:lumOff val="50000"/>
+                  </a:schemeClr>
+                </a:solidFill>
+              </a:rPr>
+              <a:t>’;</a:t>
+            </a:r>
+          </a:p>
+          <a:p>
+            <a:pPr algn="ctr"/>
+            <a:endParaRPr lang="en-US" sz="2800" dirty="0">
+              <a:solidFill>
+                <a:schemeClr val="tx1">
+                  <a:lumMod val="50000"/>
+                  <a:lumOff val="50000"/>
+                </a:schemeClr>
+              </a:solidFill>
+            </a:endParaRPr>
+          </a:p>
+          <a:p>
+            <a:pPr algn="ctr"/>
+            <a:r>
+              <a:rPr lang="en-US" sz="2800" dirty="0">
+                <a:solidFill>
+                  <a:schemeClr val="tx1">
+                    <a:lumMod val="50000"/>
+                    <a:lumOff val="50000"/>
+                  </a:schemeClr>
+                </a:solidFill>
+              </a:rPr>
+              <a:t>CREATE USER ‘</a:t>
+            </a:r>
+            <a:r>
+              <a:rPr lang="en-US" sz="2800" dirty="0" err="1">
+                <a:solidFill>
+                  <a:schemeClr val="tx1">
+                    <a:lumMod val="50000"/>
+                    <a:lumOff val="50000"/>
+                  </a:schemeClr>
+                </a:solidFill>
+              </a:rPr>
+              <a:t>nomeUsuario</a:t>
+            </a:r>
+            <a:r>
+              <a:rPr lang="en-US" sz="2800" dirty="0">
+                <a:solidFill>
+                  <a:schemeClr val="tx1">
+                    <a:lumMod val="50000"/>
+                    <a:lumOff val="50000"/>
+                  </a:schemeClr>
+                </a:solidFill>
+              </a:rPr>
+              <a:t>’@’</a:t>
+            </a:r>
+            <a:r>
+              <a:rPr lang="en-US" sz="2800" dirty="0" err="1">
+                <a:solidFill>
+                  <a:schemeClr val="tx1">
+                    <a:lumMod val="50000"/>
+                    <a:lumOff val="50000"/>
+                  </a:schemeClr>
+                </a:solidFill>
+              </a:rPr>
+              <a:t>ip</a:t>
+            </a:r>
+            <a:r>
+              <a:rPr lang="en-US" sz="2800" dirty="0">
+                <a:solidFill>
+                  <a:schemeClr val="tx1">
+                    <a:lumMod val="50000"/>
+                    <a:lumOff val="50000"/>
+                  </a:schemeClr>
+                </a:solidFill>
+              </a:rPr>
+              <a:t>’ IDENTIFIED BY ‘</a:t>
+            </a:r>
+            <a:r>
+              <a:rPr lang="en-US" sz="2800" dirty="0" err="1">
+                <a:solidFill>
+                  <a:schemeClr val="tx1">
+                    <a:lumMod val="50000"/>
+                    <a:lumOff val="50000"/>
+                  </a:schemeClr>
+                </a:solidFill>
+              </a:rPr>
+              <a:t>senha</a:t>
+            </a:r>
+            <a:r>
+              <a:rPr lang="en-US" sz="2800" dirty="0">
+                <a:solidFill>
+                  <a:schemeClr val="tx1">
+                    <a:lumMod val="50000"/>
+                    <a:lumOff val="50000"/>
+                  </a:schemeClr>
+                </a:solidFill>
+              </a:rPr>
+              <a:t>’;</a:t>
+            </a:r>
+          </a:p>
+          <a:p>
+            <a:pPr algn="ctr"/>
+            <a:endParaRPr lang="en-US" sz="2800" dirty="0"/>
+          </a:p>
+          <a:p>
+            <a:pPr algn="ctr"/>
+            <a:r>
+              <a:rPr lang="it-IT" sz="2800" dirty="0">
+                <a:solidFill>
+                  <a:srgbClr val="0070C0"/>
+                </a:solidFill>
+              </a:rPr>
+              <a:t>GRANT ‘nomeRole’ TO ‘nomeUsuario’@’ip’;</a:t>
+            </a:r>
+          </a:p>
+          <a:p>
+            <a:pPr algn="ctr"/>
+            <a:endParaRPr lang="it-IT" sz="2800" dirty="0"/>
+          </a:p>
+          <a:p>
+            <a:pPr algn="ctr"/>
+            <a:r>
+              <a:rPr lang="pt-BR" sz="2800" dirty="0">
+                <a:solidFill>
+                  <a:schemeClr val="tx1">
+                    <a:lumMod val="50000"/>
+                    <a:lumOff val="50000"/>
+                  </a:schemeClr>
+                </a:solidFill>
+              </a:rPr>
+              <a:t>SET DEFAULT ROLE ‘</a:t>
+            </a:r>
+            <a:r>
+              <a:rPr lang="pt-BR" sz="2800" dirty="0" err="1">
+                <a:solidFill>
+                  <a:schemeClr val="tx1">
+                    <a:lumMod val="50000"/>
+                    <a:lumOff val="50000"/>
+                  </a:schemeClr>
+                </a:solidFill>
+              </a:rPr>
+              <a:t>nomeRole</a:t>
+            </a:r>
+            <a:r>
+              <a:rPr lang="pt-BR" sz="2800" dirty="0">
+                <a:solidFill>
+                  <a:schemeClr val="tx1">
+                    <a:lumMod val="50000"/>
+                    <a:lumOff val="50000"/>
+                  </a:schemeClr>
+                </a:solidFill>
+              </a:rPr>
+              <a:t>’ TO ‘</a:t>
+            </a:r>
+            <a:r>
+              <a:rPr lang="pt-BR" sz="2800" dirty="0" err="1">
+                <a:solidFill>
+                  <a:schemeClr val="tx1">
+                    <a:lumMod val="50000"/>
+                    <a:lumOff val="50000"/>
+                  </a:schemeClr>
+                </a:solidFill>
+              </a:rPr>
+              <a:t>nomeUsuario</a:t>
+            </a:r>
+            <a:r>
+              <a:rPr lang="pt-BR" sz="2800" dirty="0">
+                <a:solidFill>
+                  <a:schemeClr val="tx1">
+                    <a:lumMod val="50000"/>
+                    <a:lumOff val="50000"/>
+                  </a:schemeClr>
+                </a:solidFill>
+              </a:rPr>
+              <a:t>’@’</a:t>
+            </a:r>
+            <a:r>
+              <a:rPr lang="pt-BR" sz="2800" dirty="0" err="1">
+                <a:solidFill>
+                  <a:schemeClr val="tx1">
+                    <a:lumMod val="50000"/>
+                    <a:lumOff val="50000"/>
+                  </a:schemeClr>
+                </a:solidFill>
+              </a:rPr>
+              <a:t>ip</a:t>
+            </a:r>
+            <a:r>
+              <a:rPr lang="pt-BR" sz="2800" dirty="0">
+                <a:solidFill>
+                  <a:schemeClr val="tx1">
+                    <a:lumMod val="50000"/>
+                    <a:lumOff val="50000"/>
+                  </a:schemeClr>
+                </a:solidFill>
+              </a:rPr>
+              <a:t>’;</a:t>
+            </a:r>
+          </a:p>
+        </p:txBody>
+      </p:sp>
+    </p:spTree>
+    <p:extLst>
+      <p:ext uri="{BB962C8B-B14F-4D97-AF65-F5344CB8AC3E}">
+        <p14:creationId xmlns:p14="http://schemas.microsoft.com/office/powerpoint/2010/main" val="2431395721"/>
+      </p:ext>
+    </p:extLst>
+  </p:cSld>
+  <p:clrMapOvr>
+    <a:masterClrMapping/>
+  </p:clrMapOvr>
+</p:sld>
+</file>
+
+<file path=ppt/slides/slide14.xml><?xml version="1.0" encoding="utf-8"?>
+<p:sld xmlns:a="http://schemas.openxmlformats.org/drawingml/2006/main" xmlns:r="http://schemas.openxmlformats.org/officeDocument/2006/relationships" xmlns:p="http://schemas.openxmlformats.org/presentationml/2006/main">
+  <p:cSld>
+    <p:spTree>
+      <p:nvGrpSpPr>
+        <p:cNvPr id="1" name="">
+          <a:extLst>
+            <a:ext uri="{FF2B5EF4-FFF2-40B4-BE49-F238E27FC236}">
+              <a16:creationId xmlns:a16="http://schemas.microsoft.com/office/drawing/2014/main" id="{7BC2C12F-71A8-8151-2DF3-B49CBFC09B3C}"/>
+            </a:ext>
+          </a:extLst>
+        </p:cNvPr>
+        <p:cNvGrpSpPr/>
+        <p:nvPr/>
+      </p:nvGrpSpPr>
+      <p:grpSpPr>
+        <a:xfrm>
+          <a:off x="0" y="0"/>
+          <a:ext cx="0" cy="0"/>
+          <a:chOff x="0" y="0"/>
+          <a:chExt cx="0" cy="0"/>
+        </a:xfrm>
+      </p:grpSpPr>
+      <p:pic>
+        <p:nvPicPr>
+          <p:cNvPr id="5" name="Imagem 4">
+            <a:extLst>
+              <a:ext uri="{FF2B5EF4-FFF2-40B4-BE49-F238E27FC236}">
+                <a16:creationId xmlns:a16="http://schemas.microsoft.com/office/drawing/2014/main" id="{17541C9A-D5F6-A353-650A-E0151F41387F}"/>
+              </a:ext>
+            </a:extLst>
+          </p:cNvPr>
+          <p:cNvPicPr>
+            <a:picLocks noChangeAspect="1"/>
+          </p:cNvPicPr>
+          <p:nvPr/>
+        </p:nvPicPr>
+        <p:blipFill>
+          <a:blip r:embed="rId2">
+            <a:extLst>
+              <a:ext uri="{28A0092B-C50C-407E-A947-70E740481C1C}">
+                <a14:useLocalDpi xmlns:a14="http://schemas.microsoft.com/office/drawing/2010/main" val="0"/>
+              </a:ext>
+            </a:extLst>
+          </a:blip>
+          <a:stretch>
+            <a:fillRect/>
+          </a:stretch>
+        </p:blipFill>
+        <p:spPr>
+          <a:xfrm>
+            <a:off x="-61546" y="0"/>
+            <a:ext cx="12192000" cy="6858000"/>
+          </a:xfrm>
+          <a:prstGeom prst="rect">
+            <a:avLst/>
+          </a:prstGeom>
+        </p:spPr>
+      </p:pic>
+      <p:sp>
+        <p:nvSpPr>
+          <p:cNvPr id="2" name="CaixaDeTexto 1">
+            <a:extLst>
+              <a:ext uri="{FF2B5EF4-FFF2-40B4-BE49-F238E27FC236}">
+                <a16:creationId xmlns:a16="http://schemas.microsoft.com/office/drawing/2014/main" id="{42572A47-60FE-AD19-7676-EE935C7D51CB}"/>
+              </a:ext>
+            </a:extLst>
+          </p:cNvPr>
+          <p:cNvSpPr txBox="1"/>
+          <p:nvPr/>
+        </p:nvSpPr>
+        <p:spPr>
+          <a:xfrm>
+            <a:off x="4806553" y="220160"/>
+            <a:ext cx="2455801" cy="646331"/>
+          </a:xfrm>
+          <a:prstGeom prst="rect">
+            <a:avLst/>
+          </a:prstGeom>
+          <a:noFill/>
+        </p:spPr>
+        <p:txBody>
+          <a:bodyPr wrap="square" rtlCol="0">
+            <a:spAutoFit/>
+          </a:bodyPr>
+          <a:lstStyle/>
+          <a:p>
+            <a:r>
+              <a:rPr lang="en-US" sz="3600" dirty="0"/>
+              <a:t>Role (Papel)</a:t>
+            </a:r>
+            <a:endParaRPr lang="pt-BR" sz="3600" dirty="0"/>
+          </a:p>
+        </p:txBody>
+      </p:sp>
+      <p:sp>
+        <p:nvSpPr>
+          <p:cNvPr id="3" name="CaixaDeTexto 2">
+            <a:extLst>
+              <a:ext uri="{FF2B5EF4-FFF2-40B4-BE49-F238E27FC236}">
+                <a16:creationId xmlns:a16="http://schemas.microsoft.com/office/drawing/2014/main" id="{88AD5291-14C8-B893-0DE9-B885558E0AC9}"/>
+              </a:ext>
+            </a:extLst>
+          </p:cNvPr>
+          <p:cNvSpPr txBox="1"/>
+          <p:nvPr/>
+        </p:nvSpPr>
+        <p:spPr>
+          <a:xfrm>
+            <a:off x="618392" y="1231104"/>
+            <a:ext cx="10955215" cy="584775"/>
+          </a:xfrm>
+          <a:prstGeom prst="rect">
+            <a:avLst/>
+          </a:prstGeom>
+          <a:noFill/>
+        </p:spPr>
+        <p:txBody>
+          <a:bodyPr wrap="square" rtlCol="0">
+            <a:spAutoFit/>
+          </a:bodyPr>
+          <a:lstStyle/>
+          <a:p>
+            <a:pPr algn="ctr"/>
+            <a:r>
+              <a:rPr lang="en-US" sz="3200" dirty="0" err="1"/>
+              <a:t>Definição</a:t>
+            </a:r>
+            <a:r>
+              <a:rPr lang="en-US" sz="3200" dirty="0"/>
+              <a:t> da Role </a:t>
+            </a:r>
+            <a:r>
+              <a:rPr lang="en-US" sz="3200" dirty="0" err="1"/>
+              <a:t>Padrão</a:t>
+            </a:r>
+            <a:r>
+              <a:rPr lang="en-US" sz="3200" dirty="0"/>
+              <a:t> para </a:t>
+            </a:r>
+            <a:r>
+              <a:rPr lang="en-US" sz="3200" dirty="0" err="1"/>
+              <a:t>evitar</a:t>
+            </a:r>
+            <a:r>
+              <a:rPr lang="en-US" sz="3200" dirty="0"/>
+              <a:t> </a:t>
+            </a:r>
+            <a:r>
+              <a:rPr lang="en-US" sz="3200" dirty="0" err="1"/>
+              <a:t>erros</a:t>
+            </a:r>
+            <a:endParaRPr lang="en-US" sz="3200" dirty="0"/>
+          </a:p>
+        </p:txBody>
+      </p:sp>
+      <p:sp>
+        <p:nvSpPr>
+          <p:cNvPr id="4" name="CaixaDeTexto 3">
+            <a:extLst>
+              <a:ext uri="{FF2B5EF4-FFF2-40B4-BE49-F238E27FC236}">
+                <a16:creationId xmlns:a16="http://schemas.microsoft.com/office/drawing/2014/main" id="{E26B775B-08EF-D5DB-C26D-46931395FB38}"/>
+              </a:ext>
+            </a:extLst>
+          </p:cNvPr>
+          <p:cNvSpPr txBox="1"/>
+          <p:nvPr/>
+        </p:nvSpPr>
+        <p:spPr>
+          <a:xfrm>
+            <a:off x="958362" y="2180492"/>
+            <a:ext cx="10550769" cy="3970318"/>
+          </a:xfrm>
+          <a:prstGeom prst="rect">
+            <a:avLst/>
+          </a:prstGeom>
+          <a:noFill/>
+        </p:spPr>
+        <p:txBody>
+          <a:bodyPr wrap="square" rtlCol="0">
+            <a:spAutoFit/>
+          </a:bodyPr>
+          <a:lstStyle/>
+          <a:p>
+            <a:pPr algn="ctr"/>
+            <a:r>
+              <a:rPr lang="pt-BR" sz="2800" dirty="0">
+                <a:solidFill>
+                  <a:schemeClr val="tx1">
+                    <a:lumMod val="50000"/>
+                    <a:lumOff val="50000"/>
+                  </a:schemeClr>
+                </a:solidFill>
+              </a:rPr>
+              <a:t>CREATE ROLE ‘</a:t>
+            </a:r>
+            <a:r>
+              <a:rPr lang="pt-BR" sz="2800" dirty="0" err="1">
+                <a:solidFill>
+                  <a:schemeClr val="tx1">
+                    <a:lumMod val="50000"/>
+                    <a:lumOff val="50000"/>
+                  </a:schemeClr>
+                </a:solidFill>
+              </a:rPr>
+              <a:t>nomeRole</a:t>
+            </a:r>
+            <a:r>
+              <a:rPr lang="pt-BR" sz="2800" dirty="0">
+                <a:solidFill>
+                  <a:schemeClr val="tx1">
+                    <a:lumMod val="50000"/>
+                    <a:lumOff val="50000"/>
+                  </a:schemeClr>
+                </a:solidFill>
+              </a:rPr>
+              <a:t>’;</a:t>
+            </a:r>
+          </a:p>
+          <a:p>
+            <a:pPr algn="ctr"/>
+            <a:endParaRPr lang="pt-BR" sz="2800" dirty="0">
+              <a:solidFill>
+                <a:schemeClr val="tx1">
+                  <a:lumMod val="50000"/>
+                  <a:lumOff val="50000"/>
+                </a:schemeClr>
+              </a:solidFill>
+            </a:endParaRPr>
+          </a:p>
+          <a:p>
+            <a:pPr algn="ctr"/>
+            <a:r>
+              <a:rPr lang="en-US" sz="2800" dirty="0">
+                <a:solidFill>
+                  <a:schemeClr val="tx1">
+                    <a:lumMod val="50000"/>
+                    <a:lumOff val="50000"/>
+                  </a:schemeClr>
+                </a:solidFill>
+              </a:rPr>
+              <a:t>GRANT [</a:t>
+            </a:r>
+            <a:r>
+              <a:rPr lang="en-US" sz="2800" dirty="0" err="1">
+                <a:solidFill>
+                  <a:schemeClr val="tx1">
+                    <a:lumMod val="50000"/>
+                    <a:lumOff val="50000"/>
+                  </a:schemeClr>
+                </a:solidFill>
+              </a:rPr>
+              <a:t>comandos</a:t>
+            </a:r>
+            <a:r>
+              <a:rPr lang="en-US" sz="2800" dirty="0">
+                <a:solidFill>
+                  <a:schemeClr val="tx1">
+                    <a:lumMod val="50000"/>
+                    <a:lumOff val="50000"/>
+                  </a:schemeClr>
+                </a:solidFill>
+              </a:rPr>
+              <a:t>] ON [database].[</a:t>
+            </a:r>
+            <a:r>
+              <a:rPr lang="en-US" sz="2800" dirty="0" err="1">
+                <a:solidFill>
+                  <a:schemeClr val="tx1">
+                    <a:lumMod val="50000"/>
+                    <a:lumOff val="50000"/>
+                  </a:schemeClr>
+                </a:solidFill>
+              </a:rPr>
+              <a:t>tabela</a:t>
+            </a:r>
+            <a:r>
+              <a:rPr lang="en-US" sz="2800" dirty="0">
+                <a:solidFill>
+                  <a:schemeClr val="tx1">
+                    <a:lumMod val="50000"/>
+                    <a:lumOff val="50000"/>
+                  </a:schemeClr>
+                </a:solidFill>
+              </a:rPr>
+              <a:t>] TO ‘</a:t>
+            </a:r>
+            <a:r>
+              <a:rPr lang="en-US" sz="2800" dirty="0" err="1">
+                <a:solidFill>
+                  <a:schemeClr val="tx1">
+                    <a:lumMod val="50000"/>
+                    <a:lumOff val="50000"/>
+                  </a:schemeClr>
+                </a:solidFill>
+              </a:rPr>
+              <a:t>nomeRole</a:t>
+            </a:r>
+            <a:r>
+              <a:rPr lang="en-US" sz="2800" dirty="0">
+                <a:solidFill>
+                  <a:schemeClr val="tx1">
+                    <a:lumMod val="50000"/>
+                    <a:lumOff val="50000"/>
+                  </a:schemeClr>
+                </a:solidFill>
+              </a:rPr>
+              <a:t>’;</a:t>
+            </a:r>
+          </a:p>
+          <a:p>
+            <a:pPr algn="ctr"/>
+            <a:endParaRPr lang="en-US" sz="2800" dirty="0">
+              <a:solidFill>
+                <a:schemeClr val="tx1">
+                  <a:lumMod val="50000"/>
+                  <a:lumOff val="50000"/>
+                </a:schemeClr>
+              </a:solidFill>
+            </a:endParaRPr>
+          </a:p>
+          <a:p>
+            <a:pPr algn="ctr"/>
+            <a:r>
+              <a:rPr lang="en-US" sz="2800" dirty="0">
+                <a:solidFill>
+                  <a:schemeClr val="tx1">
+                    <a:lumMod val="50000"/>
+                    <a:lumOff val="50000"/>
+                  </a:schemeClr>
+                </a:solidFill>
+              </a:rPr>
+              <a:t>CREATE USER ‘</a:t>
+            </a:r>
+            <a:r>
+              <a:rPr lang="en-US" sz="2800" dirty="0" err="1">
+                <a:solidFill>
+                  <a:schemeClr val="tx1">
+                    <a:lumMod val="50000"/>
+                    <a:lumOff val="50000"/>
+                  </a:schemeClr>
+                </a:solidFill>
+              </a:rPr>
+              <a:t>nomeUsuario</a:t>
+            </a:r>
+            <a:r>
+              <a:rPr lang="en-US" sz="2800" dirty="0">
+                <a:solidFill>
+                  <a:schemeClr val="tx1">
+                    <a:lumMod val="50000"/>
+                    <a:lumOff val="50000"/>
+                  </a:schemeClr>
+                </a:solidFill>
+              </a:rPr>
+              <a:t>’@’</a:t>
+            </a:r>
+            <a:r>
+              <a:rPr lang="en-US" sz="2800" dirty="0" err="1">
+                <a:solidFill>
+                  <a:schemeClr val="tx1">
+                    <a:lumMod val="50000"/>
+                    <a:lumOff val="50000"/>
+                  </a:schemeClr>
+                </a:solidFill>
+              </a:rPr>
+              <a:t>ip</a:t>
+            </a:r>
+            <a:r>
+              <a:rPr lang="en-US" sz="2800" dirty="0">
+                <a:solidFill>
+                  <a:schemeClr val="tx1">
+                    <a:lumMod val="50000"/>
+                    <a:lumOff val="50000"/>
+                  </a:schemeClr>
+                </a:solidFill>
+              </a:rPr>
+              <a:t>’ IDENTIFIED BY ‘</a:t>
+            </a:r>
+            <a:r>
+              <a:rPr lang="en-US" sz="2800" dirty="0" err="1">
+                <a:solidFill>
+                  <a:schemeClr val="tx1">
+                    <a:lumMod val="50000"/>
+                    <a:lumOff val="50000"/>
+                  </a:schemeClr>
+                </a:solidFill>
+              </a:rPr>
+              <a:t>senha</a:t>
+            </a:r>
+            <a:r>
+              <a:rPr lang="en-US" sz="2800" dirty="0">
+                <a:solidFill>
+                  <a:schemeClr val="tx1">
+                    <a:lumMod val="50000"/>
+                    <a:lumOff val="50000"/>
+                  </a:schemeClr>
+                </a:solidFill>
+              </a:rPr>
+              <a:t>’;</a:t>
+            </a:r>
+          </a:p>
+          <a:p>
+            <a:pPr algn="ctr"/>
+            <a:endParaRPr lang="en-US" sz="2800" dirty="0">
+              <a:solidFill>
+                <a:schemeClr val="tx1">
+                  <a:lumMod val="50000"/>
+                  <a:lumOff val="50000"/>
+                </a:schemeClr>
+              </a:solidFill>
+            </a:endParaRPr>
+          </a:p>
+          <a:p>
+            <a:pPr algn="ctr"/>
+            <a:r>
+              <a:rPr lang="it-IT" sz="2800" dirty="0">
+                <a:solidFill>
+                  <a:schemeClr val="tx1">
+                    <a:lumMod val="50000"/>
+                    <a:lumOff val="50000"/>
+                  </a:schemeClr>
+                </a:solidFill>
+              </a:rPr>
+              <a:t>GRANT ‘nomeRole’ TO ‘nomeUsuario’@’ip’;</a:t>
+            </a:r>
+          </a:p>
+          <a:p>
+            <a:pPr algn="ctr"/>
+            <a:endParaRPr lang="it-IT" sz="2800" dirty="0"/>
+          </a:p>
+          <a:p>
+            <a:pPr algn="ctr"/>
+            <a:r>
+              <a:rPr lang="pt-BR" sz="2800" dirty="0">
+                <a:solidFill>
+                  <a:srgbClr val="0070C0"/>
+                </a:solidFill>
+              </a:rPr>
+              <a:t>SET DEFAULT ROLE ‘</a:t>
+            </a:r>
+            <a:r>
+              <a:rPr lang="pt-BR" sz="2800" dirty="0" err="1">
+                <a:solidFill>
+                  <a:srgbClr val="0070C0"/>
+                </a:solidFill>
+              </a:rPr>
+              <a:t>nomeRole</a:t>
+            </a:r>
+            <a:r>
+              <a:rPr lang="pt-BR" sz="2800" dirty="0">
+                <a:solidFill>
+                  <a:srgbClr val="0070C0"/>
+                </a:solidFill>
+              </a:rPr>
+              <a:t>’ TO ‘</a:t>
+            </a:r>
+            <a:r>
+              <a:rPr lang="pt-BR" sz="2800" dirty="0" err="1">
+                <a:solidFill>
+                  <a:srgbClr val="0070C0"/>
+                </a:solidFill>
+              </a:rPr>
+              <a:t>nomeUsuario</a:t>
+            </a:r>
+            <a:r>
+              <a:rPr lang="pt-BR" sz="2800" dirty="0">
+                <a:solidFill>
+                  <a:srgbClr val="0070C0"/>
+                </a:solidFill>
+              </a:rPr>
+              <a:t>’@’</a:t>
+            </a:r>
+            <a:r>
+              <a:rPr lang="pt-BR" sz="2800" dirty="0" err="1">
+                <a:solidFill>
+                  <a:srgbClr val="0070C0"/>
+                </a:solidFill>
+              </a:rPr>
+              <a:t>ip</a:t>
+            </a:r>
+            <a:r>
+              <a:rPr lang="pt-BR" sz="2800" dirty="0">
+                <a:solidFill>
+                  <a:srgbClr val="0070C0"/>
+                </a:solidFill>
+              </a:rPr>
+              <a:t>’;</a:t>
+            </a:r>
+          </a:p>
+        </p:txBody>
+      </p:sp>
+    </p:spTree>
+    <p:extLst>
+      <p:ext uri="{BB962C8B-B14F-4D97-AF65-F5344CB8AC3E}">
+        <p14:creationId xmlns:p14="http://schemas.microsoft.com/office/powerpoint/2010/main" val="3741737933"/>
+      </p:ext>
+    </p:extLst>
+  </p:cSld>
+  <p:clrMapOvr>
+    <a:masterClrMapping/>
+  </p:clrMapOvr>
+</p:sld>
+</file>
+
+<file path=ppt/slides/slide15.xml><?xml version="1.0" encoding="utf-8"?>
+<p:sld xmlns:a="http://schemas.openxmlformats.org/drawingml/2006/main" xmlns:r="http://schemas.openxmlformats.org/officeDocument/2006/relationships" xmlns:p="http://schemas.openxmlformats.org/presentationml/2006/main">
+  <p:cSld>
+    <p:spTree>
+      <p:nvGrpSpPr>
+        <p:cNvPr id="1" name="">
+          <a:extLst>
+            <a:ext uri="{FF2B5EF4-FFF2-40B4-BE49-F238E27FC236}">
+              <a16:creationId xmlns:a16="http://schemas.microsoft.com/office/drawing/2014/main" id="{91651228-7393-0AED-D026-1C1B31BEFF75}"/>
+            </a:ext>
+          </a:extLst>
+        </p:cNvPr>
+        <p:cNvGrpSpPr/>
+        <p:nvPr/>
+      </p:nvGrpSpPr>
+      <p:grpSpPr>
+        <a:xfrm>
+          <a:off x="0" y="0"/>
+          <a:ext cx="0" cy="0"/>
+          <a:chOff x="0" y="0"/>
+          <a:chExt cx="0" cy="0"/>
+        </a:xfrm>
+      </p:grpSpPr>
+      <p:pic>
+        <p:nvPicPr>
+          <p:cNvPr id="5" name="Imagem 4">
+            <a:extLst>
+              <a:ext uri="{FF2B5EF4-FFF2-40B4-BE49-F238E27FC236}">
+                <a16:creationId xmlns:a16="http://schemas.microsoft.com/office/drawing/2014/main" id="{3626665B-3842-854D-4353-602031C8FB9C}"/>
+              </a:ext>
+            </a:extLst>
+          </p:cNvPr>
+          <p:cNvPicPr>
+            <a:picLocks noChangeAspect="1"/>
+          </p:cNvPicPr>
+          <p:nvPr/>
+        </p:nvPicPr>
+        <p:blipFill>
+          <a:blip r:embed="rId2">
+            <a:extLst>
+              <a:ext uri="{28A0092B-C50C-407E-A947-70E740481C1C}">
+                <a14:useLocalDpi xmlns:a14="http://schemas.microsoft.com/office/drawing/2010/main" val="0"/>
+              </a:ext>
+            </a:extLst>
+          </a:blip>
+          <a:stretch>
+            <a:fillRect/>
+          </a:stretch>
+        </p:blipFill>
+        <p:spPr>
+          <a:xfrm>
+            <a:off x="-61546" y="0"/>
+            <a:ext cx="12192000" cy="6858000"/>
+          </a:xfrm>
+          <a:prstGeom prst="rect">
+            <a:avLst/>
+          </a:prstGeom>
+        </p:spPr>
+      </p:pic>
+      <p:sp>
+        <p:nvSpPr>
+          <p:cNvPr id="2" name="CaixaDeTexto 1">
+            <a:extLst>
+              <a:ext uri="{FF2B5EF4-FFF2-40B4-BE49-F238E27FC236}">
+                <a16:creationId xmlns:a16="http://schemas.microsoft.com/office/drawing/2014/main" id="{D4F5B659-D243-D9F8-6773-3F41AD3C8D37}"/>
+              </a:ext>
+            </a:extLst>
+          </p:cNvPr>
+          <p:cNvSpPr txBox="1"/>
+          <p:nvPr/>
+        </p:nvSpPr>
+        <p:spPr>
+          <a:xfrm>
+            <a:off x="5241770" y="225637"/>
+            <a:ext cx="1708456" cy="646331"/>
+          </a:xfrm>
+          <a:prstGeom prst="rect">
+            <a:avLst/>
+          </a:prstGeom>
+          <a:noFill/>
+        </p:spPr>
+        <p:txBody>
+          <a:bodyPr wrap="square" rtlCol="0">
+            <a:spAutoFit/>
+          </a:bodyPr>
+          <a:lstStyle/>
+          <a:p>
+            <a:r>
+              <a:rPr lang="en-US" sz="3600" dirty="0" err="1"/>
+              <a:t>Relação</a:t>
+            </a:r>
+            <a:endParaRPr lang="pt-BR" sz="3600" dirty="0"/>
+          </a:p>
+        </p:txBody>
+      </p:sp>
+      <p:pic>
+        <p:nvPicPr>
+          <p:cNvPr id="1030" name="Picture 6" descr="Design PNG E SVG De Ícone De Curso Da Ponte 09 Para Camisetas">
+            <a:extLst>
+              <a:ext uri="{FF2B5EF4-FFF2-40B4-BE49-F238E27FC236}">
+                <a16:creationId xmlns:a16="http://schemas.microsoft.com/office/drawing/2014/main" id="{1801145F-1C91-FD76-BC32-BA894C84ADCC}"/>
+              </a:ext>
+            </a:extLst>
+          </p:cNvPr>
+          <p:cNvPicPr>
+            <a:picLocks noChangeAspect="1" noChangeArrowheads="1"/>
+          </p:cNvPicPr>
+          <p:nvPr/>
+        </p:nvPicPr>
+        <p:blipFill>
+          <a:blip r:embed="rId3">
+            <a:extLst>
+              <a:ext uri="{28A0092B-C50C-407E-A947-70E740481C1C}">
+                <a14:useLocalDpi xmlns:a14="http://schemas.microsoft.com/office/drawing/2010/main" val="0"/>
+              </a:ext>
+            </a:extLst>
+          </a:blip>
+          <a:srcRect/>
+          <a:stretch>
+            <a:fillRect/>
+          </a:stretch>
+        </p:blipFill>
+        <p:spPr bwMode="auto">
+          <a:xfrm>
+            <a:off x="4289181" y="1456592"/>
+            <a:ext cx="3613638" cy="3613638"/>
+          </a:xfrm>
+          <a:prstGeom prst="rect">
+            <a:avLst/>
+          </a:prstGeom>
+          <a:noFill/>
+          <a:extLst>
+            <a:ext uri="{909E8E84-426E-40DD-AFC4-6F175D3DCCD1}">
+              <a14:hiddenFill xmlns:a14="http://schemas.microsoft.com/office/drawing/2010/main">
+                <a:solidFill>
+                  <a:srgbClr val="FFFFFF"/>
+                </a:solidFill>
+              </a14:hiddenFill>
+            </a:ext>
+          </a:extLst>
+        </p:spPr>
+      </p:pic>
+      <p:pic>
+        <p:nvPicPr>
+          <p:cNvPr id="1032" name="Picture 8" descr="O perfil completo de um DBA - Administrador de Banco de Dados!">
+            <a:extLst>
+              <a:ext uri="{FF2B5EF4-FFF2-40B4-BE49-F238E27FC236}">
+                <a16:creationId xmlns:a16="http://schemas.microsoft.com/office/drawing/2014/main" id="{093E9181-4EDF-9980-E09D-371077970B55}"/>
+              </a:ext>
+            </a:extLst>
+          </p:cNvPr>
+          <p:cNvPicPr>
+            <a:picLocks noChangeAspect="1" noChangeArrowheads="1"/>
+          </p:cNvPicPr>
+          <p:nvPr/>
+        </p:nvPicPr>
+        <p:blipFill>
+          <a:blip r:embed="rId4">
+            <a:extLst>
+              <a:ext uri="{28A0092B-C50C-407E-A947-70E740481C1C}">
+                <a14:useLocalDpi xmlns:a14="http://schemas.microsoft.com/office/drawing/2010/main" val="0"/>
+              </a:ext>
+            </a:extLst>
+          </a:blip>
+          <a:srcRect/>
+          <a:stretch>
+            <a:fillRect/>
+          </a:stretch>
+        </p:blipFill>
+        <p:spPr bwMode="auto">
+          <a:xfrm>
+            <a:off x="8305522" y="2537680"/>
+            <a:ext cx="3422229" cy="1782640"/>
+          </a:xfrm>
+          <a:prstGeom prst="rect">
+            <a:avLst/>
+          </a:prstGeom>
+          <a:noFill/>
+          <a:extLst>
+            <a:ext uri="{909E8E84-426E-40DD-AFC4-6F175D3DCCD1}">
+              <a14:hiddenFill xmlns:a14="http://schemas.microsoft.com/office/drawing/2010/main">
+                <a:solidFill>
+                  <a:srgbClr val="FFFFFF"/>
+                </a:solidFill>
+              </a14:hiddenFill>
+            </a:ext>
+          </a:extLst>
+        </p:spPr>
+      </p:pic>
+      <p:pic>
+        <p:nvPicPr>
+          <p:cNvPr id="1034" name="Picture 10" descr="ícone Da Equipe De Segurança Ilustração do Vetor - Ilustração de equipe,  protetor: 274945186">
+            <a:extLst>
+              <a:ext uri="{FF2B5EF4-FFF2-40B4-BE49-F238E27FC236}">
+                <a16:creationId xmlns:a16="http://schemas.microsoft.com/office/drawing/2014/main" id="{D4FB4C17-E6B2-9434-FCC2-AB33DD80E607}"/>
+              </a:ext>
+            </a:extLst>
+          </p:cNvPr>
+          <p:cNvPicPr>
+            <a:picLocks noChangeAspect="1" noChangeArrowheads="1"/>
+          </p:cNvPicPr>
+          <p:nvPr/>
+        </p:nvPicPr>
+        <p:blipFill>
+          <a:blip r:embed="rId5">
+            <a:extLst>
+              <a:ext uri="{28A0092B-C50C-407E-A947-70E740481C1C}">
+                <a14:useLocalDpi xmlns:a14="http://schemas.microsoft.com/office/drawing/2010/main" val="0"/>
+              </a:ext>
+            </a:extLst>
+          </a:blip>
+          <a:srcRect/>
+          <a:stretch>
+            <a:fillRect/>
+          </a:stretch>
+        </p:blipFill>
+        <p:spPr bwMode="auto">
+          <a:xfrm>
+            <a:off x="854137" y="2169319"/>
+            <a:ext cx="2519362" cy="2519362"/>
+          </a:xfrm>
+          <a:prstGeom prst="rect">
+            <a:avLst/>
+          </a:prstGeom>
+          <a:noFill/>
+          <a:extLst>
+            <a:ext uri="{909E8E84-426E-40DD-AFC4-6F175D3DCCD1}">
+              <a14:hiddenFill xmlns:a14="http://schemas.microsoft.com/office/drawing/2010/main">
+                <a:solidFill>
+                  <a:srgbClr val="FFFFFF"/>
+                </a:solidFill>
+              </a14:hiddenFill>
+            </a:ext>
+          </a:extLst>
+        </p:spPr>
+      </p:pic>
+      <p:sp>
+        <p:nvSpPr>
+          <p:cNvPr id="4" name="CaixaDeTexto 3">
+            <a:extLst>
+              <a:ext uri="{FF2B5EF4-FFF2-40B4-BE49-F238E27FC236}">
+                <a16:creationId xmlns:a16="http://schemas.microsoft.com/office/drawing/2014/main" id="{A5982AA7-38E6-54C2-BD25-BE3AC0F6A423}"/>
+              </a:ext>
+            </a:extLst>
+          </p:cNvPr>
+          <p:cNvSpPr txBox="1"/>
+          <p:nvPr/>
+        </p:nvSpPr>
+        <p:spPr>
+          <a:xfrm>
+            <a:off x="483577" y="4320320"/>
+            <a:ext cx="3112477" cy="646331"/>
+          </a:xfrm>
+          <a:prstGeom prst="rect">
+            <a:avLst/>
+          </a:prstGeom>
+          <a:noFill/>
+        </p:spPr>
+        <p:txBody>
+          <a:bodyPr wrap="square" rtlCol="0">
+            <a:spAutoFit/>
+          </a:bodyPr>
+          <a:lstStyle/>
+          <a:p>
+            <a:pPr algn="ctr"/>
+            <a:r>
+              <a:rPr lang="pt-BR" dirty="0"/>
+              <a:t>Equipe de Segurança da Informação</a:t>
+            </a:r>
+          </a:p>
+        </p:txBody>
+      </p:sp>
+      <p:sp>
+        <p:nvSpPr>
+          <p:cNvPr id="7" name="CaixaDeTexto 6">
+            <a:extLst>
+              <a:ext uri="{FF2B5EF4-FFF2-40B4-BE49-F238E27FC236}">
+                <a16:creationId xmlns:a16="http://schemas.microsoft.com/office/drawing/2014/main" id="{FF2FB9E0-34B6-4D84-60A1-E6D78B0F7256}"/>
+              </a:ext>
+            </a:extLst>
+          </p:cNvPr>
+          <p:cNvSpPr txBox="1"/>
+          <p:nvPr/>
+        </p:nvSpPr>
+        <p:spPr>
+          <a:xfrm>
+            <a:off x="9708905" y="4458819"/>
+            <a:ext cx="615461" cy="369332"/>
+          </a:xfrm>
+          <a:prstGeom prst="rect">
+            <a:avLst/>
+          </a:prstGeom>
+          <a:noFill/>
+        </p:spPr>
+        <p:txBody>
+          <a:bodyPr wrap="square" rtlCol="0">
+            <a:spAutoFit/>
+          </a:bodyPr>
+          <a:lstStyle/>
+          <a:p>
+            <a:r>
+              <a:rPr lang="pt-BR" dirty="0"/>
+              <a:t>DBA</a:t>
+            </a:r>
+          </a:p>
+        </p:txBody>
+      </p:sp>
+      <p:cxnSp>
+        <p:nvCxnSpPr>
+          <p:cNvPr id="9" name="Conector de Seta Reta 8">
+            <a:extLst>
+              <a:ext uri="{FF2B5EF4-FFF2-40B4-BE49-F238E27FC236}">
+                <a16:creationId xmlns:a16="http://schemas.microsoft.com/office/drawing/2014/main" id="{C3166C6F-5A0B-44E9-2F0C-D6E30F0CE2C7}"/>
+              </a:ext>
+            </a:extLst>
+          </p:cNvPr>
+          <p:cNvCxnSpPr/>
+          <p:nvPr/>
+        </p:nvCxnSpPr>
+        <p:spPr>
+          <a:xfrm>
+            <a:off x="2039815" y="4966651"/>
+            <a:ext cx="0" cy="818687"/>
+          </a:xfrm>
+          <a:prstGeom prst="straightConnector1">
+            <a:avLst/>
+          </a:prstGeom>
+          <a:ln>
+            <a:tailEnd type="triangle"/>
+          </a:ln>
+        </p:spPr>
+        <p:style>
+          <a:lnRef idx="1">
+            <a:schemeClr val="accent1"/>
+          </a:lnRef>
+          <a:fillRef idx="0">
+            <a:schemeClr val="accent1"/>
+          </a:fillRef>
+          <a:effectRef idx="0">
+            <a:schemeClr val="accent1"/>
+          </a:effectRef>
+          <a:fontRef idx="minor">
+            <a:schemeClr val="tx1"/>
+          </a:fontRef>
+        </p:style>
+      </p:cxnSp>
+      <p:sp>
+        <p:nvSpPr>
+          <p:cNvPr id="10" name="CaixaDeTexto 9">
+            <a:extLst>
+              <a:ext uri="{FF2B5EF4-FFF2-40B4-BE49-F238E27FC236}">
+                <a16:creationId xmlns:a16="http://schemas.microsoft.com/office/drawing/2014/main" id="{C639AB5B-1501-D07B-8B9B-FE0DBDB781B7}"/>
+              </a:ext>
+            </a:extLst>
+          </p:cNvPr>
+          <p:cNvSpPr txBox="1"/>
+          <p:nvPr/>
+        </p:nvSpPr>
+        <p:spPr>
+          <a:xfrm>
+            <a:off x="764931" y="5978769"/>
+            <a:ext cx="2532181" cy="646331"/>
+          </a:xfrm>
+          <a:prstGeom prst="rect">
+            <a:avLst/>
+          </a:prstGeom>
+          <a:noFill/>
+        </p:spPr>
+        <p:txBody>
+          <a:bodyPr wrap="square" rtlCol="0">
+            <a:spAutoFit/>
+          </a:bodyPr>
+          <a:lstStyle/>
+          <a:p>
+            <a:pPr algn="ctr"/>
+            <a:r>
+              <a:rPr lang="pt-BR" dirty="0"/>
+              <a:t>Define quem pode acessar</a:t>
+            </a:r>
+          </a:p>
+        </p:txBody>
+      </p:sp>
+      <p:cxnSp>
+        <p:nvCxnSpPr>
+          <p:cNvPr id="12" name="Conector de Seta Reta 11">
+            <a:extLst>
+              <a:ext uri="{FF2B5EF4-FFF2-40B4-BE49-F238E27FC236}">
+                <a16:creationId xmlns:a16="http://schemas.microsoft.com/office/drawing/2014/main" id="{AA450CA0-8B6C-10F2-3959-E337302670C2}"/>
+              </a:ext>
+            </a:extLst>
+          </p:cNvPr>
+          <p:cNvCxnSpPr>
+            <a:stCxn id="7" idx="2"/>
+          </p:cNvCxnSpPr>
+          <p:nvPr/>
+        </p:nvCxnSpPr>
+        <p:spPr>
+          <a:xfrm>
+            <a:off x="10016636" y="4828151"/>
+            <a:ext cx="6595" cy="957187"/>
+          </a:xfrm>
+          <a:prstGeom prst="straightConnector1">
+            <a:avLst/>
+          </a:prstGeom>
+          <a:ln>
+            <a:tailEnd type="triangle"/>
+          </a:ln>
+        </p:spPr>
+        <p:style>
+          <a:lnRef idx="1">
+            <a:schemeClr val="accent1"/>
+          </a:lnRef>
+          <a:fillRef idx="0">
+            <a:schemeClr val="accent1"/>
+          </a:fillRef>
+          <a:effectRef idx="0">
+            <a:schemeClr val="accent1"/>
+          </a:effectRef>
+          <a:fontRef idx="minor">
+            <a:schemeClr val="tx1"/>
+          </a:fontRef>
+        </p:style>
+      </p:cxnSp>
+      <p:sp>
+        <p:nvSpPr>
+          <p:cNvPr id="13" name="CaixaDeTexto 12">
+            <a:extLst>
+              <a:ext uri="{FF2B5EF4-FFF2-40B4-BE49-F238E27FC236}">
+                <a16:creationId xmlns:a16="http://schemas.microsoft.com/office/drawing/2014/main" id="{88EFC988-1686-CA77-8F3D-4010F37C430A}"/>
+              </a:ext>
+            </a:extLst>
+          </p:cNvPr>
+          <p:cNvSpPr txBox="1"/>
+          <p:nvPr/>
+        </p:nvSpPr>
+        <p:spPr>
+          <a:xfrm>
+            <a:off x="9219835" y="5831504"/>
+            <a:ext cx="1606792" cy="646331"/>
+          </a:xfrm>
+          <a:prstGeom prst="rect">
+            <a:avLst/>
+          </a:prstGeom>
+          <a:noFill/>
+        </p:spPr>
+        <p:txBody>
+          <a:bodyPr wrap="square" rtlCol="0">
+            <a:spAutoFit/>
+          </a:bodyPr>
+          <a:lstStyle/>
+          <a:p>
+            <a:pPr algn="ctr"/>
+            <a:r>
+              <a:rPr lang="pt-BR" dirty="0"/>
+              <a:t>Usa os comandos DCL</a:t>
+            </a:r>
+          </a:p>
+        </p:txBody>
+      </p:sp>
+    </p:spTree>
+    <p:extLst>
+      <p:ext uri="{BB962C8B-B14F-4D97-AF65-F5344CB8AC3E}">
+        <p14:creationId xmlns:p14="http://schemas.microsoft.com/office/powerpoint/2010/main" val="888838344"/>
+      </p:ext>
+    </p:extLst>
+  </p:cSld>
+  <p:clrMapOvr>
+    <a:masterClrMapping/>
+  </p:clrMapOvr>
+</p:sld>
+</file>
+
+<file path=ppt/slides/slide16.xml><?xml version="1.0" encoding="utf-8"?>
+<p:sld xmlns:a="http://schemas.openxmlformats.org/drawingml/2006/main" xmlns:r="http://schemas.openxmlformats.org/officeDocument/2006/relationships" xmlns:p="http://schemas.openxmlformats.org/presentationml/2006/main">
+  <p:cSld>
+    <p:spTree>
+      <p:nvGrpSpPr>
+        <p:cNvPr id="1" name="">
+          <a:extLst>
+            <a:ext uri="{FF2B5EF4-FFF2-40B4-BE49-F238E27FC236}">
+              <a16:creationId xmlns:a16="http://schemas.microsoft.com/office/drawing/2014/main" id="{05A3B772-D3DF-293E-F478-83752B56EB71}"/>
+            </a:ext>
+          </a:extLst>
+        </p:cNvPr>
+        <p:cNvGrpSpPr/>
+        <p:nvPr/>
+      </p:nvGrpSpPr>
+      <p:grpSpPr>
+        <a:xfrm>
+          <a:off x="0" y="0"/>
+          <a:ext cx="0" cy="0"/>
+          <a:chOff x="0" y="0"/>
+          <a:chExt cx="0" cy="0"/>
+        </a:xfrm>
+      </p:grpSpPr>
+      <p:pic>
+        <p:nvPicPr>
+          <p:cNvPr id="5" name="Imagem 4">
+            <a:extLst>
+              <a:ext uri="{FF2B5EF4-FFF2-40B4-BE49-F238E27FC236}">
+                <a16:creationId xmlns:a16="http://schemas.microsoft.com/office/drawing/2014/main" id="{CAF32267-F020-1340-2460-DA57BB1A53F2}"/>
+              </a:ext>
+            </a:extLst>
+          </p:cNvPr>
+          <p:cNvPicPr>
+            <a:picLocks noChangeAspect="1"/>
+          </p:cNvPicPr>
+          <p:nvPr/>
+        </p:nvPicPr>
+        <p:blipFill>
+          <a:blip r:embed="rId2">
+            <a:extLst>
+              <a:ext uri="{28A0092B-C50C-407E-A947-70E740481C1C}">
+                <a14:useLocalDpi xmlns:a14="http://schemas.microsoft.com/office/drawing/2010/main" val="0"/>
+              </a:ext>
+            </a:extLst>
+          </a:blip>
+          <a:stretch>
+            <a:fillRect/>
+          </a:stretch>
+        </p:blipFill>
+        <p:spPr>
+          <a:xfrm>
+            <a:off x="-61546" y="0"/>
+            <a:ext cx="12192000" cy="6858000"/>
+          </a:xfrm>
+          <a:prstGeom prst="rect">
+            <a:avLst/>
+          </a:prstGeom>
+        </p:spPr>
+      </p:pic>
+      <p:sp>
+        <p:nvSpPr>
+          <p:cNvPr id="2" name="CaixaDeTexto 1">
+            <a:extLst>
+              <a:ext uri="{FF2B5EF4-FFF2-40B4-BE49-F238E27FC236}">
+                <a16:creationId xmlns:a16="http://schemas.microsoft.com/office/drawing/2014/main" id="{9300A1D6-2EB4-CD0E-3C4B-32296BE5B095}"/>
+              </a:ext>
+            </a:extLst>
+          </p:cNvPr>
+          <p:cNvSpPr txBox="1"/>
+          <p:nvPr/>
+        </p:nvSpPr>
+        <p:spPr>
+          <a:xfrm>
+            <a:off x="2873275" y="250093"/>
+            <a:ext cx="6445450" cy="646331"/>
+          </a:xfrm>
+          <a:prstGeom prst="rect">
+            <a:avLst/>
+          </a:prstGeom>
+          <a:noFill/>
+        </p:spPr>
+        <p:txBody>
+          <a:bodyPr wrap="square" rtlCol="0">
+            <a:spAutoFit/>
+          </a:bodyPr>
+          <a:lstStyle/>
+          <a:p>
+            <a:pPr algn="ctr"/>
+            <a:r>
+              <a:rPr lang="en-US" sz="3600" dirty="0" err="1"/>
+              <a:t>Máscara</a:t>
+            </a:r>
+            <a:r>
+              <a:rPr lang="en-US" sz="3600" dirty="0"/>
+              <a:t> de Dados e Auditoria</a:t>
+            </a:r>
+            <a:endParaRPr lang="pt-BR" sz="3600" dirty="0"/>
+          </a:p>
+        </p:txBody>
+      </p:sp>
+      <p:sp>
+        <p:nvSpPr>
+          <p:cNvPr id="4" name="CaixaDeTexto 3">
+            <a:extLst>
+              <a:ext uri="{FF2B5EF4-FFF2-40B4-BE49-F238E27FC236}">
+                <a16:creationId xmlns:a16="http://schemas.microsoft.com/office/drawing/2014/main" id="{6E56FBF3-E67A-BD78-9884-D5F93EECD1D1}"/>
+              </a:ext>
+            </a:extLst>
+          </p:cNvPr>
+          <p:cNvSpPr txBox="1"/>
+          <p:nvPr/>
+        </p:nvSpPr>
+        <p:spPr>
+          <a:xfrm>
+            <a:off x="2385192" y="5179958"/>
+            <a:ext cx="1492065" cy="369332"/>
+          </a:xfrm>
+          <a:prstGeom prst="rect">
+            <a:avLst/>
+          </a:prstGeom>
+          <a:noFill/>
+        </p:spPr>
+        <p:txBody>
+          <a:bodyPr wrap="square" rtlCol="0">
+            <a:spAutoFit/>
+          </a:bodyPr>
+          <a:lstStyle/>
+          <a:p>
+            <a:pPr algn="ctr"/>
+            <a:r>
+              <a:rPr lang="pt-BR" dirty="0"/>
+              <a:t>Data </a:t>
+            </a:r>
+            <a:r>
+              <a:rPr lang="pt-BR" dirty="0" err="1"/>
+              <a:t>Masking</a:t>
+            </a:r>
+            <a:endParaRPr lang="pt-BR" dirty="0"/>
+          </a:p>
+        </p:txBody>
+      </p:sp>
+      <p:sp>
+        <p:nvSpPr>
+          <p:cNvPr id="7" name="CaixaDeTexto 6">
+            <a:extLst>
+              <a:ext uri="{FF2B5EF4-FFF2-40B4-BE49-F238E27FC236}">
+                <a16:creationId xmlns:a16="http://schemas.microsoft.com/office/drawing/2014/main" id="{B24BC821-9AEA-D6AF-7C88-1AA079CFC008}"/>
+              </a:ext>
+            </a:extLst>
+          </p:cNvPr>
+          <p:cNvSpPr txBox="1"/>
+          <p:nvPr/>
+        </p:nvSpPr>
+        <p:spPr>
+          <a:xfrm>
+            <a:off x="7473306" y="5179958"/>
+            <a:ext cx="2523697" cy="369332"/>
+          </a:xfrm>
+          <a:prstGeom prst="rect">
+            <a:avLst/>
+          </a:prstGeom>
+          <a:noFill/>
+        </p:spPr>
+        <p:txBody>
+          <a:bodyPr wrap="square" rtlCol="0">
+            <a:spAutoFit/>
+          </a:bodyPr>
+          <a:lstStyle/>
+          <a:p>
+            <a:r>
+              <a:rPr lang="pt-BR" dirty="0"/>
+              <a:t>Auditoria DCL – Audit.log</a:t>
+            </a:r>
+          </a:p>
+        </p:txBody>
+      </p:sp>
+      <p:pic>
+        <p:nvPicPr>
+          <p:cNvPr id="2050" name="Picture 2" descr="What is Data Masking">
+            <a:extLst>
+              <a:ext uri="{FF2B5EF4-FFF2-40B4-BE49-F238E27FC236}">
+                <a16:creationId xmlns:a16="http://schemas.microsoft.com/office/drawing/2014/main" id="{9B6189EB-89B4-829A-846D-697A3C2B1A40}"/>
+              </a:ext>
+            </a:extLst>
+          </p:cNvPr>
+          <p:cNvPicPr>
+            <a:picLocks noChangeAspect="1" noChangeArrowheads="1"/>
+          </p:cNvPicPr>
+          <p:nvPr/>
+        </p:nvPicPr>
+        <p:blipFill>
+          <a:blip r:embed="rId3">
+            <a:extLst>
+              <a:ext uri="{28A0092B-C50C-407E-A947-70E740481C1C}">
+                <a14:useLocalDpi xmlns:a14="http://schemas.microsoft.com/office/drawing/2010/main" val="0"/>
+              </a:ext>
+            </a:extLst>
+          </a:blip>
+          <a:srcRect/>
+          <a:stretch>
+            <a:fillRect/>
+          </a:stretch>
+        </p:blipFill>
+        <p:spPr bwMode="auto">
+          <a:xfrm>
+            <a:off x="494695" y="2201382"/>
+            <a:ext cx="5273060" cy="2646030"/>
+          </a:xfrm>
+          <a:prstGeom prst="rect">
+            <a:avLst/>
+          </a:prstGeom>
+          <a:noFill/>
+          <a:extLst>
+            <a:ext uri="{909E8E84-426E-40DD-AFC4-6F175D3DCCD1}">
+              <a14:hiddenFill xmlns:a14="http://schemas.microsoft.com/office/drawing/2010/main">
+                <a:solidFill>
+                  <a:srgbClr val="FFFFFF"/>
+                </a:solidFill>
+              </a14:hiddenFill>
+            </a:ext>
+          </a:extLst>
+        </p:spPr>
+      </p:pic>
+      <p:pic>
+        <p:nvPicPr>
+          <p:cNvPr id="2054" name="Picture 6" descr="Ilustração de personagem de desenho vetorial gráfico de auditoria | Vetor  Premium">
+            <a:extLst>
+              <a:ext uri="{FF2B5EF4-FFF2-40B4-BE49-F238E27FC236}">
+                <a16:creationId xmlns:a16="http://schemas.microsoft.com/office/drawing/2014/main" id="{068A1B3E-4EC7-F294-D919-A2C6B72D6FA8}"/>
+              </a:ext>
+            </a:extLst>
+          </p:cNvPr>
+          <p:cNvPicPr>
+            <a:picLocks noChangeAspect="1" noChangeArrowheads="1"/>
+          </p:cNvPicPr>
+          <p:nvPr/>
+        </p:nvPicPr>
+        <p:blipFill>
+          <a:blip r:embed="rId4">
+            <a:extLst>
+              <a:ext uri="{28A0092B-C50C-407E-A947-70E740481C1C}">
+                <a14:useLocalDpi xmlns:a14="http://schemas.microsoft.com/office/drawing/2010/main" val="0"/>
+              </a:ext>
+            </a:extLst>
+          </a:blip>
+          <a:srcRect/>
+          <a:stretch>
+            <a:fillRect/>
+          </a:stretch>
+        </p:blipFill>
+        <p:spPr bwMode="auto">
+          <a:xfrm>
+            <a:off x="7178550" y="1872395"/>
+            <a:ext cx="3113210" cy="3113210"/>
+          </a:xfrm>
+          <a:prstGeom prst="rect">
+            <a:avLst/>
+          </a:prstGeom>
+          <a:noFill/>
+          <a:extLst>
+            <a:ext uri="{909E8E84-426E-40DD-AFC4-6F175D3DCCD1}">
+              <a14:hiddenFill xmlns:a14="http://schemas.microsoft.com/office/drawing/2010/main">
+                <a:solidFill>
+                  <a:srgbClr val="FFFFFF"/>
+                </a:solidFill>
+              </a14:hiddenFill>
+            </a:ext>
+          </a:extLst>
+        </p:spPr>
+      </p:pic>
+    </p:spTree>
+    <p:extLst>
+      <p:ext uri="{BB962C8B-B14F-4D97-AF65-F5344CB8AC3E}">
+        <p14:creationId xmlns:p14="http://schemas.microsoft.com/office/powerpoint/2010/main" val="1404743195"/>
+      </p:ext>
+    </p:extLst>
+  </p:cSld>
+  <p:clrMapOvr>
+    <a:masterClrMapping/>
+  </p:clrMapOvr>
+</p:sld>
+</file>
+
+<file path=ppt/slides/slide17.xml><?xml version="1.0" encoding="utf-8"?>
+<p:sld xmlns:a="http://schemas.openxmlformats.org/drawingml/2006/main" xmlns:r="http://schemas.openxmlformats.org/officeDocument/2006/relationships" xmlns:p="http://schemas.openxmlformats.org/presentationml/2006/main">
+  <p:cSld>
+    <p:spTree>
+      <p:nvGrpSpPr>
+        <p:cNvPr id="1" name="">
+          <a:extLst>
+            <a:ext uri="{FF2B5EF4-FFF2-40B4-BE49-F238E27FC236}">
+              <a16:creationId xmlns:a16="http://schemas.microsoft.com/office/drawing/2014/main" id="{8B8E7AEA-3DDD-6D7B-F26B-1A656BFC2D64}"/>
+            </a:ext>
+          </a:extLst>
+        </p:cNvPr>
+        <p:cNvGrpSpPr/>
+        <p:nvPr/>
+      </p:nvGrpSpPr>
+      <p:grpSpPr>
+        <a:xfrm>
+          <a:off x="0" y="0"/>
+          <a:ext cx="0" cy="0"/>
+          <a:chOff x="0" y="0"/>
+          <a:chExt cx="0" cy="0"/>
+        </a:xfrm>
+      </p:grpSpPr>
+      <p:pic>
+        <p:nvPicPr>
+          <p:cNvPr id="5" name="Imagem 4">
+            <a:extLst>
+              <a:ext uri="{FF2B5EF4-FFF2-40B4-BE49-F238E27FC236}">
+                <a16:creationId xmlns:a16="http://schemas.microsoft.com/office/drawing/2014/main" id="{47643823-9693-7AF1-9E06-4DEFF57D3E82}"/>
+              </a:ext>
+            </a:extLst>
+          </p:cNvPr>
+          <p:cNvPicPr>
+            <a:picLocks noChangeAspect="1"/>
+          </p:cNvPicPr>
+          <p:nvPr/>
+        </p:nvPicPr>
+        <p:blipFill>
+          <a:blip r:embed="rId2">
+            <a:extLst>
+              <a:ext uri="{28A0092B-C50C-407E-A947-70E740481C1C}">
+                <a14:useLocalDpi xmlns:a14="http://schemas.microsoft.com/office/drawing/2010/main" val="0"/>
+              </a:ext>
+            </a:extLst>
+          </a:blip>
+          <a:stretch>
+            <a:fillRect/>
+          </a:stretch>
+        </p:blipFill>
+        <p:spPr>
+          <a:xfrm>
+            <a:off x="-61546" y="0"/>
+            <a:ext cx="12192000" cy="6858000"/>
+          </a:xfrm>
+          <a:prstGeom prst="rect">
+            <a:avLst/>
+          </a:prstGeom>
+        </p:spPr>
+      </p:pic>
+      <p:sp>
+        <p:nvSpPr>
+          <p:cNvPr id="2" name="CaixaDeTexto 1">
+            <a:extLst>
+              <a:ext uri="{FF2B5EF4-FFF2-40B4-BE49-F238E27FC236}">
+                <a16:creationId xmlns:a16="http://schemas.microsoft.com/office/drawing/2014/main" id="{04852F72-A595-2FD8-EA2D-F81CCEB5F826}"/>
+              </a:ext>
+            </a:extLst>
+          </p:cNvPr>
+          <p:cNvSpPr txBox="1"/>
+          <p:nvPr/>
+        </p:nvSpPr>
+        <p:spPr>
+          <a:xfrm>
+            <a:off x="4258969" y="221775"/>
+            <a:ext cx="3017571" cy="646331"/>
+          </a:xfrm>
+          <a:prstGeom prst="rect">
+            <a:avLst/>
+          </a:prstGeom>
+          <a:noFill/>
+        </p:spPr>
+        <p:txBody>
+          <a:bodyPr wrap="square" rtlCol="0">
+            <a:spAutoFit/>
+          </a:bodyPr>
+          <a:lstStyle/>
+          <a:p>
+            <a:pPr algn="ctr"/>
+            <a:r>
+              <a:rPr lang="en-US" sz="3600" dirty="0"/>
+              <a:t>RDBMS + LGPD</a:t>
+            </a:r>
+            <a:endParaRPr lang="pt-BR" sz="3600" dirty="0"/>
+          </a:p>
+        </p:txBody>
+      </p:sp>
+      <p:sp>
+        <p:nvSpPr>
+          <p:cNvPr id="3" name="CaixaDeTexto 2">
+            <a:extLst>
+              <a:ext uri="{FF2B5EF4-FFF2-40B4-BE49-F238E27FC236}">
+                <a16:creationId xmlns:a16="http://schemas.microsoft.com/office/drawing/2014/main" id="{A30FEC87-42D6-952A-14D6-F40D05520E91}"/>
+              </a:ext>
+            </a:extLst>
+          </p:cNvPr>
+          <p:cNvSpPr txBox="1"/>
+          <p:nvPr/>
+        </p:nvSpPr>
+        <p:spPr>
+          <a:xfrm>
+            <a:off x="703385" y="1257300"/>
+            <a:ext cx="7086600" cy="4370427"/>
+          </a:xfrm>
+          <a:prstGeom prst="rect">
+            <a:avLst/>
+          </a:prstGeom>
+          <a:noFill/>
+        </p:spPr>
+        <p:txBody>
+          <a:bodyPr wrap="square" rtlCol="0">
+            <a:spAutoFit/>
+          </a:bodyPr>
+          <a:lstStyle/>
+          <a:p>
+            <a:r>
+              <a:rPr lang="pt-BR" sz="3200" dirty="0"/>
+              <a:t>Criptografia</a:t>
+            </a:r>
+          </a:p>
+          <a:p>
+            <a:endParaRPr lang="pt-BR" sz="3200" dirty="0"/>
+          </a:p>
+          <a:p>
+            <a:pPr algn="ctr"/>
+            <a:r>
+              <a:rPr lang="pt-BR" sz="2000" dirty="0"/>
+              <a:t>Segurança das Informações por manipulação de dados e backups</a:t>
+            </a:r>
+          </a:p>
+          <a:p>
+            <a:pPr marL="342900" indent="-342900">
+              <a:buFontTx/>
+              <a:buChar char="-"/>
+            </a:pPr>
+            <a:endParaRPr lang="pt-BR" sz="2000" dirty="0"/>
+          </a:p>
+          <a:p>
+            <a:r>
+              <a:rPr lang="pt-BR" sz="2400" dirty="0"/>
+              <a:t>Tipos de Criptografia</a:t>
+            </a:r>
+          </a:p>
+          <a:p>
+            <a:endParaRPr lang="pt-BR" sz="2400" dirty="0"/>
+          </a:p>
+          <a:p>
+            <a:pPr marL="342900" indent="-342900">
+              <a:buFontTx/>
+              <a:buChar char="-"/>
+            </a:pPr>
+            <a:r>
+              <a:rPr lang="pt-BR" sz="2400" dirty="0"/>
+              <a:t>At </a:t>
+            </a:r>
+            <a:r>
+              <a:rPr lang="pt-BR" sz="2400" dirty="0" err="1"/>
+              <a:t>Rest</a:t>
+            </a:r>
+            <a:r>
+              <a:rPr lang="pt-BR" sz="2400" dirty="0"/>
+              <a:t>: </a:t>
+            </a:r>
+            <a:r>
+              <a:rPr lang="pt-BR" dirty="0"/>
+              <a:t>Proteção de dados físicos (como arquivos MySQL) por meio da conversão deles em um código ilegível;</a:t>
+            </a:r>
+            <a:endParaRPr lang="pt-BR" sz="2400" dirty="0"/>
+          </a:p>
+          <a:p>
+            <a:pPr marL="342900" indent="-342900">
+              <a:buFontTx/>
+              <a:buChar char="-"/>
+            </a:pPr>
+            <a:endParaRPr lang="pt-BR" sz="2400" dirty="0"/>
+          </a:p>
+          <a:p>
+            <a:pPr marL="342900" indent="-342900">
+              <a:buFontTx/>
+              <a:buChar char="-"/>
+            </a:pPr>
+            <a:r>
+              <a:rPr lang="pt-BR" sz="2400" dirty="0"/>
+              <a:t>In Transit: </a:t>
+            </a:r>
+            <a:r>
+              <a:rPr lang="pt-BR" dirty="0"/>
+              <a:t>Proteção de dados enquanto são transferidos entre redes, dispositivos ou servidores , utilizando protocolos como SSL/TLS para impedir interceptação.</a:t>
+            </a:r>
+            <a:endParaRPr lang="pt-BR" sz="2400" dirty="0"/>
+          </a:p>
+        </p:txBody>
+      </p:sp>
+      <p:pic>
+        <p:nvPicPr>
+          <p:cNvPr id="3074" name="Picture 2" descr="Compreendendo a Criptografia de Dados: Dados em Repouso, Em Trânsito, Em Uso">
+            <a:extLst>
+              <a:ext uri="{FF2B5EF4-FFF2-40B4-BE49-F238E27FC236}">
+                <a16:creationId xmlns:a16="http://schemas.microsoft.com/office/drawing/2014/main" id="{3BB80873-F3B7-2EEC-0358-47E55F75B7EF}"/>
+              </a:ext>
+            </a:extLst>
+          </p:cNvPr>
+          <p:cNvPicPr>
+            <a:picLocks noChangeAspect="1" noChangeArrowheads="1"/>
+          </p:cNvPicPr>
+          <p:nvPr/>
+        </p:nvPicPr>
+        <p:blipFill>
+          <a:blip r:embed="rId3">
+            <a:extLst>
+              <a:ext uri="{28A0092B-C50C-407E-A947-70E740481C1C}">
+                <a14:useLocalDpi xmlns:a14="http://schemas.microsoft.com/office/drawing/2010/main" val="0"/>
+              </a:ext>
+            </a:extLst>
+          </a:blip>
+          <a:srcRect/>
+          <a:stretch>
+            <a:fillRect/>
+          </a:stretch>
+        </p:blipFill>
+        <p:spPr bwMode="auto">
+          <a:xfrm>
+            <a:off x="8182708" y="4041561"/>
+            <a:ext cx="3555023" cy="1986276"/>
+          </a:xfrm>
+          <a:prstGeom prst="rect">
+            <a:avLst/>
+          </a:prstGeom>
+          <a:noFill/>
+          <a:extLst>
+            <a:ext uri="{909E8E84-426E-40DD-AFC4-6F175D3DCCD1}">
+              <a14:hiddenFill xmlns:a14="http://schemas.microsoft.com/office/drawing/2010/main">
+                <a:solidFill>
+                  <a:srgbClr val="FFFFFF"/>
+                </a:solidFill>
+              </a14:hiddenFill>
+            </a:ext>
+          </a:extLst>
+        </p:spPr>
+      </p:pic>
+      <p:pic>
+        <p:nvPicPr>
+          <p:cNvPr id="3076" name="Picture 4" descr="O que é Criptografia de Dados? Definição, Tipos e Práticas Recomendadas -  Kinsta®">
+            <a:extLst>
+              <a:ext uri="{FF2B5EF4-FFF2-40B4-BE49-F238E27FC236}">
+                <a16:creationId xmlns:a16="http://schemas.microsoft.com/office/drawing/2014/main" id="{FFCA994E-0D56-8953-7D83-D3A739CCA99B}"/>
+              </a:ext>
+            </a:extLst>
+          </p:cNvPr>
+          <p:cNvPicPr>
+            <a:picLocks noChangeAspect="1" noChangeArrowheads="1"/>
+          </p:cNvPicPr>
+          <p:nvPr/>
+        </p:nvPicPr>
+        <p:blipFill>
+          <a:blip r:embed="rId4">
+            <a:extLst>
+              <a:ext uri="{28A0092B-C50C-407E-A947-70E740481C1C}">
+                <a14:useLocalDpi xmlns:a14="http://schemas.microsoft.com/office/drawing/2010/main" val="0"/>
+              </a:ext>
+            </a:extLst>
+          </a:blip>
+          <a:srcRect/>
+          <a:stretch>
+            <a:fillRect/>
+          </a:stretch>
+        </p:blipFill>
+        <p:spPr bwMode="auto">
+          <a:xfrm>
+            <a:off x="7789985" y="1653522"/>
+            <a:ext cx="3946645" cy="1759389"/>
+          </a:xfrm>
+          <a:prstGeom prst="rect">
+            <a:avLst/>
+          </a:prstGeom>
+          <a:noFill/>
+          <a:extLst>
+            <a:ext uri="{909E8E84-426E-40DD-AFC4-6F175D3DCCD1}">
+              <a14:hiddenFill xmlns:a14="http://schemas.microsoft.com/office/drawing/2010/main">
+                <a:solidFill>
+                  <a:srgbClr val="FFFFFF"/>
+                </a:solidFill>
+              </a14:hiddenFill>
+            </a:ext>
+          </a:extLst>
+        </p:spPr>
+      </p:pic>
+    </p:spTree>
+    <p:extLst>
+      <p:ext uri="{BB962C8B-B14F-4D97-AF65-F5344CB8AC3E}">
+        <p14:creationId xmlns:p14="http://schemas.microsoft.com/office/powerpoint/2010/main" val="2848078037"/>
+      </p:ext>
+    </p:extLst>
+  </p:cSld>
+  <p:clrMapOvr>
+    <a:masterClrMapping/>
+  </p:clrMapOvr>
+</p:sld>
+</file>
+
+<file path=ppt/slides/slide18.xml><?xml version="1.0" encoding="utf-8"?>
+<p:sld xmlns:a="http://schemas.openxmlformats.org/drawingml/2006/main" xmlns:r="http://schemas.openxmlformats.org/officeDocument/2006/relationships" xmlns:p="http://schemas.openxmlformats.org/presentationml/2006/main">
+  <p:cSld>
+    <p:spTree>
+      <p:nvGrpSpPr>
+        <p:cNvPr id="1" name="">
+          <a:extLst>
+            <a:ext uri="{FF2B5EF4-FFF2-40B4-BE49-F238E27FC236}">
+              <a16:creationId xmlns:a16="http://schemas.microsoft.com/office/drawing/2014/main" id="{2B950C98-6F1C-7C70-6881-B02A009888F9}"/>
+            </a:ext>
+          </a:extLst>
+        </p:cNvPr>
+        <p:cNvGrpSpPr/>
+        <p:nvPr/>
+      </p:nvGrpSpPr>
+      <p:grpSpPr>
+        <a:xfrm>
+          <a:off x="0" y="0"/>
+          <a:ext cx="0" cy="0"/>
+          <a:chOff x="0" y="0"/>
+          <a:chExt cx="0" cy="0"/>
+        </a:xfrm>
+      </p:grpSpPr>
+      <p:pic>
+        <p:nvPicPr>
+          <p:cNvPr id="5" name="Imagem 4">
+            <a:extLst>
+              <a:ext uri="{FF2B5EF4-FFF2-40B4-BE49-F238E27FC236}">
+                <a16:creationId xmlns:a16="http://schemas.microsoft.com/office/drawing/2014/main" id="{417052D6-932C-5B21-EC00-B89D65EB894A}"/>
+              </a:ext>
+            </a:extLst>
+          </p:cNvPr>
+          <p:cNvPicPr>
+            <a:picLocks noChangeAspect="1"/>
+          </p:cNvPicPr>
+          <p:nvPr/>
+        </p:nvPicPr>
+        <p:blipFill>
+          <a:blip r:embed="rId2">
+            <a:extLst>
+              <a:ext uri="{28A0092B-C50C-407E-A947-70E740481C1C}">
+                <a14:useLocalDpi xmlns:a14="http://schemas.microsoft.com/office/drawing/2010/main" val="0"/>
+              </a:ext>
+            </a:extLst>
+          </a:blip>
+          <a:stretch>
+            <a:fillRect/>
+          </a:stretch>
+        </p:blipFill>
+        <p:spPr>
+          <a:xfrm>
+            <a:off x="-61546" y="0"/>
+            <a:ext cx="12192000" cy="6858000"/>
+          </a:xfrm>
+          <a:prstGeom prst="rect">
+            <a:avLst/>
+          </a:prstGeom>
+        </p:spPr>
+      </p:pic>
+      <p:sp>
+        <p:nvSpPr>
+          <p:cNvPr id="2" name="CaixaDeTexto 1">
+            <a:extLst>
+              <a:ext uri="{FF2B5EF4-FFF2-40B4-BE49-F238E27FC236}">
+                <a16:creationId xmlns:a16="http://schemas.microsoft.com/office/drawing/2014/main" id="{06CC69D8-AEDF-90CB-2AA4-75372D12C35A}"/>
+              </a:ext>
+            </a:extLst>
+          </p:cNvPr>
+          <p:cNvSpPr txBox="1"/>
+          <p:nvPr/>
+        </p:nvSpPr>
+        <p:spPr>
+          <a:xfrm>
+            <a:off x="4172230" y="183832"/>
+            <a:ext cx="3847539" cy="646331"/>
+          </a:xfrm>
+          <a:prstGeom prst="rect">
+            <a:avLst/>
+          </a:prstGeom>
+          <a:noFill/>
+        </p:spPr>
+        <p:txBody>
+          <a:bodyPr wrap="square" rtlCol="0">
+            <a:spAutoFit/>
+          </a:bodyPr>
+          <a:lstStyle/>
+          <a:p>
+            <a:pPr algn="ctr"/>
+            <a:r>
+              <a:rPr lang="en-US" sz="3600" dirty="0"/>
+              <a:t>USER x ROLE x DBA</a:t>
+            </a:r>
+            <a:endParaRPr lang="pt-BR" sz="3600" dirty="0"/>
+          </a:p>
+        </p:txBody>
+      </p:sp>
+      <p:sp>
+        <p:nvSpPr>
+          <p:cNvPr id="3" name="CaixaDeTexto 2">
+            <a:extLst>
+              <a:ext uri="{FF2B5EF4-FFF2-40B4-BE49-F238E27FC236}">
+                <a16:creationId xmlns:a16="http://schemas.microsoft.com/office/drawing/2014/main" id="{E1419E76-BEA4-4941-892F-46BCEAC4DE6F}"/>
+              </a:ext>
+            </a:extLst>
+          </p:cNvPr>
+          <p:cNvSpPr txBox="1"/>
+          <p:nvPr/>
+        </p:nvSpPr>
+        <p:spPr>
+          <a:xfrm>
+            <a:off x="703385" y="1257300"/>
+            <a:ext cx="5994277" cy="5632311"/>
+          </a:xfrm>
+          <a:prstGeom prst="rect">
+            <a:avLst/>
+          </a:prstGeom>
+          <a:noFill/>
+        </p:spPr>
+        <p:txBody>
+          <a:bodyPr wrap="square" rtlCol="0">
+            <a:spAutoFit/>
+          </a:bodyPr>
+          <a:lstStyle/>
+          <a:p>
+            <a:r>
+              <a:rPr lang="pt-BR" sz="3200" dirty="0"/>
+              <a:t>User (Usuário)</a:t>
+            </a:r>
+          </a:p>
+          <a:p>
+            <a:pPr marL="285750" indent="-285750">
+              <a:buFontTx/>
+              <a:buChar char="-"/>
+            </a:pPr>
+            <a:r>
+              <a:rPr lang="pt-BR" dirty="0"/>
+              <a:t>Representa a conta de acesso (Identidade);</a:t>
+            </a:r>
+          </a:p>
+          <a:p>
+            <a:pPr marL="285750" indent="-285750">
+              <a:buFontTx/>
+              <a:buChar char="-"/>
+            </a:pPr>
+            <a:r>
+              <a:rPr lang="pt-BR" dirty="0"/>
+              <a:t>Função: Identificar a pessoa/sistema.</a:t>
+            </a:r>
+          </a:p>
+          <a:p>
+            <a:pPr marL="285750" indent="-285750">
+              <a:buFontTx/>
+              <a:buChar char="-"/>
+            </a:pPr>
+            <a:endParaRPr lang="pt-BR" sz="2400" dirty="0"/>
+          </a:p>
+          <a:p>
+            <a:pPr marL="285750" indent="-285750">
+              <a:buFontTx/>
+              <a:buChar char="-"/>
+            </a:pPr>
+            <a:endParaRPr lang="pt-BR" sz="2400" dirty="0"/>
+          </a:p>
+          <a:p>
+            <a:r>
+              <a:rPr lang="pt-BR" sz="3200" dirty="0"/>
+              <a:t>Role (Função)</a:t>
+            </a:r>
+          </a:p>
+          <a:p>
+            <a:pPr marL="285750" indent="-285750">
+              <a:buFontTx/>
+              <a:buChar char="-"/>
+            </a:pPr>
+            <a:r>
+              <a:rPr lang="pt-BR" dirty="0"/>
+              <a:t>Representa o “contêiner” de permissões dos usuários;</a:t>
+            </a:r>
+          </a:p>
+          <a:p>
+            <a:pPr marL="285750" indent="-285750">
+              <a:buFontTx/>
+              <a:buChar char="-"/>
+            </a:pPr>
+            <a:r>
+              <a:rPr lang="pt-BR" dirty="0"/>
+              <a:t>Função: Organizar permissões por cargo;</a:t>
+            </a:r>
+          </a:p>
+          <a:p>
+            <a:pPr marL="285750" indent="-285750">
+              <a:buFontTx/>
+              <a:buChar char="-"/>
+            </a:pPr>
+            <a:r>
+              <a:rPr lang="pt-BR" dirty="0"/>
+              <a:t>Usuários em comum fazem parte de um papel em comum.</a:t>
+            </a:r>
+          </a:p>
+          <a:p>
+            <a:pPr marL="285750" indent="-285750">
+              <a:buFontTx/>
+              <a:buChar char="-"/>
+            </a:pPr>
+            <a:endParaRPr lang="pt-BR" dirty="0"/>
+          </a:p>
+          <a:p>
+            <a:pPr marL="285750" indent="-285750">
+              <a:buFontTx/>
+              <a:buChar char="-"/>
+            </a:pPr>
+            <a:endParaRPr lang="pt-BR" dirty="0"/>
+          </a:p>
+          <a:p>
+            <a:r>
+              <a:rPr lang="pt-BR" sz="3200" dirty="0"/>
+              <a:t>DBA (</a:t>
+            </a:r>
+            <a:r>
+              <a:rPr lang="pt-BR" sz="3200" dirty="0" err="1"/>
+              <a:t>Database</a:t>
+            </a:r>
+            <a:r>
+              <a:rPr lang="pt-BR" sz="3200" dirty="0"/>
+              <a:t> Admin)</a:t>
+            </a:r>
+          </a:p>
+          <a:p>
+            <a:pPr marL="285750" indent="-285750">
+              <a:buFontTx/>
+              <a:buChar char="-"/>
+            </a:pPr>
+            <a:r>
+              <a:rPr lang="pt-BR" dirty="0"/>
+              <a:t>É mais do que simplesmente um usuário, representa o profissional por trás do gerenciamento do Banco de dados como um todo;</a:t>
+            </a:r>
+          </a:p>
+          <a:p>
+            <a:pPr marL="285750" indent="-285750">
+              <a:buFontTx/>
+              <a:buChar char="-"/>
+            </a:pPr>
+            <a:r>
+              <a:rPr lang="pt-BR" dirty="0"/>
+              <a:t>Função: Administrar a infraestrutura e segurança.</a:t>
+            </a:r>
+          </a:p>
+          <a:p>
+            <a:endParaRPr lang="pt-BR" dirty="0"/>
+          </a:p>
+        </p:txBody>
+      </p:sp>
+      <p:pic>
+        <p:nvPicPr>
+          <p:cNvPr id="4098" name="Picture 2" descr="Você sabe qual a importância de um DBA em seu projeto? - Arbit">
+            <a:extLst>
+              <a:ext uri="{FF2B5EF4-FFF2-40B4-BE49-F238E27FC236}">
+                <a16:creationId xmlns:a16="http://schemas.microsoft.com/office/drawing/2014/main" id="{2B7C63E5-ACAE-8D66-FB9C-C47BA22F7775}"/>
+              </a:ext>
+            </a:extLst>
+          </p:cNvPr>
+          <p:cNvPicPr>
+            <a:picLocks noChangeAspect="1" noChangeArrowheads="1"/>
+          </p:cNvPicPr>
+          <p:nvPr/>
+        </p:nvPicPr>
+        <p:blipFill>
+          <a:blip r:embed="rId3">
+            <a:extLst>
+              <a:ext uri="{28A0092B-C50C-407E-A947-70E740481C1C}">
+                <a14:useLocalDpi xmlns:a14="http://schemas.microsoft.com/office/drawing/2010/main" val="0"/>
+              </a:ext>
+            </a:extLst>
+          </a:blip>
+          <a:srcRect/>
+          <a:stretch>
+            <a:fillRect/>
+          </a:stretch>
+        </p:blipFill>
+        <p:spPr bwMode="auto">
+          <a:xfrm>
+            <a:off x="7136423" y="4988419"/>
+            <a:ext cx="2955070" cy="1664177"/>
+          </a:xfrm>
+          <a:prstGeom prst="snip2DiagRect">
+            <a:avLst/>
+          </a:prstGeom>
+          <a:solidFill>
+            <a:srgbClr val="FFFFFF">
+              <a:shade val="85000"/>
+            </a:srgbClr>
+          </a:solidFill>
+          <a:ln w="88900" cap="sq">
+            <a:solidFill>
+              <a:srgbClr val="FFFFFF"/>
+            </a:solidFill>
+            <a:miter lim="800000"/>
+          </a:ln>
+          <a:effectLst>
+            <a:outerShdw blurRad="88900" algn="tl" rotWithShape="0">
+              <a:srgbClr val="000000">
+                <a:alpha val="45000"/>
+              </a:srgbClr>
+            </a:outerShdw>
+          </a:effectLst>
+          <a:scene3d>
+            <a:camera prst="orthographicFront"/>
+            <a:lightRig rig="twoPt" dir="t">
+              <a:rot lat="0" lon="0" rev="7200000"/>
+            </a:lightRig>
+          </a:scene3d>
+          <a:sp3d>
+            <a:bevelT w="25400" h="19050"/>
+            <a:contourClr>
+              <a:srgbClr val="FFFFFF"/>
+            </a:contourClr>
+          </a:sp3d>
+          <a:extLst>
+            <a:ext uri="{909E8E84-426E-40DD-AFC4-6F175D3DCCD1}">
+              <a14:hiddenFill xmlns:a14="http://schemas.microsoft.com/office/drawing/2010/main">
+                <a:solidFill>
+                  <a:srgbClr val="FFFFFF"/>
+                </a:solidFill>
+              </a14:hiddenFill>
+            </a:ext>
+          </a:extLst>
+        </p:spPr>
+      </p:pic>
+      <p:pic>
+        <p:nvPicPr>
+          <p:cNvPr id="4100" name="Picture 4" descr="SQL Developer Job Description: Role, Skills, Salary &amp; More - CoderPad">
+            <a:extLst>
+              <a:ext uri="{FF2B5EF4-FFF2-40B4-BE49-F238E27FC236}">
+                <a16:creationId xmlns:a16="http://schemas.microsoft.com/office/drawing/2014/main" id="{0490DE8A-25FA-51B3-85CB-96AD675AC070}"/>
+              </a:ext>
+            </a:extLst>
+          </p:cNvPr>
+          <p:cNvPicPr>
+            <a:picLocks noChangeAspect="1" noChangeArrowheads="1"/>
+          </p:cNvPicPr>
+          <p:nvPr/>
+        </p:nvPicPr>
+        <p:blipFill>
+          <a:blip r:embed="rId4">
+            <a:extLst>
+              <a:ext uri="{28A0092B-C50C-407E-A947-70E740481C1C}">
+                <a14:useLocalDpi xmlns:a14="http://schemas.microsoft.com/office/drawing/2010/main" val="0"/>
+              </a:ext>
+            </a:extLst>
+          </a:blip>
+          <a:srcRect/>
+          <a:stretch>
+            <a:fillRect/>
+          </a:stretch>
+        </p:blipFill>
+        <p:spPr bwMode="auto">
+          <a:xfrm>
+            <a:off x="7739123" y="2832620"/>
+            <a:ext cx="2816469" cy="1878562"/>
+          </a:xfrm>
+          <a:prstGeom prst="rect">
+            <a:avLst/>
+          </a:prstGeom>
+          <a:noFill/>
+          <a:extLst>
+            <a:ext uri="{909E8E84-426E-40DD-AFC4-6F175D3DCCD1}">
+              <a14:hiddenFill xmlns:a14="http://schemas.microsoft.com/office/drawing/2010/main">
+                <a:solidFill>
+                  <a:srgbClr val="FFFFFF"/>
+                </a:solidFill>
+              </a14:hiddenFill>
+            </a:ext>
+          </a:extLst>
+        </p:spPr>
+      </p:pic>
+      <p:cxnSp>
+        <p:nvCxnSpPr>
+          <p:cNvPr id="6" name="Conector reto 5">
+            <a:extLst>
+              <a:ext uri="{FF2B5EF4-FFF2-40B4-BE49-F238E27FC236}">
+                <a16:creationId xmlns:a16="http://schemas.microsoft.com/office/drawing/2014/main" id="{4CB75E83-1403-5F5E-907F-AE29F18A797C}"/>
+              </a:ext>
+            </a:extLst>
+          </p:cNvPr>
+          <p:cNvCxnSpPr/>
+          <p:nvPr/>
+        </p:nvCxnSpPr>
+        <p:spPr>
+          <a:xfrm>
+            <a:off x="703385" y="2734408"/>
+            <a:ext cx="10893669" cy="0"/>
+          </a:xfrm>
+          <a:prstGeom prst="line">
+            <a:avLst/>
+          </a:prstGeom>
+        </p:spPr>
+        <p:style>
+          <a:lnRef idx="1">
+            <a:schemeClr val="accent1"/>
+          </a:lnRef>
+          <a:fillRef idx="0">
+            <a:schemeClr val="accent1"/>
+          </a:fillRef>
+          <a:effectRef idx="0">
+            <a:schemeClr val="accent1"/>
+          </a:effectRef>
+          <a:fontRef idx="minor">
+            <a:schemeClr val="tx1"/>
+          </a:fontRef>
+        </p:style>
+      </p:cxnSp>
+      <p:cxnSp>
+        <p:nvCxnSpPr>
+          <p:cNvPr id="8" name="Conector reto 7">
+            <a:extLst>
+              <a:ext uri="{FF2B5EF4-FFF2-40B4-BE49-F238E27FC236}">
+                <a16:creationId xmlns:a16="http://schemas.microsoft.com/office/drawing/2014/main" id="{232B4880-0DD4-764F-B9F7-FD8E7DEA25B9}"/>
+              </a:ext>
+            </a:extLst>
+          </p:cNvPr>
+          <p:cNvCxnSpPr/>
+          <p:nvPr/>
+        </p:nvCxnSpPr>
+        <p:spPr>
+          <a:xfrm>
+            <a:off x="703385" y="4783015"/>
+            <a:ext cx="10893669" cy="0"/>
+          </a:xfrm>
+          <a:prstGeom prst="line">
+            <a:avLst/>
+          </a:prstGeom>
+        </p:spPr>
+        <p:style>
+          <a:lnRef idx="1">
+            <a:schemeClr val="accent1"/>
+          </a:lnRef>
+          <a:fillRef idx="0">
+            <a:schemeClr val="accent1"/>
+          </a:fillRef>
+          <a:effectRef idx="0">
+            <a:schemeClr val="accent1"/>
+          </a:effectRef>
+          <a:fontRef idx="minor">
+            <a:schemeClr val="tx1"/>
+          </a:fontRef>
+        </p:style>
+      </p:cxnSp>
+      <p:pic>
+        <p:nvPicPr>
+          <p:cNvPr id="4102" name="Picture 6" descr="3.000+ Cientista De Dados Ilustração de stock, gráficos vetoriais e clipart  royalty-free - iStock">
+            <a:extLst>
+              <a:ext uri="{FF2B5EF4-FFF2-40B4-BE49-F238E27FC236}">
+                <a16:creationId xmlns:a16="http://schemas.microsoft.com/office/drawing/2014/main" id="{3FB4BF8E-008C-1EC7-7386-AFEF1B3EAB55}"/>
+              </a:ext>
+            </a:extLst>
+          </p:cNvPr>
+          <p:cNvPicPr>
+            <a:picLocks noChangeAspect="1" noChangeArrowheads="1"/>
+          </p:cNvPicPr>
+          <p:nvPr/>
+        </p:nvPicPr>
+        <p:blipFill>
+          <a:blip r:embed="rId5">
+            <a:extLst>
+              <a:ext uri="{28A0092B-C50C-407E-A947-70E740481C1C}">
+                <a14:useLocalDpi xmlns:a14="http://schemas.microsoft.com/office/drawing/2010/main" val="0"/>
+              </a:ext>
+            </a:extLst>
+          </a:blip>
+          <a:srcRect/>
+          <a:stretch>
+            <a:fillRect/>
+          </a:stretch>
+        </p:blipFill>
+        <p:spPr bwMode="auto">
+          <a:xfrm>
+            <a:off x="6554195" y="1063159"/>
+            <a:ext cx="4001397" cy="1582613"/>
+          </a:xfrm>
+          <a:prstGeom prst="rect">
+            <a:avLst/>
+          </a:prstGeom>
+          <a:noFill/>
+          <a:extLst>
+            <a:ext uri="{909E8E84-426E-40DD-AFC4-6F175D3DCCD1}">
+              <a14:hiddenFill xmlns:a14="http://schemas.microsoft.com/office/drawing/2010/main">
+                <a:solidFill>
+                  <a:srgbClr val="FFFFFF"/>
+                </a:solidFill>
+              </a14:hiddenFill>
+            </a:ext>
+          </a:extLst>
+        </p:spPr>
+      </p:pic>
+    </p:spTree>
+    <p:extLst>
+      <p:ext uri="{BB962C8B-B14F-4D97-AF65-F5344CB8AC3E}">
+        <p14:creationId xmlns:p14="http://schemas.microsoft.com/office/powerpoint/2010/main" val="2724142168"/>
+      </p:ext>
+    </p:extLst>
+  </p:cSld>
+  <p:clrMapOvr>
+    <a:masterClrMapping/>
+  </p:clrMapOvr>
+</p:sld>
+</file>
+
+<file path=ppt/slides/slide19.xml><?xml version="1.0" encoding="utf-8"?>
+<p:sld xmlns:a="http://schemas.openxmlformats.org/drawingml/2006/main" xmlns:r="http://schemas.openxmlformats.org/officeDocument/2006/relationships" xmlns:p="http://schemas.openxmlformats.org/presentationml/2006/main">
+  <p:cSld>
+    <p:spTree>
+      <p:nvGrpSpPr>
+        <p:cNvPr id="1" name="">
+          <a:extLst>
+            <a:ext uri="{FF2B5EF4-FFF2-40B4-BE49-F238E27FC236}">
+              <a16:creationId xmlns:a16="http://schemas.microsoft.com/office/drawing/2014/main" id="{6802D139-FCA3-7A77-170A-9C7BD6F0913A}"/>
+            </a:ext>
+          </a:extLst>
+        </p:cNvPr>
+        <p:cNvGrpSpPr/>
+        <p:nvPr/>
+      </p:nvGrpSpPr>
+      <p:grpSpPr>
+        <a:xfrm>
+          <a:off x="0" y="0"/>
+          <a:ext cx="0" cy="0"/>
+          <a:chOff x="0" y="0"/>
+          <a:chExt cx="0" cy="0"/>
+        </a:xfrm>
+      </p:grpSpPr>
+      <p:pic>
+        <p:nvPicPr>
+          <p:cNvPr id="5" name="Imagem 4">
+            <a:extLst>
+              <a:ext uri="{FF2B5EF4-FFF2-40B4-BE49-F238E27FC236}">
+                <a16:creationId xmlns:a16="http://schemas.microsoft.com/office/drawing/2014/main" id="{E35B40CF-27D2-5913-E42F-18006945F771}"/>
+              </a:ext>
+            </a:extLst>
+          </p:cNvPr>
+          <p:cNvPicPr>
+            <a:picLocks noChangeAspect="1"/>
+          </p:cNvPicPr>
+          <p:nvPr/>
+        </p:nvPicPr>
+        <p:blipFill>
+          <a:blip r:embed="rId2">
+            <a:extLst>
+              <a:ext uri="{28A0092B-C50C-407E-A947-70E740481C1C}">
+                <a14:useLocalDpi xmlns:a14="http://schemas.microsoft.com/office/drawing/2010/main" val="0"/>
+              </a:ext>
+            </a:extLst>
+          </a:blip>
+          <a:stretch>
+            <a:fillRect/>
+          </a:stretch>
+        </p:blipFill>
+        <p:spPr>
+          <a:xfrm>
+            <a:off x="0" y="0"/>
+            <a:ext cx="12192000" cy="6858000"/>
+          </a:xfrm>
+          <a:prstGeom prst="rect">
+            <a:avLst/>
+          </a:prstGeom>
+        </p:spPr>
+      </p:pic>
+      <p:pic>
+        <p:nvPicPr>
+          <p:cNvPr id="4" name="Imagem 3" descr="Interface gráfica do usuário, Texto, Aplicativo&#10;&#10;O conteúdo gerado por IA pode estar incorreto.">
+            <a:extLst>
+              <a:ext uri="{FF2B5EF4-FFF2-40B4-BE49-F238E27FC236}">
+                <a16:creationId xmlns:a16="http://schemas.microsoft.com/office/drawing/2014/main" id="{FC82F101-46D0-6AFC-72F6-2E9AECB00CD7}"/>
+              </a:ext>
+            </a:extLst>
+          </p:cNvPr>
+          <p:cNvPicPr>
+            <a:picLocks noChangeAspect="1"/>
+          </p:cNvPicPr>
+          <p:nvPr/>
+        </p:nvPicPr>
+        <p:blipFill>
+          <a:blip r:embed="rId3"/>
+          <a:stretch>
+            <a:fillRect/>
+          </a:stretch>
+        </p:blipFill>
+        <p:spPr>
+          <a:xfrm>
+            <a:off x="1106901" y="331795"/>
+            <a:ext cx="2870600" cy="2152950"/>
+          </a:xfrm>
+          <a:prstGeom prst="rect">
+            <a:avLst/>
+          </a:prstGeom>
+        </p:spPr>
+      </p:pic>
+      <p:pic>
+        <p:nvPicPr>
+          <p:cNvPr id="7" name="Imagem 6" descr="Tabela&#10;&#10;O conteúdo gerado por IA pode estar incorreto.">
+            <a:extLst>
+              <a:ext uri="{FF2B5EF4-FFF2-40B4-BE49-F238E27FC236}">
+                <a16:creationId xmlns:a16="http://schemas.microsoft.com/office/drawing/2014/main" id="{7B76D030-F957-6AEC-A976-EBD91BFF1AFD}"/>
+              </a:ext>
+            </a:extLst>
+          </p:cNvPr>
+          <p:cNvPicPr>
+            <a:picLocks noChangeAspect="1"/>
+          </p:cNvPicPr>
+          <p:nvPr/>
+        </p:nvPicPr>
+        <p:blipFill>
+          <a:blip r:embed="rId4"/>
+          <a:stretch>
+            <a:fillRect/>
+          </a:stretch>
+        </p:blipFill>
+        <p:spPr>
+          <a:xfrm>
+            <a:off x="1106901" y="3812049"/>
+            <a:ext cx="2838846" cy="2152950"/>
+          </a:xfrm>
+          <a:prstGeom prst="rect">
+            <a:avLst/>
+          </a:prstGeom>
+        </p:spPr>
+      </p:pic>
+      <p:pic>
+        <p:nvPicPr>
+          <p:cNvPr id="9" name="Imagem 8" descr="Interface gráfica do usuário, Texto, Aplicativo, Email&#10;&#10;O conteúdo gerado por IA pode estar incorreto.">
+            <a:extLst>
+              <a:ext uri="{FF2B5EF4-FFF2-40B4-BE49-F238E27FC236}">
+                <a16:creationId xmlns:a16="http://schemas.microsoft.com/office/drawing/2014/main" id="{2D401DA5-AE98-01C4-4556-A99BC2255862}"/>
+              </a:ext>
+            </a:extLst>
+          </p:cNvPr>
+          <p:cNvPicPr>
+            <a:picLocks noChangeAspect="1"/>
+          </p:cNvPicPr>
+          <p:nvPr/>
+        </p:nvPicPr>
+        <p:blipFill>
+          <a:blip r:embed="rId5"/>
+          <a:stretch>
+            <a:fillRect/>
+          </a:stretch>
+        </p:blipFill>
+        <p:spPr>
+          <a:xfrm>
+            <a:off x="5084402" y="1564511"/>
+            <a:ext cx="6375347" cy="3728977"/>
+          </a:xfrm>
+          <a:prstGeom prst="rect">
+            <a:avLst/>
+          </a:prstGeom>
+        </p:spPr>
+      </p:pic>
+      <p:sp>
+        <p:nvSpPr>
+          <p:cNvPr id="14" name="Retângulo: Cantos Arredondados 13">
+            <a:extLst>
+              <a:ext uri="{FF2B5EF4-FFF2-40B4-BE49-F238E27FC236}">
+                <a16:creationId xmlns:a16="http://schemas.microsoft.com/office/drawing/2014/main" id="{5D3D6BF2-05FB-B581-144B-1B79375C1B63}"/>
+              </a:ext>
+            </a:extLst>
+          </p:cNvPr>
+          <p:cNvSpPr/>
+          <p:nvPr/>
+        </p:nvSpPr>
+        <p:spPr>
+          <a:xfrm>
+            <a:off x="1301262" y="1204546"/>
+            <a:ext cx="2004646" cy="325316"/>
+          </a:xfrm>
+          <a:prstGeom prst="roundRect">
+            <a:avLst/>
+          </a:prstGeom>
+          <a:solidFill>
+            <a:schemeClr val="accent5">
+              <a:alpha val="50000"/>
+            </a:schemeClr>
+          </a:solidFill>
+          <a:ln>
+            <a:noFill/>
+          </a:ln>
+        </p:spPr>
+        <p:style>
+          <a:lnRef idx="0">
+            <a:scrgbClr r="0" g="0" b="0"/>
+          </a:lnRef>
+          <a:fillRef idx="0">
+            <a:scrgbClr r="0" g="0" b="0"/>
+          </a:fillRef>
+          <a:effectRef idx="0">
+            <a:scrgbClr r="0" g="0" b="0"/>
+          </a:effectRef>
+          <a:fontRef idx="minor">
+            <a:schemeClr val="lt1"/>
+          </a:fontRef>
+        </p:style>
+        <p:txBody>
+          <a:bodyPr rtlCol="0" anchor="ctr"/>
+          <a:lstStyle/>
+          <a:p>
+            <a:pPr algn="ctr"/>
+            <a:endParaRPr lang="pt-BR"/>
+          </a:p>
+        </p:txBody>
+      </p:sp>
+      <p:sp>
+        <p:nvSpPr>
+          <p:cNvPr id="15" name="Retângulo: Cantos Arredondados 14">
+            <a:extLst>
+              <a:ext uri="{FF2B5EF4-FFF2-40B4-BE49-F238E27FC236}">
+                <a16:creationId xmlns:a16="http://schemas.microsoft.com/office/drawing/2014/main" id="{BB338F0C-9321-CC9E-AB82-B33302CA6C1D}"/>
+              </a:ext>
+            </a:extLst>
+          </p:cNvPr>
+          <p:cNvSpPr/>
+          <p:nvPr/>
+        </p:nvSpPr>
+        <p:spPr>
+          <a:xfrm>
+            <a:off x="1186032" y="5521569"/>
+            <a:ext cx="2119876" cy="263769"/>
+          </a:xfrm>
+          <a:prstGeom prst="roundRect">
+            <a:avLst/>
+          </a:prstGeom>
+          <a:solidFill>
+            <a:schemeClr val="accent5">
+              <a:alpha val="50000"/>
+            </a:schemeClr>
+          </a:solidFill>
+          <a:ln>
+            <a:noFill/>
+          </a:ln>
+        </p:spPr>
+        <p:style>
+          <a:lnRef idx="0">
+            <a:scrgbClr r="0" g="0" b="0"/>
+          </a:lnRef>
+          <a:fillRef idx="0">
+            <a:scrgbClr r="0" g="0" b="0"/>
+          </a:fillRef>
+          <a:effectRef idx="0">
+            <a:scrgbClr r="0" g="0" b="0"/>
+          </a:effectRef>
+          <a:fontRef idx="minor">
+            <a:schemeClr val="lt1"/>
+          </a:fontRef>
+        </p:style>
+        <p:txBody>
+          <a:bodyPr rtlCol="0" anchor="ctr"/>
+          <a:lstStyle/>
+          <a:p>
+            <a:pPr algn="ctr"/>
+            <a:endParaRPr lang="pt-BR"/>
+          </a:p>
+        </p:txBody>
+      </p:sp>
+      <p:sp>
+        <p:nvSpPr>
+          <p:cNvPr id="16" name="Retângulo: Cantos Arredondados 15">
+            <a:extLst>
+              <a:ext uri="{FF2B5EF4-FFF2-40B4-BE49-F238E27FC236}">
+                <a16:creationId xmlns:a16="http://schemas.microsoft.com/office/drawing/2014/main" id="{F2E96E51-6609-462F-226F-ABF13AAA66BA}"/>
+              </a:ext>
+            </a:extLst>
+          </p:cNvPr>
+          <p:cNvSpPr/>
+          <p:nvPr/>
+        </p:nvSpPr>
+        <p:spPr>
+          <a:xfrm>
+            <a:off x="7411915" y="1758462"/>
+            <a:ext cx="967154" cy="193430"/>
+          </a:xfrm>
+          <a:prstGeom prst="roundRect">
+            <a:avLst/>
+          </a:prstGeom>
+          <a:solidFill>
+            <a:schemeClr val="accent5">
+              <a:alpha val="50000"/>
+            </a:schemeClr>
+          </a:solidFill>
+          <a:ln>
+            <a:noFill/>
+          </a:ln>
+        </p:spPr>
+        <p:style>
+          <a:lnRef idx="0">
+            <a:scrgbClr r="0" g="0" b="0"/>
+          </a:lnRef>
+          <a:fillRef idx="0">
+            <a:scrgbClr r="0" g="0" b="0"/>
+          </a:fillRef>
+          <a:effectRef idx="0">
+            <a:scrgbClr r="0" g="0" b="0"/>
+          </a:effectRef>
+          <a:fontRef idx="minor">
+            <a:schemeClr val="lt1"/>
+          </a:fontRef>
+        </p:style>
+        <p:txBody>
+          <a:bodyPr rtlCol="0" anchor="ctr"/>
+          <a:lstStyle/>
+          <a:p>
+            <a:pPr algn="ctr"/>
+            <a:endParaRPr lang="pt-BR"/>
+          </a:p>
+        </p:txBody>
+      </p:sp>
+      <p:sp>
+        <p:nvSpPr>
+          <p:cNvPr id="2" name="CaixaDeTexto 1">
+            <a:extLst>
+              <a:ext uri="{FF2B5EF4-FFF2-40B4-BE49-F238E27FC236}">
+                <a16:creationId xmlns:a16="http://schemas.microsoft.com/office/drawing/2014/main" id="{620273D6-B8B2-C003-160A-EF87F75D45C0}"/>
+              </a:ext>
+            </a:extLst>
+          </p:cNvPr>
+          <p:cNvSpPr txBox="1"/>
+          <p:nvPr/>
+        </p:nvSpPr>
+        <p:spPr>
+          <a:xfrm>
+            <a:off x="6009280" y="489868"/>
+            <a:ext cx="4525590" cy="584775"/>
+          </a:xfrm>
+          <a:prstGeom prst="rect">
+            <a:avLst/>
+          </a:prstGeom>
+          <a:noFill/>
+        </p:spPr>
+        <p:txBody>
+          <a:bodyPr wrap="square" rtlCol="0">
+            <a:spAutoFit/>
+          </a:bodyPr>
+          <a:lstStyle/>
+          <a:p>
+            <a:r>
+              <a:rPr lang="pt-BR" sz="3200" dirty="0"/>
+              <a:t>Visualização dos Usuários</a:t>
+            </a:r>
+          </a:p>
+        </p:txBody>
+      </p:sp>
+    </p:spTree>
+    <p:extLst>
+      <p:ext uri="{BB962C8B-B14F-4D97-AF65-F5344CB8AC3E}">
+        <p14:creationId xmlns:p14="http://schemas.microsoft.com/office/powerpoint/2010/main" val="2266546223"/>
       </p:ext>
     </p:extLst>
   </p:cSld>
@@ -4456,6 +8134,886 @@
     <p:extLst>
       <p:ext uri="{BB962C8B-B14F-4D97-AF65-F5344CB8AC3E}">
         <p14:creationId xmlns:p14="http://schemas.microsoft.com/office/powerpoint/2010/main" val="2776363215"/>
+      </p:ext>
+    </p:extLst>
+  </p:cSld>
+  <p:clrMapOvr>
+    <a:masterClrMapping/>
+  </p:clrMapOvr>
+</p:sld>
+</file>
+
+<file path=ppt/slides/slide20.xml><?xml version="1.0" encoding="utf-8"?>
+<p:sld xmlns:a="http://schemas.openxmlformats.org/drawingml/2006/main" xmlns:r="http://schemas.openxmlformats.org/officeDocument/2006/relationships" xmlns:p="http://schemas.openxmlformats.org/presentationml/2006/main">
+  <p:cSld>
+    <p:spTree>
+      <p:nvGrpSpPr>
+        <p:cNvPr id="1" name="">
+          <a:extLst>
+            <a:ext uri="{FF2B5EF4-FFF2-40B4-BE49-F238E27FC236}">
+              <a16:creationId xmlns:a16="http://schemas.microsoft.com/office/drawing/2014/main" id="{7E5A10E2-91E7-2CA5-10D1-A503A44002E2}"/>
+            </a:ext>
+          </a:extLst>
+        </p:cNvPr>
+        <p:cNvGrpSpPr/>
+        <p:nvPr/>
+      </p:nvGrpSpPr>
+      <p:grpSpPr>
+        <a:xfrm>
+          <a:off x="0" y="0"/>
+          <a:ext cx="0" cy="0"/>
+          <a:chOff x="0" y="0"/>
+          <a:chExt cx="0" cy="0"/>
+        </a:xfrm>
+      </p:grpSpPr>
+      <p:pic>
+        <p:nvPicPr>
+          <p:cNvPr id="5" name="Imagem 4">
+            <a:extLst>
+              <a:ext uri="{FF2B5EF4-FFF2-40B4-BE49-F238E27FC236}">
+                <a16:creationId xmlns:a16="http://schemas.microsoft.com/office/drawing/2014/main" id="{7F8F9171-963C-9D10-213C-2AF85B59BCBB}"/>
+              </a:ext>
+            </a:extLst>
+          </p:cNvPr>
+          <p:cNvPicPr>
+            <a:picLocks noChangeAspect="1"/>
+          </p:cNvPicPr>
+          <p:nvPr/>
+        </p:nvPicPr>
+        <p:blipFill>
+          <a:blip r:embed="rId2">
+            <a:extLst>
+              <a:ext uri="{28A0092B-C50C-407E-A947-70E740481C1C}">
+                <a14:useLocalDpi xmlns:a14="http://schemas.microsoft.com/office/drawing/2010/main" val="0"/>
+              </a:ext>
+            </a:extLst>
+          </a:blip>
+          <a:stretch>
+            <a:fillRect/>
+          </a:stretch>
+        </p:blipFill>
+        <p:spPr>
+          <a:xfrm>
+            <a:off x="0" y="0"/>
+            <a:ext cx="12192000" cy="6858000"/>
+          </a:xfrm>
+          <a:prstGeom prst="rect">
+            <a:avLst/>
+          </a:prstGeom>
+        </p:spPr>
+      </p:pic>
+      <p:pic>
+        <p:nvPicPr>
+          <p:cNvPr id="3" name="Imagem 2" descr="Interface gráfica do usuário, Texto, Aplicativo, Email&#10;&#10;O conteúdo gerado por IA pode estar incorreto.">
+            <a:extLst>
+              <a:ext uri="{FF2B5EF4-FFF2-40B4-BE49-F238E27FC236}">
+                <a16:creationId xmlns:a16="http://schemas.microsoft.com/office/drawing/2014/main" id="{6928AEB7-DE03-15B3-9857-8AD37D13D9CD}"/>
+              </a:ext>
+            </a:extLst>
+          </p:cNvPr>
+          <p:cNvPicPr>
+            <a:picLocks noChangeAspect="1"/>
+          </p:cNvPicPr>
+          <p:nvPr/>
+        </p:nvPicPr>
+        <p:blipFill>
+          <a:blip r:embed="rId3"/>
+          <a:stretch>
+            <a:fillRect/>
+          </a:stretch>
+        </p:blipFill>
+        <p:spPr>
+          <a:xfrm>
+            <a:off x="1104203" y="647312"/>
+            <a:ext cx="9983593" cy="5563376"/>
+          </a:xfrm>
+          <a:prstGeom prst="rect">
+            <a:avLst/>
+          </a:prstGeom>
+        </p:spPr>
+      </p:pic>
+    </p:spTree>
+    <p:extLst>
+      <p:ext uri="{BB962C8B-B14F-4D97-AF65-F5344CB8AC3E}">
+        <p14:creationId xmlns:p14="http://schemas.microsoft.com/office/powerpoint/2010/main" val="49284742"/>
+      </p:ext>
+    </p:extLst>
+  </p:cSld>
+  <p:clrMapOvr>
+    <a:masterClrMapping/>
+  </p:clrMapOvr>
+</p:sld>
+</file>
+
+<file path=ppt/slides/slide21.xml><?xml version="1.0" encoding="utf-8"?>
+<p:sld xmlns:a="http://schemas.openxmlformats.org/drawingml/2006/main" xmlns:r="http://schemas.openxmlformats.org/officeDocument/2006/relationships" xmlns:p="http://schemas.openxmlformats.org/presentationml/2006/main">
+  <p:cSld>
+    <p:spTree>
+      <p:nvGrpSpPr>
+        <p:cNvPr id="1" name="">
+          <a:extLst>
+            <a:ext uri="{FF2B5EF4-FFF2-40B4-BE49-F238E27FC236}">
+              <a16:creationId xmlns:a16="http://schemas.microsoft.com/office/drawing/2014/main" id="{51E5E472-551B-D9DD-2520-A32CBA4305B1}"/>
+            </a:ext>
+          </a:extLst>
+        </p:cNvPr>
+        <p:cNvGrpSpPr/>
+        <p:nvPr/>
+      </p:nvGrpSpPr>
+      <p:grpSpPr>
+        <a:xfrm>
+          <a:off x="0" y="0"/>
+          <a:ext cx="0" cy="0"/>
+          <a:chOff x="0" y="0"/>
+          <a:chExt cx="0" cy="0"/>
+        </a:xfrm>
+      </p:grpSpPr>
+      <p:pic>
+        <p:nvPicPr>
+          <p:cNvPr id="5" name="Imagem 4">
+            <a:extLst>
+              <a:ext uri="{FF2B5EF4-FFF2-40B4-BE49-F238E27FC236}">
+                <a16:creationId xmlns:a16="http://schemas.microsoft.com/office/drawing/2014/main" id="{2197F6E7-07D1-05B5-89CE-F019D2FB9F26}"/>
+              </a:ext>
+            </a:extLst>
+          </p:cNvPr>
+          <p:cNvPicPr>
+            <a:picLocks noChangeAspect="1"/>
+          </p:cNvPicPr>
+          <p:nvPr/>
+        </p:nvPicPr>
+        <p:blipFill>
+          <a:blip r:embed="rId2">
+            <a:extLst>
+              <a:ext uri="{28A0092B-C50C-407E-A947-70E740481C1C}">
+                <a14:useLocalDpi xmlns:a14="http://schemas.microsoft.com/office/drawing/2010/main" val="0"/>
+              </a:ext>
+            </a:extLst>
+          </a:blip>
+          <a:stretch>
+            <a:fillRect/>
+          </a:stretch>
+        </p:blipFill>
+        <p:spPr>
+          <a:xfrm>
+            <a:off x="0" y="0"/>
+            <a:ext cx="12192000" cy="6858000"/>
+          </a:xfrm>
+          <a:prstGeom prst="rect">
+            <a:avLst/>
+          </a:prstGeom>
+        </p:spPr>
+      </p:pic>
+      <p:sp>
+        <p:nvSpPr>
+          <p:cNvPr id="2" name="CaixaDeTexto 1">
+            <a:extLst>
+              <a:ext uri="{FF2B5EF4-FFF2-40B4-BE49-F238E27FC236}">
+                <a16:creationId xmlns:a16="http://schemas.microsoft.com/office/drawing/2014/main" id="{40B8863B-03C1-B480-A27A-28CEB6D93B9A}"/>
+              </a:ext>
+            </a:extLst>
+          </p:cNvPr>
+          <p:cNvSpPr txBox="1"/>
+          <p:nvPr/>
+        </p:nvSpPr>
+        <p:spPr>
+          <a:xfrm>
+            <a:off x="5186740" y="197595"/>
+            <a:ext cx="1818520" cy="646331"/>
+          </a:xfrm>
+          <a:prstGeom prst="rect">
+            <a:avLst/>
+          </a:prstGeom>
+          <a:noFill/>
+        </p:spPr>
+        <p:txBody>
+          <a:bodyPr wrap="square" rtlCol="0">
+            <a:spAutoFit/>
+          </a:bodyPr>
+          <a:lstStyle/>
+          <a:p>
+            <a:r>
+              <a:rPr lang="en-US" sz="3600" dirty="0" err="1"/>
+              <a:t>Exercício</a:t>
+            </a:r>
+            <a:endParaRPr lang="pt-BR" sz="3600" dirty="0"/>
+          </a:p>
+        </p:txBody>
+      </p:sp>
+      <p:sp>
+        <p:nvSpPr>
+          <p:cNvPr id="3" name="CaixaDeTexto 2">
+            <a:extLst>
+              <a:ext uri="{FF2B5EF4-FFF2-40B4-BE49-F238E27FC236}">
+                <a16:creationId xmlns:a16="http://schemas.microsoft.com/office/drawing/2014/main" id="{ED7452A5-67B3-1276-9540-7946C46CF78B}"/>
+              </a:ext>
+            </a:extLst>
+          </p:cNvPr>
+          <p:cNvSpPr txBox="1"/>
+          <p:nvPr/>
+        </p:nvSpPr>
+        <p:spPr>
+          <a:xfrm>
+            <a:off x="712177" y="1318846"/>
+            <a:ext cx="6884377" cy="3693319"/>
+          </a:xfrm>
+          <a:prstGeom prst="rect">
+            <a:avLst/>
+          </a:prstGeom>
+          <a:noFill/>
+        </p:spPr>
+        <p:txBody>
+          <a:bodyPr wrap="square" rtlCol="0">
+            <a:spAutoFit/>
+          </a:bodyPr>
+          <a:lstStyle/>
+          <a:p>
+            <a:pPr algn="ctr"/>
+            <a:r>
+              <a:rPr lang="en-US" dirty="0"/>
+              <a:t>Voc</a:t>
+            </a:r>
+            <a:r>
+              <a:rPr lang="pt-BR" dirty="0"/>
+              <a:t>ê foi contratado para garantir a segurança do banco de dados de uma loja virtual. Considere a Tabela a Seguir:</a:t>
+            </a:r>
+          </a:p>
+          <a:p>
+            <a:pPr algn="ctr"/>
+            <a:endParaRPr lang="pt-BR" dirty="0"/>
+          </a:p>
+          <a:p>
+            <a:pPr algn="ctr"/>
+            <a:r>
+              <a:rPr lang="pt-BR" dirty="0"/>
+              <a:t>Parte 1</a:t>
+            </a:r>
+          </a:p>
+          <a:p>
+            <a:endParaRPr lang="pt-BR" dirty="0"/>
+          </a:p>
+          <a:p>
+            <a:r>
+              <a:rPr lang="pt-BR" dirty="0"/>
+              <a:t>a) Crie um usuário chamado </a:t>
+            </a:r>
+            <a:r>
+              <a:rPr lang="pt-BR" dirty="0" err="1"/>
+              <a:t>dev_junior</a:t>
+            </a:r>
+            <a:r>
+              <a:rPr lang="pt-BR" dirty="0"/>
+              <a:t> que possa acessar o banco de qualquer lugar;</a:t>
+            </a:r>
+          </a:p>
+          <a:p>
+            <a:r>
+              <a:rPr lang="pt-BR" dirty="0"/>
+              <a:t>b) Dê a ele a permissão de apenas leitura (</a:t>
+            </a:r>
+            <a:r>
+              <a:rPr lang="pt-BR" dirty="0" err="1"/>
+              <a:t>Select</a:t>
+            </a:r>
+            <a:r>
+              <a:rPr lang="pt-BR" dirty="0"/>
+              <a:t>) em todas as tabelas do banco ‘ecommerce’;</a:t>
+            </a:r>
+          </a:p>
+          <a:p>
+            <a:r>
+              <a:rPr lang="pt-BR" dirty="0"/>
+              <a:t>c) O </a:t>
+            </a:r>
+            <a:r>
+              <a:rPr lang="pt-BR" dirty="0" err="1"/>
+              <a:t>dev_junior</a:t>
+            </a:r>
+            <a:r>
+              <a:rPr lang="pt-BR" dirty="0"/>
+              <a:t> acabou sendo promovido. Dessa forma, ele agora pode inserir os dados na tabela produtos, mas não pode deletar nenhum registro;</a:t>
+            </a:r>
+          </a:p>
+          <a:p>
+            <a:r>
+              <a:rPr lang="pt-BR" dirty="0"/>
+              <a:t>d) Remova todas as permissões de </a:t>
+            </a:r>
+            <a:r>
+              <a:rPr lang="pt-BR" dirty="0" err="1"/>
+              <a:t>Insert</a:t>
+            </a:r>
+            <a:r>
+              <a:rPr lang="pt-BR" dirty="0"/>
+              <a:t> desse usuário;</a:t>
+            </a:r>
+            <a:endParaRPr lang="en-US" dirty="0"/>
+          </a:p>
+        </p:txBody>
+      </p:sp>
+      <p:pic>
+        <p:nvPicPr>
+          <p:cNvPr id="8" name="Picture 2" descr="Ilustração de desenhos animados de venda de compras on-line | Vetor Premium">
+            <a:extLst>
+              <a:ext uri="{FF2B5EF4-FFF2-40B4-BE49-F238E27FC236}">
+                <a16:creationId xmlns:a16="http://schemas.microsoft.com/office/drawing/2014/main" id="{7E40F4D0-6CCB-EE1A-02D8-330302073475}"/>
+              </a:ext>
+            </a:extLst>
+          </p:cNvPr>
+          <p:cNvPicPr>
+            <a:picLocks noChangeAspect="1" noChangeArrowheads="1"/>
+          </p:cNvPicPr>
+          <p:nvPr/>
+        </p:nvPicPr>
+        <p:blipFill>
+          <a:blip r:embed="rId3">
+            <a:extLst>
+              <a:ext uri="{28A0092B-C50C-407E-A947-70E740481C1C}">
+                <a14:useLocalDpi xmlns:a14="http://schemas.microsoft.com/office/drawing/2010/main" val="0"/>
+              </a:ext>
+            </a:extLst>
+          </a:blip>
+          <a:srcRect/>
+          <a:stretch>
+            <a:fillRect/>
+          </a:stretch>
+        </p:blipFill>
+        <p:spPr bwMode="auto">
+          <a:xfrm>
+            <a:off x="8117498" y="1889614"/>
+            <a:ext cx="3215787" cy="3215787"/>
+          </a:xfrm>
+          <a:prstGeom prst="rect">
+            <a:avLst/>
+          </a:prstGeom>
+          <a:noFill/>
+          <a:extLst>
+            <a:ext uri="{909E8E84-426E-40DD-AFC4-6F175D3DCCD1}">
+              <a14:hiddenFill xmlns:a14="http://schemas.microsoft.com/office/drawing/2010/main">
+                <a:solidFill>
+                  <a:srgbClr val="FFFFFF"/>
+                </a:solidFill>
+              </a14:hiddenFill>
+            </a:ext>
+          </a:extLst>
+        </p:spPr>
+      </p:pic>
+      <p:pic>
+        <p:nvPicPr>
+          <p:cNvPr id="10" name="Imagem 9">
+            <a:extLst>
+              <a:ext uri="{FF2B5EF4-FFF2-40B4-BE49-F238E27FC236}">
+                <a16:creationId xmlns:a16="http://schemas.microsoft.com/office/drawing/2014/main" id="{AAD18C0C-AF24-D0A9-A1C0-84E6648A214B}"/>
+              </a:ext>
+            </a:extLst>
+          </p:cNvPr>
+          <p:cNvPicPr>
+            <a:picLocks noChangeAspect="1"/>
+          </p:cNvPicPr>
+          <p:nvPr/>
+        </p:nvPicPr>
+        <p:blipFill>
+          <a:blip r:embed="rId4"/>
+          <a:stretch>
+            <a:fillRect/>
+          </a:stretch>
+        </p:blipFill>
+        <p:spPr>
+          <a:xfrm>
+            <a:off x="1710576" y="5100294"/>
+            <a:ext cx="4887578" cy="1669577"/>
+          </a:xfrm>
+          <a:prstGeom prst="rect">
+            <a:avLst/>
+          </a:prstGeom>
+        </p:spPr>
+      </p:pic>
+    </p:spTree>
+    <p:extLst>
+      <p:ext uri="{BB962C8B-B14F-4D97-AF65-F5344CB8AC3E}">
+        <p14:creationId xmlns:p14="http://schemas.microsoft.com/office/powerpoint/2010/main" val="3930558747"/>
+      </p:ext>
+    </p:extLst>
+  </p:cSld>
+  <p:clrMapOvr>
+    <a:masterClrMapping/>
+  </p:clrMapOvr>
+</p:sld>
+</file>
+
+<file path=ppt/slides/slide22.xml><?xml version="1.0" encoding="utf-8"?>
+<p:sld xmlns:a="http://schemas.openxmlformats.org/drawingml/2006/main" xmlns:r="http://schemas.openxmlformats.org/officeDocument/2006/relationships" xmlns:p="http://schemas.openxmlformats.org/presentationml/2006/main">
+  <p:cSld>
+    <p:spTree>
+      <p:nvGrpSpPr>
+        <p:cNvPr id="1" name="">
+          <a:extLst>
+            <a:ext uri="{FF2B5EF4-FFF2-40B4-BE49-F238E27FC236}">
+              <a16:creationId xmlns:a16="http://schemas.microsoft.com/office/drawing/2014/main" id="{3C5A1AD0-752D-264F-EE88-613973DB9CF7}"/>
+            </a:ext>
+          </a:extLst>
+        </p:cNvPr>
+        <p:cNvGrpSpPr/>
+        <p:nvPr/>
+      </p:nvGrpSpPr>
+      <p:grpSpPr>
+        <a:xfrm>
+          <a:off x="0" y="0"/>
+          <a:ext cx="0" cy="0"/>
+          <a:chOff x="0" y="0"/>
+          <a:chExt cx="0" cy="0"/>
+        </a:xfrm>
+      </p:grpSpPr>
+      <p:pic>
+        <p:nvPicPr>
+          <p:cNvPr id="5" name="Imagem 4">
+            <a:extLst>
+              <a:ext uri="{FF2B5EF4-FFF2-40B4-BE49-F238E27FC236}">
+                <a16:creationId xmlns:a16="http://schemas.microsoft.com/office/drawing/2014/main" id="{58373FC8-0B19-38D9-E05C-4B8941B41AA9}"/>
+              </a:ext>
+            </a:extLst>
+          </p:cNvPr>
+          <p:cNvPicPr>
+            <a:picLocks noChangeAspect="1"/>
+          </p:cNvPicPr>
+          <p:nvPr/>
+        </p:nvPicPr>
+        <p:blipFill>
+          <a:blip r:embed="rId2">
+            <a:extLst>
+              <a:ext uri="{28A0092B-C50C-407E-A947-70E740481C1C}">
+                <a14:useLocalDpi xmlns:a14="http://schemas.microsoft.com/office/drawing/2010/main" val="0"/>
+              </a:ext>
+            </a:extLst>
+          </a:blip>
+          <a:stretch>
+            <a:fillRect/>
+          </a:stretch>
+        </p:blipFill>
+        <p:spPr>
+          <a:xfrm>
+            <a:off x="0" y="0"/>
+            <a:ext cx="12192000" cy="6858000"/>
+          </a:xfrm>
+          <a:prstGeom prst="rect">
+            <a:avLst/>
+          </a:prstGeom>
+        </p:spPr>
+      </p:pic>
+      <p:sp>
+        <p:nvSpPr>
+          <p:cNvPr id="2" name="CaixaDeTexto 1">
+            <a:extLst>
+              <a:ext uri="{FF2B5EF4-FFF2-40B4-BE49-F238E27FC236}">
+                <a16:creationId xmlns:a16="http://schemas.microsoft.com/office/drawing/2014/main" id="{FD7DC62D-9B7B-E220-2205-7D7840E6B6D4}"/>
+              </a:ext>
+            </a:extLst>
+          </p:cNvPr>
+          <p:cNvSpPr txBox="1"/>
+          <p:nvPr/>
+        </p:nvSpPr>
+        <p:spPr>
+          <a:xfrm>
+            <a:off x="5186740" y="197595"/>
+            <a:ext cx="1818520" cy="646331"/>
+          </a:xfrm>
+          <a:prstGeom prst="rect">
+            <a:avLst/>
+          </a:prstGeom>
+          <a:noFill/>
+        </p:spPr>
+        <p:txBody>
+          <a:bodyPr wrap="square" rtlCol="0">
+            <a:spAutoFit/>
+          </a:bodyPr>
+          <a:lstStyle/>
+          <a:p>
+            <a:r>
+              <a:rPr lang="en-US" sz="3600" dirty="0" err="1"/>
+              <a:t>Exercício</a:t>
+            </a:r>
+            <a:endParaRPr lang="pt-BR" sz="3600" dirty="0"/>
+          </a:p>
+        </p:txBody>
+      </p:sp>
+      <p:pic>
+        <p:nvPicPr>
+          <p:cNvPr id="5122" name="Picture 2" descr="Ilustração de desenhos animados de venda de compras on-line | Vetor Premium">
+            <a:extLst>
+              <a:ext uri="{FF2B5EF4-FFF2-40B4-BE49-F238E27FC236}">
+                <a16:creationId xmlns:a16="http://schemas.microsoft.com/office/drawing/2014/main" id="{43DD45D0-2C3B-008F-B728-33CB15B4DCE0}"/>
+              </a:ext>
+            </a:extLst>
+          </p:cNvPr>
+          <p:cNvPicPr>
+            <a:picLocks noChangeAspect="1" noChangeArrowheads="1"/>
+          </p:cNvPicPr>
+          <p:nvPr/>
+        </p:nvPicPr>
+        <p:blipFill>
+          <a:blip r:embed="rId3">
+            <a:extLst>
+              <a:ext uri="{28A0092B-C50C-407E-A947-70E740481C1C}">
+                <a14:useLocalDpi xmlns:a14="http://schemas.microsoft.com/office/drawing/2010/main" val="0"/>
+              </a:ext>
+            </a:extLst>
+          </a:blip>
+          <a:srcRect/>
+          <a:stretch>
+            <a:fillRect/>
+          </a:stretch>
+        </p:blipFill>
+        <p:spPr bwMode="auto">
+          <a:xfrm>
+            <a:off x="8117498" y="1889614"/>
+            <a:ext cx="3215787" cy="3215787"/>
+          </a:xfrm>
+          <a:prstGeom prst="rect">
+            <a:avLst/>
+          </a:prstGeom>
+          <a:noFill/>
+          <a:extLst>
+            <a:ext uri="{909E8E84-426E-40DD-AFC4-6F175D3DCCD1}">
+              <a14:hiddenFill xmlns:a14="http://schemas.microsoft.com/office/drawing/2010/main">
+                <a:solidFill>
+                  <a:srgbClr val="FFFFFF"/>
+                </a:solidFill>
+              </a14:hiddenFill>
+            </a:ext>
+          </a:extLst>
+        </p:spPr>
+      </p:pic>
+      <p:sp>
+        <p:nvSpPr>
+          <p:cNvPr id="3" name="CaixaDeTexto 2">
+            <a:extLst>
+              <a:ext uri="{FF2B5EF4-FFF2-40B4-BE49-F238E27FC236}">
+                <a16:creationId xmlns:a16="http://schemas.microsoft.com/office/drawing/2014/main" id="{348F046C-54FA-578F-065B-65CDE4210C2E}"/>
+              </a:ext>
+            </a:extLst>
+          </p:cNvPr>
+          <p:cNvSpPr txBox="1"/>
+          <p:nvPr/>
+        </p:nvSpPr>
+        <p:spPr>
+          <a:xfrm>
+            <a:off x="712177" y="1318846"/>
+            <a:ext cx="6884377" cy="3970318"/>
+          </a:xfrm>
+          <a:prstGeom prst="rect">
+            <a:avLst/>
+          </a:prstGeom>
+          <a:noFill/>
+        </p:spPr>
+        <p:txBody>
+          <a:bodyPr wrap="square" rtlCol="0">
+            <a:spAutoFit/>
+          </a:bodyPr>
+          <a:lstStyle/>
+          <a:p>
+            <a:pPr algn="ctr"/>
+            <a:r>
+              <a:rPr lang="en-US" dirty="0" err="1"/>
+              <a:t>Houve</a:t>
+            </a:r>
+            <a:r>
+              <a:rPr lang="en-US" dirty="0"/>
+              <a:t> um </a:t>
+            </a:r>
+            <a:r>
+              <a:rPr lang="en-US" dirty="0" err="1"/>
+              <a:t>crescimento</a:t>
+            </a:r>
+            <a:r>
+              <a:rPr lang="en-US" dirty="0"/>
+              <a:t> </a:t>
+            </a:r>
+            <a:r>
+              <a:rPr lang="en-US" dirty="0" err="1"/>
+              <a:t>exponencial</a:t>
+            </a:r>
+            <a:r>
+              <a:rPr lang="en-US" dirty="0"/>
+              <a:t> da </a:t>
+            </a:r>
+            <a:r>
+              <a:rPr lang="en-US" dirty="0" err="1"/>
+              <a:t>empresa</a:t>
+            </a:r>
+            <a:r>
+              <a:rPr lang="en-US" dirty="0"/>
+              <a:t> e o </a:t>
+            </a:r>
+            <a:r>
+              <a:rPr lang="en-US" dirty="0" err="1"/>
+              <a:t>gerenciamento</a:t>
+            </a:r>
+            <a:r>
+              <a:rPr lang="en-US" dirty="0"/>
+              <a:t> individual se </a:t>
+            </a:r>
+            <a:r>
+              <a:rPr lang="en-US" dirty="0" err="1"/>
+              <a:t>tornou</a:t>
+            </a:r>
+            <a:r>
+              <a:rPr lang="en-US" dirty="0"/>
+              <a:t> </a:t>
+            </a:r>
+            <a:r>
+              <a:rPr lang="en-US" dirty="0" err="1"/>
+              <a:t>impossível</a:t>
+            </a:r>
+            <a:endParaRPr lang="pt-BR" dirty="0"/>
+          </a:p>
+          <a:p>
+            <a:endParaRPr lang="pt-BR" dirty="0"/>
+          </a:p>
+          <a:p>
+            <a:pPr algn="ctr"/>
+            <a:r>
+              <a:rPr lang="pt-BR" dirty="0"/>
+              <a:t>Parte 2</a:t>
+            </a:r>
+          </a:p>
+          <a:p>
+            <a:endParaRPr lang="pt-BR" dirty="0"/>
+          </a:p>
+          <a:p>
+            <a:r>
+              <a:rPr lang="pt-BR" dirty="0"/>
+              <a:t>a) Crie um papel (Role) chamado </a:t>
+            </a:r>
+            <a:r>
+              <a:rPr lang="pt-BR" dirty="0" err="1"/>
+              <a:t>role_vendas</a:t>
+            </a:r>
+            <a:r>
+              <a:rPr lang="pt-BR" dirty="0"/>
+              <a:t>;</a:t>
+            </a:r>
+          </a:p>
+          <a:p>
+            <a:endParaRPr lang="pt-BR" dirty="0"/>
+          </a:p>
+          <a:p>
+            <a:r>
+              <a:rPr lang="pt-BR" dirty="0"/>
+              <a:t>b) Atribua a essa Role a permissão de ver apenas as colunas ‘nome’ e ‘</a:t>
+            </a:r>
+            <a:r>
+              <a:rPr lang="pt-BR" dirty="0" err="1"/>
+              <a:t>preco</a:t>
+            </a:r>
+            <a:r>
+              <a:rPr lang="pt-BR" dirty="0"/>
+              <a:t>’ da tabela produtos;</a:t>
+            </a:r>
+          </a:p>
+          <a:p>
+            <a:endParaRPr lang="pt-BR" dirty="0"/>
+          </a:p>
+          <a:p>
+            <a:r>
+              <a:rPr lang="pt-BR" dirty="0"/>
+              <a:t>c) Crie o usuário vendedor_1 e atribua a ele a Role criada;</a:t>
+            </a:r>
+          </a:p>
+          <a:p>
+            <a:endParaRPr lang="pt-BR" dirty="0"/>
+          </a:p>
+          <a:p>
+            <a:r>
+              <a:rPr lang="pt-BR" dirty="0"/>
+              <a:t>d) Supondo que este usuário tente consultar os produtos. O que acontece se ele tentar dar um ‘</a:t>
+            </a:r>
+            <a:r>
+              <a:rPr lang="pt-BR" dirty="0" err="1"/>
+              <a:t>Select</a:t>
+            </a:r>
+            <a:r>
+              <a:rPr lang="pt-BR" dirty="0"/>
+              <a:t> *’ ?</a:t>
+            </a:r>
+            <a:endParaRPr lang="en-US" dirty="0"/>
+          </a:p>
+        </p:txBody>
+      </p:sp>
+    </p:spTree>
+    <p:extLst>
+      <p:ext uri="{BB962C8B-B14F-4D97-AF65-F5344CB8AC3E}">
+        <p14:creationId xmlns:p14="http://schemas.microsoft.com/office/powerpoint/2010/main" val="3298854469"/>
+      </p:ext>
+    </p:extLst>
+  </p:cSld>
+  <p:clrMapOvr>
+    <a:masterClrMapping/>
+  </p:clrMapOvr>
+</p:sld>
+</file>
+
+<file path=ppt/slides/slide23.xml><?xml version="1.0" encoding="utf-8"?>
+<p:sld xmlns:a="http://schemas.openxmlformats.org/drawingml/2006/main" xmlns:r="http://schemas.openxmlformats.org/officeDocument/2006/relationships" xmlns:p="http://schemas.openxmlformats.org/presentationml/2006/main">
+  <p:cSld>
+    <p:spTree>
+      <p:nvGrpSpPr>
+        <p:cNvPr id="1" name="">
+          <a:extLst>
+            <a:ext uri="{FF2B5EF4-FFF2-40B4-BE49-F238E27FC236}">
+              <a16:creationId xmlns:a16="http://schemas.microsoft.com/office/drawing/2014/main" id="{A9F73D6E-FC32-50DA-1CBC-9FDC465B155C}"/>
+            </a:ext>
+          </a:extLst>
+        </p:cNvPr>
+        <p:cNvGrpSpPr/>
+        <p:nvPr/>
+      </p:nvGrpSpPr>
+      <p:grpSpPr>
+        <a:xfrm>
+          <a:off x="0" y="0"/>
+          <a:ext cx="0" cy="0"/>
+          <a:chOff x="0" y="0"/>
+          <a:chExt cx="0" cy="0"/>
+        </a:xfrm>
+      </p:grpSpPr>
+      <p:sp>
+        <p:nvSpPr>
+          <p:cNvPr id="2" name="Título 1">
+            <a:extLst>
+              <a:ext uri="{FF2B5EF4-FFF2-40B4-BE49-F238E27FC236}">
+                <a16:creationId xmlns:a16="http://schemas.microsoft.com/office/drawing/2014/main" id="{7D33F163-C736-9349-5711-22D353FEFD1A}"/>
+              </a:ext>
+            </a:extLst>
+          </p:cNvPr>
+          <p:cNvSpPr>
+            <a:spLocks noGrp="1"/>
+          </p:cNvSpPr>
+          <p:nvPr>
+            <p:ph type="title"/>
+          </p:nvPr>
+        </p:nvSpPr>
+        <p:spPr/>
+        <p:txBody>
+          <a:bodyPr/>
+          <a:lstStyle/>
+          <a:p>
+            <a:endParaRPr lang="pt-BR"/>
+          </a:p>
+        </p:txBody>
+      </p:sp>
+      <p:sp>
+        <p:nvSpPr>
+          <p:cNvPr id="3" name="Espaço Reservado para Conteúdo 2">
+            <a:extLst>
+              <a:ext uri="{FF2B5EF4-FFF2-40B4-BE49-F238E27FC236}">
+                <a16:creationId xmlns:a16="http://schemas.microsoft.com/office/drawing/2014/main" id="{13625611-E7FA-1D72-494A-0AFBC3CF9FB2}"/>
+              </a:ext>
+            </a:extLst>
+          </p:cNvPr>
+          <p:cNvSpPr>
+            <a:spLocks noGrp="1"/>
+          </p:cNvSpPr>
+          <p:nvPr>
+            <p:ph idx="1"/>
+          </p:nvPr>
+        </p:nvSpPr>
+        <p:spPr/>
+        <p:txBody>
+          <a:bodyPr/>
+          <a:lstStyle/>
+          <a:p>
+            <a:endParaRPr lang="pt-BR"/>
+          </a:p>
+        </p:txBody>
+      </p:sp>
+      <p:pic>
+        <p:nvPicPr>
+          <p:cNvPr id="4" name="Imagem 3">
+            <a:extLst>
+              <a:ext uri="{FF2B5EF4-FFF2-40B4-BE49-F238E27FC236}">
+                <a16:creationId xmlns:a16="http://schemas.microsoft.com/office/drawing/2014/main" id="{743371B3-3339-12F0-DD89-453EBF0A0ED8}"/>
+              </a:ext>
+            </a:extLst>
+          </p:cNvPr>
+          <p:cNvPicPr>
+            <a:picLocks noChangeAspect="1"/>
+          </p:cNvPicPr>
+          <p:nvPr/>
+        </p:nvPicPr>
+        <p:blipFill>
+          <a:blip r:embed="rId2">
+            <a:extLst>
+              <a:ext uri="{28A0092B-C50C-407E-A947-70E740481C1C}">
+                <a14:useLocalDpi xmlns:a14="http://schemas.microsoft.com/office/drawing/2010/main" val="0"/>
+              </a:ext>
+            </a:extLst>
+          </a:blip>
+          <a:stretch>
+            <a:fillRect/>
+          </a:stretch>
+        </p:blipFill>
+        <p:spPr>
+          <a:xfrm>
+            <a:off x="0" y="0"/>
+            <a:ext cx="12192000" cy="6858000"/>
+          </a:xfrm>
+          <a:prstGeom prst="rect">
+            <a:avLst/>
+          </a:prstGeom>
+        </p:spPr>
+      </p:pic>
+      <p:sp>
+        <p:nvSpPr>
+          <p:cNvPr id="5" name="CaixaDeTexto 4">
+            <a:extLst>
+              <a:ext uri="{FF2B5EF4-FFF2-40B4-BE49-F238E27FC236}">
+                <a16:creationId xmlns:a16="http://schemas.microsoft.com/office/drawing/2014/main" id="{C30338DA-9061-D8D4-B5A5-66A14A047FD4}"/>
+              </a:ext>
+            </a:extLst>
+          </p:cNvPr>
+          <p:cNvSpPr txBox="1"/>
+          <p:nvPr/>
+        </p:nvSpPr>
+        <p:spPr>
+          <a:xfrm>
+            <a:off x="3924300" y="2413337"/>
+            <a:ext cx="4343400" cy="1938992"/>
+          </a:xfrm>
+          <a:prstGeom prst="rect">
+            <a:avLst/>
+          </a:prstGeom>
+          <a:noFill/>
+        </p:spPr>
+        <p:txBody>
+          <a:bodyPr wrap="square" rtlCol="0">
+            <a:spAutoFit/>
+          </a:bodyPr>
+          <a:lstStyle/>
+          <a:p>
+            <a:pPr algn="ctr"/>
+            <a:r>
+              <a:rPr lang="en-US" sz="6000" dirty="0">
+                <a:solidFill>
+                  <a:schemeClr val="accent5">
+                    <a:lumMod val="75000"/>
+                  </a:schemeClr>
+                </a:solidFill>
+              </a:rPr>
+              <a:t>AULA CONCLUÍDA!</a:t>
+            </a:r>
+            <a:endParaRPr lang="pt-BR" sz="6000" dirty="0">
+              <a:solidFill>
+                <a:schemeClr val="accent5">
+                  <a:lumMod val="75000"/>
+                </a:schemeClr>
+              </a:solidFill>
+            </a:endParaRPr>
+          </a:p>
+        </p:txBody>
+      </p:sp>
+    </p:spTree>
+    <p:extLst>
+      <p:ext uri="{BB962C8B-B14F-4D97-AF65-F5344CB8AC3E}">
+        <p14:creationId xmlns:p14="http://schemas.microsoft.com/office/powerpoint/2010/main" val="3532846639"/>
       </p:ext>
     </p:extLst>
   </p:cSld>
@@ -6182,7 +10740,7 @@
         <p:cNvPr id="1" name="">
           <a:extLst>
             <a:ext uri="{FF2B5EF4-FFF2-40B4-BE49-F238E27FC236}">
-              <a16:creationId xmlns:a16="http://schemas.microsoft.com/office/drawing/2014/main" id="{6802D139-FCA3-7A77-170A-9C7BD6F0913A}"/>
+              <a16:creationId xmlns:a16="http://schemas.microsoft.com/office/drawing/2014/main" id="{38E545A1-7630-5BC7-F46A-98B9C47FC85C}"/>
             </a:ext>
           </a:extLst>
         </p:cNvPr>
@@ -6202,7 +10760,7 @@
           <p:cNvPr id="5" name="Imagem 4">
             <a:extLst>
               <a:ext uri="{FF2B5EF4-FFF2-40B4-BE49-F238E27FC236}">
-                <a16:creationId xmlns:a16="http://schemas.microsoft.com/office/drawing/2014/main" id="{E35B40CF-27D2-5913-E42F-18006945F771}"/>
+                <a16:creationId xmlns:a16="http://schemas.microsoft.com/office/drawing/2014/main" id="{DB10DA72-9327-3BAA-CA49-3834917DDDE4}"/>
               </a:ext>
             </a:extLst>
           </p:cNvPr>
@@ -6225,7 +10783,7 @@
         </p:blipFill>
         <p:spPr>
           <a:xfrm>
-            <a:off x="0" y="0"/>
+            <a:off x="-61546" y="0"/>
             <a:ext cx="12192000" cy="6858000"/>
           </a:xfrm>
           <a:prstGeom prst="rect">
@@ -6233,256 +10791,447 @@
           </a:prstGeom>
         </p:spPr>
       </p:pic>
-      <p:pic>
-        <p:nvPicPr>
-          <p:cNvPr id="4" name="Imagem 3" descr="Interface gráfica do usuário, Texto, Aplicativo&#10;&#10;O conteúdo gerado por IA pode estar incorreto.">
-            <a:extLst>
-              <a:ext uri="{FF2B5EF4-FFF2-40B4-BE49-F238E27FC236}">
-                <a16:creationId xmlns:a16="http://schemas.microsoft.com/office/drawing/2014/main" id="{FC82F101-46D0-6AFC-72F6-2E9AECB00CD7}"/>
-              </a:ext>
-            </a:extLst>
-          </p:cNvPr>
-          <p:cNvPicPr>
-            <a:picLocks noChangeAspect="1"/>
-          </p:cNvPicPr>
+      <p:sp>
+        <p:nvSpPr>
+          <p:cNvPr id="2" name="CaixaDeTexto 1">
+            <a:extLst>
+              <a:ext uri="{FF2B5EF4-FFF2-40B4-BE49-F238E27FC236}">
+                <a16:creationId xmlns:a16="http://schemas.microsoft.com/office/drawing/2014/main" id="{1BFA5564-D17C-FC1C-7B8A-925DF9D58BA9}"/>
+              </a:ext>
+            </a:extLst>
+          </p:cNvPr>
+          <p:cNvSpPr txBox="1"/>
           <p:nvPr/>
-        </p:nvPicPr>
-        <p:blipFill>
-          <a:blip r:embed="rId3"/>
-          <a:stretch>
-            <a:fillRect/>
-          </a:stretch>
-        </p:blipFill>
+        </p:nvSpPr>
         <p:spPr>
           <a:xfrm>
-            <a:off x="1106901" y="331795"/>
-            <a:ext cx="2870600" cy="2152950"/>
+            <a:off x="4806553" y="220160"/>
+            <a:ext cx="2455801" cy="646331"/>
           </a:xfrm>
           <a:prstGeom prst="rect">
             <a:avLst/>
           </a:prstGeom>
-        </p:spPr>
-      </p:pic>
-      <p:pic>
-        <p:nvPicPr>
-          <p:cNvPr id="7" name="Imagem 6" descr="Tabela&#10;&#10;O conteúdo gerado por IA pode estar incorreto.">
-            <a:extLst>
-              <a:ext uri="{FF2B5EF4-FFF2-40B4-BE49-F238E27FC236}">
-                <a16:creationId xmlns:a16="http://schemas.microsoft.com/office/drawing/2014/main" id="{7B76D030-F957-6AEC-A976-EBD91BFF1AFD}"/>
-              </a:ext>
-            </a:extLst>
-          </p:cNvPr>
-          <p:cNvPicPr>
-            <a:picLocks noChangeAspect="1"/>
-          </p:cNvPicPr>
+          <a:noFill/>
+        </p:spPr>
+        <p:txBody>
+          <a:bodyPr wrap="square" rtlCol="0">
+            <a:spAutoFit/>
+          </a:bodyPr>
+          <a:lstStyle/>
+          <a:p>
+            <a:r>
+              <a:rPr lang="en-US" sz="3600" dirty="0"/>
+              <a:t>Role (Papel)</a:t>
+            </a:r>
+            <a:endParaRPr lang="pt-BR" sz="3600" dirty="0"/>
+          </a:p>
+        </p:txBody>
+      </p:sp>
+      <p:sp>
+        <p:nvSpPr>
+          <p:cNvPr id="3" name="CaixaDeTexto 2">
+            <a:extLst>
+              <a:ext uri="{FF2B5EF4-FFF2-40B4-BE49-F238E27FC236}">
+                <a16:creationId xmlns:a16="http://schemas.microsoft.com/office/drawing/2014/main" id="{E547DC9D-5758-48D8-5349-0A0F2CDC9034}"/>
+              </a:ext>
+            </a:extLst>
+          </p:cNvPr>
+          <p:cNvSpPr txBox="1"/>
           <p:nvPr/>
-        </p:nvPicPr>
-        <p:blipFill>
-          <a:blip r:embed="rId4"/>
-          <a:stretch>
-            <a:fillRect/>
-          </a:stretch>
-        </p:blipFill>
+        </p:nvSpPr>
         <p:spPr>
           <a:xfrm>
-            <a:off x="1106901" y="3812049"/>
-            <a:ext cx="2838846" cy="2152950"/>
+            <a:off x="756138" y="1086650"/>
+            <a:ext cx="10955215" cy="707886"/>
           </a:xfrm>
           <a:prstGeom prst="rect">
             <a:avLst/>
           </a:prstGeom>
-        </p:spPr>
-      </p:pic>
-      <p:pic>
-        <p:nvPicPr>
-          <p:cNvPr id="9" name="Imagem 8" descr="Interface gráfica do usuário, Texto, Aplicativo, Email&#10;&#10;O conteúdo gerado por IA pode estar incorreto.">
-            <a:extLst>
-              <a:ext uri="{FF2B5EF4-FFF2-40B4-BE49-F238E27FC236}">
-                <a16:creationId xmlns:a16="http://schemas.microsoft.com/office/drawing/2014/main" id="{2D401DA5-AE98-01C4-4556-A99BC2255862}"/>
-              </a:ext>
-            </a:extLst>
-          </p:cNvPr>
-          <p:cNvPicPr>
-            <a:picLocks noChangeAspect="1"/>
-          </p:cNvPicPr>
+          <a:noFill/>
+        </p:spPr>
+        <p:txBody>
+          <a:bodyPr wrap="square" rtlCol="0">
+            <a:spAutoFit/>
+          </a:bodyPr>
+          <a:lstStyle/>
+          <a:p>
+            <a:pPr algn="ctr"/>
+            <a:r>
+              <a:rPr lang="pt-BR" sz="2000" dirty="0"/>
+              <a:t>Conjuntos nomeados de privilégios que funcionam como "</a:t>
+            </a:r>
+            <a:r>
+              <a:rPr lang="pt-BR" sz="2000" dirty="0" err="1"/>
+              <a:t>templates</a:t>
+            </a:r>
+            <a:r>
+              <a:rPr lang="pt-BR" sz="2000" dirty="0"/>
+              <a:t>" de acesso, facilitando a gestão de permissões em larga escala</a:t>
+            </a:r>
+            <a:endParaRPr lang="en-US" sz="2000" u="sng" dirty="0"/>
+          </a:p>
+        </p:txBody>
+      </p:sp>
+      <p:sp>
+        <p:nvSpPr>
+          <p:cNvPr id="4" name="CaixaDeTexto 3">
+            <a:extLst>
+              <a:ext uri="{FF2B5EF4-FFF2-40B4-BE49-F238E27FC236}">
+                <a16:creationId xmlns:a16="http://schemas.microsoft.com/office/drawing/2014/main" id="{D162F623-78D7-D8DA-B284-88FE05B7A6BC}"/>
+              </a:ext>
+            </a:extLst>
+          </p:cNvPr>
+          <p:cNvSpPr txBox="1"/>
           <p:nvPr/>
-        </p:nvPicPr>
-        <p:blipFill>
-          <a:blip r:embed="rId5"/>
-          <a:stretch>
-            <a:fillRect/>
-          </a:stretch>
-        </p:blipFill>
+        </p:nvSpPr>
         <p:spPr>
           <a:xfrm>
-            <a:off x="5084402" y="1564511"/>
-            <a:ext cx="6375347" cy="3728977"/>
+            <a:off x="958362" y="2180492"/>
+            <a:ext cx="10550769" cy="3970318"/>
           </a:xfrm>
           <a:prstGeom prst="rect">
             <a:avLst/>
           </a:prstGeom>
-        </p:spPr>
-      </p:pic>
-      <p:sp>
-        <p:nvSpPr>
-          <p:cNvPr id="14" name="Retângulo: Cantos Arredondados 13">
-            <a:extLst>
-              <a:ext uri="{FF2B5EF4-FFF2-40B4-BE49-F238E27FC236}">
-                <a16:creationId xmlns:a16="http://schemas.microsoft.com/office/drawing/2014/main" id="{5D3D6BF2-05FB-B581-144B-1B79375C1B63}"/>
-              </a:ext>
-            </a:extLst>
-          </p:cNvPr>
-          <p:cNvSpPr/>
-          <p:nvPr/>
-        </p:nvSpPr>
-        <p:spPr>
-          <a:xfrm>
-            <a:off x="1301262" y="1204546"/>
-            <a:ext cx="2004646" cy="325316"/>
-          </a:xfrm>
-          <a:prstGeom prst="roundRect">
-            <a:avLst/>
-          </a:prstGeom>
-          <a:solidFill>
-            <a:schemeClr val="accent5">
-              <a:alpha val="50000"/>
-            </a:schemeClr>
-          </a:solidFill>
-          <a:ln>
-            <a:noFill/>
-          </a:ln>
-        </p:spPr>
-        <p:style>
-          <a:lnRef idx="0">
-            <a:scrgbClr r="0" g="0" b="0"/>
-          </a:lnRef>
-          <a:fillRef idx="0">
-            <a:scrgbClr r="0" g="0" b="0"/>
-          </a:fillRef>
-          <a:effectRef idx="0">
-            <a:scrgbClr r="0" g="0" b="0"/>
-          </a:effectRef>
-          <a:fontRef idx="minor">
-            <a:schemeClr val="lt1"/>
-          </a:fontRef>
-        </p:style>
-        <p:txBody>
-          <a:bodyPr rtlCol="0" anchor="ctr"/>
+          <a:noFill/>
+        </p:spPr>
+        <p:txBody>
+          <a:bodyPr wrap="square" rtlCol="0">
+            <a:spAutoFit/>
+          </a:bodyPr>
           <a:lstStyle/>
           <a:p>
             <a:pPr algn="ctr"/>
-            <a:endParaRPr lang="pt-BR"/>
-          </a:p>
-        </p:txBody>
-      </p:sp>
-      <p:sp>
-        <p:nvSpPr>
-          <p:cNvPr id="15" name="Retângulo: Cantos Arredondados 14">
-            <a:extLst>
-              <a:ext uri="{FF2B5EF4-FFF2-40B4-BE49-F238E27FC236}">
-                <a16:creationId xmlns:a16="http://schemas.microsoft.com/office/drawing/2014/main" id="{BB338F0C-9321-CC9E-AB82-B33302CA6C1D}"/>
-              </a:ext>
-            </a:extLst>
-          </p:cNvPr>
-          <p:cNvSpPr/>
-          <p:nvPr/>
-        </p:nvSpPr>
-        <p:spPr>
-          <a:xfrm>
-            <a:off x="1186032" y="5521569"/>
-            <a:ext cx="2119876" cy="263769"/>
-          </a:xfrm>
-          <a:prstGeom prst="roundRect">
-            <a:avLst/>
-          </a:prstGeom>
-          <a:solidFill>
-            <a:schemeClr val="accent5">
-              <a:alpha val="50000"/>
-            </a:schemeClr>
-          </a:solidFill>
-          <a:ln>
-            <a:noFill/>
-          </a:ln>
-        </p:spPr>
-        <p:style>
-          <a:lnRef idx="0">
-            <a:scrgbClr r="0" g="0" b="0"/>
-          </a:lnRef>
-          <a:fillRef idx="0">
-            <a:scrgbClr r="0" g="0" b="0"/>
-          </a:fillRef>
-          <a:effectRef idx="0">
-            <a:scrgbClr r="0" g="0" b="0"/>
-          </a:effectRef>
-          <a:fontRef idx="minor">
-            <a:schemeClr val="lt1"/>
-          </a:fontRef>
-        </p:style>
-        <p:txBody>
-          <a:bodyPr rtlCol="0" anchor="ctr"/>
-          <a:lstStyle/>
+            <a:r>
+              <a:rPr lang="pt-BR" sz="2800" dirty="0">
+                <a:solidFill>
+                  <a:schemeClr val="tx1">
+                    <a:lumMod val="50000"/>
+                    <a:lumOff val="50000"/>
+                  </a:schemeClr>
+                </a:solidFill>
+              </a:rPr>
+              <a:t>CREATE ROLE ‘</a:t>
+            </a:r>
+            <a:r>
+              <a:rPr lang="pt-BR" sz="2800" dirty="0" err="1">
+                <a:solidFill>
+                  <a:schemeClr val="tx1">
+                    <a:lumMod val="50000"/>
+                    <a:lumOff val="50000"/>
+                  </a:schemeClr>
+                </a:solidFill>
+              </a:rPr>
+              <a:t>nomeRole</a:t>
+            </a:r>
+            <a:r>
+              <a:rPr lang="pt-BR" sz="2800" dirty="0">
+                <a:solidFill>
+                  <a:schemeClr val="tx1">
+                    <a:lumMod val="50000"/>
+                    <a:lumOff val="50000"/>
+                  </a:schemeClr>
+                </a:solidFill>
+              </a:rPr>
+              <a:t>’;</a:t>
+            </a:r>
+          </a:p>
           <a:p>
             <a:pPr algn="ctr"/>
-            <a:endParaRPr lang="pt-BR"/>
-          </a:p>
-        </p:txBody>
-      </p:sp>
-      <p:sp>
-        <p:nvSpPr>
-          <p:cNvPr id="16" name="Retângulo: Cantos Arredondados 15">
-            <a:extLst>
-              <a:ext uri="{FF2B5EF4-FFF2-40B4-BE49-F238E27FC236}">
-                <a16:creationId xmlns:a16="http://schemas.microsoft.com/office/drawing/2014/main" id="{F2E96E51-6609-462F-226F-ABF13AAA66BA}"/>
-              </a:ext>
-            </a:extLst>
-          </p:cNvPr>
-          <p:cNvSpPr/>
-          <p:nvPr/>
-        </p:nvSpPr>
-        <p:spPr>
-          <a:xfrm>
-            <a:off x="7411915" y="1758462"/>
-            <a:ext cx="967154" cy="193430"/>
-          </a:xfrm>
-          <a:prstGeom prst="roundRect">
-            <a:avLst/>
-          </a:prstGeom>
-          <a:solidFill>
-            <a:schemeClr val="accent5">
-              <a:alpha val="50000"/>
-            </a:schemeClr>
-          </a:solidFill>
-          <a:ln>
-            <a:noFill/>
-          </a:ln>
-        </p:spPr>
-        <p:style>
-          <a:lnRef idx="0">
-            <a:scrgbClr r="0" g="0" b="0"/>
-          </a:lnRef>
-          <a:fillRef idx="0">
-            <a:scrgbClr r="0" g="0" b="0"/>
-          </a:fillRef>
-          <a:effectRef idx="0">
-            <a:scrgbClr r="0" g="0" b="0"/>
-          </a:effectRef>
-          <a:fontRef idx="minor">
-            <a:schemeClr val="lt1"/>
-          </a:fontRef>
-        </p:style>
-        <p:txBody>
-          <a:bodyPr rtlCol="0" anchor="ctr"/>
-          <a:lstStyle/>
+            <a:endParaRPr lang="pt-BR" sz="2800" dirty="0"/>
+          </a:p>
           <a:p>
             <a:pPr algn="ctr"/>
-            <a:endParaRPr lang="pt-BR"/>
+            <a:r>
+              <a:rPr lang="en-US" sz="2800" dirty="0">
+                <a:solidFill>
+                  <a:schemeClr val="tx1">
+                    <a:lumMod val="50000"/>
+                    <a:lumOff val="50000"/>
+                  </a:schemeClr>
+                </a:solidFill>
+              </a:rPr>
+              <a:t>GRANT [</a:t>
+            </a:r>
+            <a:r>
+              <a:rPr lang="en-US" sz="2800" dirty="0" err="1">
+                <a:solidFill>
+                  <a:schemeClr val="tx1">
+                    <a:lumMod val="50000"/>
+                    <a:lumOff val="50000"/>
+                  </a:schemeClr>
+                </a:solidFill>
+              </a:rPr>
+              <a:t>comandos</a:t>
+            </a:r>
+            <a:r>
+              <a:rPr lang="en-US" sz="2800" dirty="0">
+                <a:solidFill>
+                  <a:schemeClr val="tx1">
+                    <a:lumMod val="50000"/>
+                    <a:lumOff val="50000"/>
+                  </a:schemeClr>
+                </a:solidFill>
+              </a:rPr>
+              <a:t>] ON [database].[</a:t>
+            </a:r>
+            <a:r>
+              <a:rPr lang="en-US" sz="2800" dirty="0" err="1">
+                <a:solidFill>
+                  <a:schemeClr val="tx1">
+                    <a:lumMod val="50000"/>
+                    <a:lumOff val="50000"/>
+                  </a:schemeClr>
+                </a:solidFill>
+              </a:rPr>
+              <a:t>tabela</a:t>
+            </a:r>
+            <a:r>
+              <a:rPr lang="en-US" sz="2800" dirty="0">
+                <a:solidFill>
+                  <a:schemeClr val="tx1">
+                    <a:lumMod val="50000"/>
+                    <a:lumOff val="50000"/>
+                  </a:schemeClr>
+                </a:solidFill>
+              </a:rPr>
+              <a:t>] TO ‘</a:t>
+            </a:r>
+            <a:r>
+              <a:rPr lang="en-US" sz="2800" dirty="0" err="1">
+                <a:solidFill>
+                  <a:schemeClr val="tx1">
+                    <a:lumMod val="50000"/>
+                    <a:lumOff val="50000"/>
+                  </a:schemeClr>
+                </a:solidFill>
+              </a:rPr>
+              <a:t>nomeRole</a:t>
+            </a:r>
+            <a:r>
+              <a:rPr lang="en-US" sz="2800" dirty="0">
+                <a:solidFill>
+                  <a:schemeClr val="tx1">
+                    <a:lumMod val="50000"/>
+                    <a:lumOff val="50000"/>
+                  </a:schemeClr>
+                </a:solidFill>
+              </a:rPr>
+              <a:t>’;</a:t>
+            </a:r>
+          </a:p>
+          <a:p>
+            <a:pPr algn="ctr"/>
+            <a:endParaRPr lang="en-US" sz="2800" dirty="0">
+              <a:solidFill>
+                <a:schemeClr val="tx1">
+                  <a:lumMod val="50000"/>
+                  <a:lumOff val="50000"/>
+                </a:schemeClr>
+              </a:solidFill>
+            </a:endParaRPr>
+          </a:p>
+          <a:p>
+            <a:pPr algn="ctr"/>
+            <a:r>
+              <a:rPr lang="en-US" sz="2800" dirty="0">
+                <a:solidFill>
+                  <a:schemeClr val="tx1">
+                    <a:lumMod val="50000"/>
+                    <a:lumOff val="50000"/>
+                  </a:schemeClr>
+                </a:solidFill>
+              </a:rPr>
+              <a:t>CREATE USER ‘</a:t>
+            </a:r>
+            <a:r>
+              <a:rPr lang="en-US" sz="2800" dirty="0" err="1">
+                <a:solidFill>
+                  <a:schemeClr val="tx1">
+                    <a:lumMod val="50000"/>
+                    <a:lumOff val="50000"/>
+                  </a:schemeClr>
+                </a:solidFill>
+              </a:rPr>
+              <a:t>nomeUsuario</a:t>
+            </a:r>
+            <a:r>
+              <a:rPr lang="en-US" sz="2800" dirty="0">
+                <a:solidFill>
+                  <a:schemeClr val="tx1">
+                    <a:lumMod val="50000"/>
+                    <a:lumOff val="50000"/>
+                  </a:schemeClr>
+                </a:solidFill>
+              </a:rPr>
+              <a:t>’@’</a:t>
+            </a:r>
+            <a:r>
+              <a:rPr lang="en-US" sz="2800" dirty="0" err="1">
+                <a:solidFill>
+                  <a:schemeClr val="tx1">
+                    <a:lumMod val="50000"/>
+                    <a:lumOff val="50000"/>
+                  </a:schemeClr>
+                </a:solidFill>
+              </a:rPr>
+              <a:t>ip</a:t>
+            </a:r>
+            <a:r>
+              <a:rPr lang="en-US" sz="2800" dirty="0">
+                <a:solidFill>
+                  <a:schemeClr val="tx1">
+                    <a:lumMod val="50000"/>
+                    <a:lumOff val="50000"/>
+                  </a:schemeClr>
+                </a:solidFill>
+              </a:rPr>
+              <a:t>’ IDENTIFIED BY ‘</a:t>
+            </a:r>
+            <a:r>
+              <a:rPr lang="en-US" sz="2800" dirty="0" err="1">
+                <a:solidFill>
+                  <a:schemeClr val="tx1">
+                    <a:lumMod val="50000"/>
+                    <a:lumOff val="50000"/>
+                  </a:schemeClr>
+                </a:solidFill>
+              </a:rPr>
+              <a:t>senha</a:t>
+            </a:r>
+            <a:r>
+              <a:rPr lang="en-US" sz="2800" dirty="0">
+                <a:solidFill>
+                  <a:schemeClr val="tx1">
+                    <a:lumMod val="50000"/>
+                    <a:lumOff val="50000"/>
+                  </a:schemeClr>
+                </a:solidFill>
+              </a:rPr>
+              <a:t>’;</a:t>
+            </a:r>
+          </a:p>
+          <a:p>
+            <a:pPr algn="ctr"/>
+            <a:endParaRPr lang="en-US" sz="2800" dirty="0">
+              <a:solidFill>
+                <a:schemeClr val="tx1">
+                  <a:lumMod val="50000"/>
+                  <a:lumOff val="50000"/>
+                </a:schemeClr>
+              </a:solidFill>
+            </a:endParaRPr>
+          </a:p>
+          <a:p>
+            <a:pPr algn="ctr"/>
+            <a:r>
+              <a:rPr lang="it-IT" sz="2800" dirty="0">
+                <a:solidFill>
+                  <a:schemeClr val="tx1">
+                    <a:lumMod val="50000"/>
+                    <a:lumOff val="50000"/>
+                  </a:schemeClr>
+                </a:solidFill>
+              </a:rPr>
+              <a:t>GRANT ‘nomeRole’ TO ‘nomeUsuario’@’ip’;</a:t>
+            </a:r>
+          </a:p>
+          <a:p>
+            <a:pPr algn="ctr"/>
+            <a:endParaRPr lang="it-IT" sz="2800" dirty="0">
+              <a:solidFill>
+                <a:schemeClr val="tx1">
+                  <a:lumMod val="50000"/>
+                  <a:lumOff val="50000"/>
+                </a:schemeClr>
+              </a:solidFill>
+            </a:endParaRPr>
+          </a:p>
+          <a:p>
+            <a:pPr algn="ctr"/>
+            <a:r>
+              <a:rPr lang="pt-BR" sz="2800" dirty="0">
+                <a:solidFill>
+                  <a:schemeClr val="tx1">
+                    <a:lumMod val="50000"/>
+                    <a:lumOff val="50000"/>
+                  </a:schemeClr>
+                </a:solidFill>
+              </a:rPr>
+              <a:t>SET DEFAULT ROLE ‘</a:t>
+            </a:r>
+            <a:r>
+              <a:rPr lang="pt-BR" sz="2800" dirty="0" err="1">
+                <a:solidFill>
+                  <a:schemeClr val="tx1">
+                    <a:lumMod val="50000"/>
+                    <a:lumOff val="50000"/>
+                  </a:schemeClr>
+                </a:solidFill>
+              </a:rPr>
+              <a:t>nomeRole</a:t>
+            </a:r>
+            <a:r>
+              <a:rPr lang="pt-BR" sz="2800" dirty="0">
+                <a:solidFill>
+                  <a:schemeClr val="tx1">
+                    <a:lumMod val="50000"/>
+                    <a:lumOff val="50000"/>
+                  </a:schemeClr>
+                </a:solidFill>
+              </a:rPr>
+              <a:t>’ TO ‘</a:t>
+            </a:r>
+            <a:r>
+              <a:rPr lang="pt-BR" sz="2800" dirty="0" err="1">
+                <a:solidFill>
+                  <a:schemeClr val="tx1">
+                    <a:lumMod val="50000"/>
+                    <a:lumOff val="50000"/>
+                  </a:schemeClr>
+                </a:solidFill>
+              </a:rPr>
+              <a:t>nomeUsuario</a:t>
+            </a:r>
+            <a:r>
+              <a:rPr lang="pt-BR" sz="2800" dirty="0">
+                <a:solidFill>
+                  <a:schemeClr val="tx1">
+                    <a:lumMod val="50000"/>
+                    <a:lumOff val="50000"/>
+                  </a:schemeClr>
+                </a:solidFill>
+              </a:rPr>
+              <a:t>’@’</a:t>
+            </a:r>
+            <a:r>
+              <a:rPr lang="pt-BR" sz="2800" dirty="0" err="1">
+                <a:solidFill>
+                  <a:schemeClr val="tx1">
+                    <a:lumMod val="50000"/>
+                    <a:lumOff val="50000"/>
+                  </a:schemeClr>
+                </a:solidFill>
+              </a:rPr>
+              <a:t>ip</a:t>
+            </a:r>
+            <a:r>
+              <a:rPr lang="pt-BR" sz="2800" dirty="0">
+                <a:solidFill>
+                  <a:schemeClr val="tx1">
+                    <a:lumMod val="50000"/>
+                    <a:lumOff val="50000"/>
+                  </a:schemeClr>
+                </a:solidFill>
+              </a:rPr>
+              <a:t>’;</a:t>
+            </a:r>
           </a:p>
         </p:txBody>
       </p:sp>
     </p:spTree>
     <p:extLst>
       <p:ext uri="{BB962C8B-B14F-4D97-AF65-F5344CB8AC3E}">
-        <p14:creationId xmlns:p14="http://schemas.microsoft.com/office/powerpoint/2010/main" val="2266546223"/>
+        <p14:creationId xmlns:p14="http://schemas.microsoft.com/office/powerpoint/2010/main" val="1917684490"/>
       </p:ext>
     </p:extLst>
   </p:cSld>

--- a/Aula 06/ComandosDCL.pptx
+++ b/Aula 06/ComandosDCL.pptx
@@ -281,7 +281,7 @@
           <a:p>
             <a:fld id="{1C45F205-BC06-4923-AE40-F9637F79EC90}" type="datetimeFigureOut">
               <a:rPr lang="pt-BR" smtClean="0"/>
-              <a:t>18/03/2026</a:t>
+              <a:t>16/04/2026</a:t>
             </a:fld>
             <a:endParaRPr lang="pt-BR"/>
           </a:p>
@@ -479,7 +479,7 @@
           <a:p>
             <a:fld id="{1C45F205-BC06-4923-AE40-F9637F79EC90}" type="datetimeFigureOut">
               <a:rPr lang="pt-BR" smtClean="0"/>
-              <a:t>18/03/2026</a:t>
+              <a:t>16/04/2026</a:t>
             </a:fld>
             <a:endParaRPr lang="pt-BR"/>
           </a:p>
@@ -687,7 +687,7 @@
           <a:p>
             <a:fld id="{1C45F205-BC06-4923-AE40-F9637F79EC90}" type="datetimeFigureOut">
               <a:rPr lang="pt-BR" smtClean="0"/>
-              <a:t>18/03/2026</a:t>
+              <a:t>16/04/2026</a:t>
             </a:fld>
             <a:endParaRPr lang="pt-BR"/>
           </a:p>
@@ -885,7 +885,7 @@
           <a:p>
             <a:fld id="{1C45F205-BC06-4923-AE40-F9637F79EC90}" type="datetimeFigureOut">
               <a:rPr lang="pt-BR" smtClean="0"/>
-              <a:t>18/03/2026</a:t>
+              <a:t>16/04/2026</a:t>
             </a:fld>
             <a:endParaRPr lang="pt-BR"/>
           </a:p>
@@ -1160,7 +1160,7 @@
           <a:p>
             <a:fld id="{1C45F205-BC06-4923-AE40-F9637F79EC90}" type="datetimeFigureOut">
               <a:rPr lang="pt-BR" smtClean="0"/>
-              <a:t>18/03/2026</a:t>
+              <a:t>16/04/2026</a:t>
             </a:fld>
             <a:endParaRPr lang="pt-BR"/>
           </a:p>
@@ -1425,7 +1425,7 @@
           <a:p>
             <a:fld id="{1C45F205-BC06-4923-AE40-F9637F79EC90}" type="datetimeFigureOut">
               <a:rPr lang="pt-BR" smtClean="0"/>
-              <a:t>18/03/2026</a:t>
+              <a:t>16/04/2026</a:t>
             </a:fld>
             <a:endParaRPr lang="pt-BR"/>
           </a:p>
@@ -1837,7 +1837,7 @@
           <a:p>
             <a:fld id="{1C45F205-BC06-4923-AE40-F9637F79EC90}" type="datetimeFigureOut">
               <a:rPr lang="pt-BR" smtClean="0"/>
-              <a:t>18/03/2026</a:t>
+              <a:t>16/04/2026</a:t>
             </a:fld>
             <a:endParaRPr lang="pt-BR"/>
           </a:p>
@@ -1978,7 +1978,7 @@
           <a:p>
             <a:fld id="{1C45F205-BC06-4923-AE40-F9637F79EC90}" type="datetimeFigureOut">
               <a:rPr lang="pt-BR" smtClean="0"/>
-              <a:t>18/03/2026</a:t>
+              <a:t>16/04/2026</a:t>
             </a:fld>
             <a:endParaRPr lang="pt-BR"/>
           </a:p>
@@ -2091,7 +2091,7 @@
           <a:p>
             <a:fld id="{1C45F205-BC06-4923-AE40-F9637F79EC90}" type="datetimeFigureOut">
               <a:rPr lang="pt-BR" smtClean="0"/>
-              <a:t>18/03/2026</a:t>
+              <a:t>16/04/2026</a:t>
             </a:fld>
             <a:endParaRPr lang="pt-BR"/>
           </a:p>
@@ -2402,7 +2402,7 @@
           <a:p>
             <a:fld id="{1C45F205-BC06-4923-AE40-F9637F79EC90}" type="datetimeFigureOut">
               <a:rPr lang="pt-BR" smtClean="0"/>
-              <a:t>18/03/2026</a:t>
+              <a:t>16/04/2026</a:t>
             </a:fld>
             <a:endParaRPr lang="pt-BR"/>
           </a:p>
@@ -2690,7 +2690,7 @@
           <a:p>
             <a:fld id="{1C45F205-BC06-4923-AE40-F9637F79EC90}" type="datetimeFigureOut">
               <a:rPr lang="pt-BR" smtClean="0"/>
-              <a:t>18/03/2026</a:t>
+              <a:t>16/04/2026</a:t>
             </a:fld>
             <a:endParaRPr lang="pt-BR"/>
           </a:p>
@@ -2931,7 +2931,7 @@
           <a:p>
             <a:fld id="{1C45F205-BC06-4923-AE40-F9637F79EC90}" type="datetimeFigureOut">
               <a:rPr lang="pt-BR" smtClean="0"/>
-              <a:t>18/03/2026</a:t>
+              <a:t>16/04/2026</a:t>
             </a:fld>
             <a:endParaRPr lang="pt-BR"/>
           </a:p>
@@ -7391,15 +7391,6 @@
               <a:srgbClr val="FFFFFF"/>
             </a:contourClr>
           </a:sp3d>
-          <a:extLst>
-            <a:ext uri="{909E8E84-426E-40DD-AFC4-6F175D3DCCD1}">
-              <a14:hiddenFill xmlns:a14="http://schemas.microsoft.com/office/drawing/2010/main">
-                <a:solidFill>
-                  <a:srgbClr val="FFFFFF"/>
-                </a:solidFill>
-              </a14:hiddenFill>
-            </a:ext>
-          </a:extLst>
         </p:spPr>
       </p:pic>
       <p:pic>
@@ -8071,62 +8062,6 @@
               <a:t> SQL</a:t>
             </a:r>
             <a:endParaRPr lang="pt-BR" sz="3600" dirty="0"/>
-          </a:p>
-        </p:txBody>
-      </p:sp>
-      <p:sp>
-        <p:nvSpPr>
-          <p:cNvPr id="7" name="Símbolo de &quot;Não Permitido&quot; 6">
-            <a:extLst>
-              <a:ext uri="{FF2B5EF4-FFF2-40B4-BE49-F238E27FC236}">
-                <a16:creationId xmlns:a16="http://schemas.microsoft.com/office/drawing/2014/main" id="{AF4F76FA-5614-227F-C3F8-222E32F0BDFE}"/>
-              </a:ext>
-            </a:extLst>
-          </p:cNvPr>
-          <p:cNvSpPr/>
-          <p:nvPr/>
-        </p:nvSpPr>
-        <p:spPr>
-          <a:xfrm>
-            <a:off x="7765806" y="1855177"/>
-            <a:ext cx="2347546" cy="1784839"/>
-          </a:xfrm>
-          <a:prstGeom prst="noSmoking">
-            <a:avLst/>
-          </a:prstGeom>
-          <a:solidFill>
-            <a:schemeClr val="accent2">
-              <a:alpha val="50000"/>
-            </a:schemeClr>
-          </a:solidFill>
-          <a:ln>
-            <a:noFill/>
-          </a:ln>
-        </p:spPr>
-        <p:style>
-          <a:lnRef idx="0">
-            <a:scrgbClr r="0" g="0" b="0"/>
-          </a:lnRef>
-          <a:fillRef idx="0">
-            <a:scrgbClr r="0" g="0" b="0"/>
-          </a:fillRef>
-          <a:effectRef idx="0">
-            <a:scrgbClr r="0" g="0" b="0"/>
-          </a:effectRef>
-          <a:fontRef idx="minor">
-            <a:schemeClr val="lt1"/>
-          </a:fontRef>
-        </p:style>
-        <p:txBody>
-          <a:bodyPr rtlCol="0" anchor="ctr"/>
-          <a:lstStyle/>
-          <a:p>
-            <a:pPr algn="ctr"/>
-            <a:endParaRPr lang="pt-BR">
-              <a:solidFill>
-                <a:schemeClr val="tx1"/>
-              </a:solidFill>
-            </a:endParaRPr>
           </a:p>
         </p:txBody>
       </p:sp>
